--- a/DAEN460S26/week3.pptx
+++ b/DAEN460S26/week3.pptx
@@ -5,7 +5,7 @@
     <p:sldMasterId id="2147483660" r:id="rId1"/>
   </p:sldMasterIdLst>
   <p:notesMasterIdLst>
-    <p:notesMasterId r:id="rId35"/>
+    <p:notesMasterId r:id="rId36"/>
   </p:notesMasterIdLst>
   <p:sldIdLst>
     <p:sldId id="256" r:id="rId2"/>
@@ -22,25 +22,26 @@
     <p:sldId id="265" r:id="rId13"/>
     <p:sldId id="266" r:id="rId14"/>
     <p:sldId id="267" r:id="rId15"/>
-    <p:sldId id="268" r:id="rId16"/>
-    <p:sldId id="283" r:id="rId17"/>
-    <p:sldId id="269" r:id="rId18"/>
-    <p:sldId id="270" r:id="rId19"/>
-    <p:sldId id="284" r:id="rId20"/>
-    <p:sldId id="285" r:id="rId21"/>
-    <p:sldId id="287" r:id="rId22"/>
-    <p:sldId id="286" r:id="rId23"/>
-    <p:sldId id="288" r:id="rId24"/>
-    <p:sldId id="271" r:id="rId25"/>
-    <p:sldId id="272" r:id="rId26"/>
-    <p:sldId id="289" r:id="rId27"/>
-    <p:sldId id="273" r:id="rId28"/>
-    <p:sldId id="282" r:id="rId29"/>
-    <p:sldId id="274" r:id="rId30"/>
-    <p:sldId id="275" r:id="rId31"/>
-    <p:sldId id="276" r:id="rId32"/>
-    <p:sldId id="277" r:id="rId33"/>
-    <p:sldId id="278" r:id="rId34"/>
+    <p:sldId id="291" r:id="rId16"/>
+    <p:sldId id="268" r:id="rId17"/>
+    <p:sldId id="283" r:id="rId18"/>
+    <p:sldId id="269" r:id="rId19"/>
+    <p:sldId id="270" r:id="rId20"/>
+    <p:sldId id="284" r:id="rId21"/>
+    <p:sldId id="285" r:id="rId22"/>
+    <p:sldId id="287" r:id="rId23"/>
+    <p:sldId id="286" r:id="rId24"/>
+    <p:sldId id="288" r:id="rId25"/>
+    <p:sldId id="271" r:id="rId26"/>
+    <p:sldId id="272" r:id="rId27"/>
+    <p:sldId id="289" r:id="rId28"/>
+    <p:sldId id="273" r:id="rId29"/>
+    <p:sldId id="282" r:id="rId30"/>
+    <p:sldId id="274" r:id="rId31"/>
+    <p:sldId id="275" r:id="rId32"/>
+    <p:sldId id="276" r:id="rId33"/>
+    <p:sldId id="277" r:id="rId34"/>
+    <p:sldId id="278" r:id="rId35"/>
   </p:sldIdLst>
   <p:sldSz cx="9144000" cy="6858000" type="screen4x3"/>
   <p:notesSz cx="6858000" cy="9144000"/>
@@ -3536,7 +3537,7 @@
         </p:blipFill>
         <p:spPr>
           <a:xfrm>
-            <a:off x="6355643" y="1468261"/>
+            <a:off x="6389933" y="1479691"/>
             <a:ext cx="2686757" cy="2273300"/>
           </a:xfrm>
           <a:prstGeom prst="rect">
@@ -3997,9 +3998,8 @@
     <p:bg>
       <p:bgPr>
         <a:solidFill>
-          <a:schemeClr val="accent6">
-            <a:lumMod val="20000"/>
-            <a:lumOff val="80000"/>
+          <a:schemeClr val="bg1">
+            <a:lumMod val="85000"/>
           </a:schemeClr>
         </a:solidFill>
         <a:effectLst/>
@@ -4105,7 +4105,7 @@
             </a:pPr>
             <a:r>
               <a:rPr lang="en-US" sz="2400" b="1" dirty="0"/>
-              <a:t>You are called a team for a reason</a:t>
+              <a:t>1. You are called a team for a reason</a:t>
             </a:r>
           </a:p>
           <a:p>
@@ -4132,7 +4132,7 @@
             </a:pPr>
             <a:r>
               <a:rPr lang="en-US" sz="2400" b="1" dirty="0"/>
-              <a:t>Share the load</a:t>
+              <a:t>2. Share the load</a:t>
             </a:r>
           </a:p>
           <a:p>
@@ -4197,9 +4197,8 @@
     <p:bg>
       <p:bgPr>
         <a:solidFill>
-          <a:schemeClr val="accent6">
-            <a:lumMod val="20000"/>
-            <a:lumOff val="80000"/>
+          <a:schemeClr val="bg1">
+            <a:lumMod val="85000"/>
           </a:schemeClr>
         </a:solidFill>
         <a:effectLst/>
@@ -4275,7 +4274,7 @@
             </a:pPr>
             <a:r>
               <a:rPr lang="en-US" sz="2400" b="1" dirty="0"/>
-              <a:t>Recognize and acknowledge differences</a:t>
+              <a:t>3. Recognize and acknowledge differences</a:t>
             </a:r>
           </a:p>
           <a:p>
@@ -4302,7 +4301,7 @@
             </a:pPr>
             <a:r>
               <a:rPr lang="en-US" sz="2400" b="1" dirty="0"/>
-              <a:t>If you have difficulty</a:t>
+              <a:t>4. If you have difficulty</a:t>
             </a:r>
           </a:p>
           <a:p>
@@ -4397,7 +4396,9 @@
     <p:bg>
       <p:bgPr>
         <a:solidFill>
-          <a:schemeClr val="bg1"/>
+          <a:schemeClr val="bg1">
+            <a:lumMod val="85000"/>
+          </a:schemeClr>
         </a:solidFill>
         <a:effectLst/>
       </p:bgPr>
@@ -4416,12 +4417,86 @@
           <a:chExt cx="0" cy="0"/>
         </a:xfrm>
       </p:grpSpPr>
+      <p:sp>
+        <p:nvSpPr>
+          <p:cNvPr id="2" name="Title 1">
+            <a:extLst>
+              <a:ext uri="{FF2B5EF4-FFF2-40B4-BE49-F238E27FC236}">
+                <a16:creationId xmlns:a16="http://schemas.microsoft.com/office/drawing/2014/main" id="{9631FDE3-7FEA-E3B3-E369-5324C6A12BE2}"/>
+              </a:ext>
+            </a:extLst>
+          </p:cNvPr>
+          <p:cNvSpPr>
+            <a:spLocks noGrp="1"/>
+          </p:cNvSpPr>
+          <p:nvPr>
+            <p:ph type="title"/>
+          </p:nvPr>
+        </p:nvSpPr>
+        <p:spPr/>
+        <p:txBody>
+          <a:bodyPr/>
+          <a:lstStyle/>
+          <a:p>
+            <a:r>
+              <a:rPr lang="en-US" dirty="0"/>
+              <a:t>            </a:t>
+            </a:r>
+            <a:r>
+              <a:rPr lang="en-US" b="1" dirty="0"/>
+              <a:t>Faculty Advisor</a:t>
+            </a:r>
+          </a:p>
+        </p:txBody>
+      </p:sp>
+      <p:sp>
+        <p:nvSpPr>
+          <p:cNvPr id="3" name="Content Placeholder 2">
+            <a:extLst>
+              <a:ext uri="{FF2B5EF4-FFF2-40B4-BE49-F238E27FC236}">
+                <a16:creationId xmlns:a16="http://schemas.microsoft.com/office/drawing/2014/main" id="{A4A2A165-DE8C-ED87-E697-2FAAB6D90FDF}"/>
+              </a:ext>
+            </a:extLst>
+          </p:cNvPr>
+          <p:cNvSpPr>
+            <a:spLocks noGrp="1"/>
+          </p:cNvSpPr>
+          <p:nvPr>
+            <p:ph idx="1"/>
+          </p:nvPr>
+        </p:nvSpPr>
+        <p:spPr/>
+        <p:txBody>
+          <a:bodyPr>
+            <a:normAutofit/>
+          </a:bodyPr>
+          <a:lstStyle/>
+          <a:p>
+            <a:r>
+              <a:rPr lang="en-US" sz="2400" dirty="0"/>
+              <a:t>If you have not identified yet a potential faculty advisor, do it ASAP!</a:t>
+            </a:r>
+          </a:p>
+          <a:p>
+            <a:r>
+              <a:rPr lang="en-US" sz="2400" dirty="0"/>
+              <a:t>For areas of research interest/expertise, consult the ISEN website, follow research tab to Research Fields.</a:t>
+            </a:r>
+          </a:p>
+          <a:p>
+            <a:r>
+              <a:rPr lang="en-US" sz="2400" dirty="0"/>
+              <a:t>Your project does not need to perfectly align with a professor's research field, but they are more likely to accept if it is something that interests them.</a:t>
+            </a:r>
+          </a:p>
+        </p:txBody>
+      </p:sp>
       <p:pic>
         <p:nvPicPr>
-          <p:cNvPr id="8" name="Picture 7" descr="A cartoon of a child giving a thumbs up&#10;&#10;AI-generated content may be incorrect.">
-            <a:extLst>
-              <a:ext uri="{FF2B5EF4-FFF2-40B4-BE49-F238E27FC236}">
-                <a16:creationId xmlns:a16="http://schemas.microsoft.com/office/drawing/2014/main" id="{9FBEFD4A-B5BF-DE30-96AC-728CCB175A13}"/>
+          <p:cNvPr id="4" name="Picture 3" descr="A group of people with different colors&#10;&#10;AI-generated content may be incorrect.">
+            <a:extLst>
+              <a:ext uri="{FF2B5EF4-FFF2-40B4-BE49-F238E27FC236}">
+                <a16:creationId xmlns:a16="http://schemas.microsoft.com/office/drawing/2014/main" id="{8A330E22-B0E5-34B4-15C8-B270B703227A}"/>
               </a:ext>
             </a:extLst>
           </p:cNvPr>
@@ -4432,106 +4507,6 @@
         </p:nvPicPr>
         <p:blipFill>
           <a:blip r:embed="rId2"/>
-          <a:stretch>
-            <a:fillRect/>
-          </a:stretch>
-        </p:blipFill>
-        <p:spPr>
-          <a:xfrm>
-            <a:off x="564447" y="456802"/>
-            <a:ext cx="1561395" cy="1368823"/>
-          </a:xfrm>
-          <a:prstGeom prst="rect">
-            <a:avLst/>
-          </a:prstGeom>
-        </p:spPr>
-      </p:pic>
-      <p:sp>
-        <p:nvSpPr>
-          <p:cNvPr id="2" name="Title 1">
-            <a:extLst>
-              <a:ext uri="{FF2B5EF4-FFF2-40B4-BE49-F238E27FC236}">
-                <a16:creationId xmlns:a16="http://schemas.microsoft.com/office/drawing/2014/main" id="{9631FDE3-7FEA-E3B3-E369-5324C6A12BE2}"/>
-              </a:ext>
-            </a:extLst>
-          </p:cNvPr>
-          <p:cNvSpPr>
-            <a:spLocks noGrp="1"/>
-          </p:cNvSpPr>
-          <p:nvPr>
-            <p:ph type="title"/>
-          </p:nvPr>
-        </p:nvSpPr>
-        <p:spPr/>
-        <p:txBody>
-          <a:bodyPr/>
-          <a:lstStyle/>
-          <a:p>
-            <a:r>
-              <a:rPr lang="en-US" dirty="0"/>
-              <a:t>         Faculty Advisor</a:t>
-            </a:r>
-          </a:p>
-        </p:txBody>
-      </p:sp>
-      <p:sp>
-        <p:nvSpPr>
-          <p:cNvPr id="3" name="Content Placeholder 2">
-            <a:extLst>
-              <a:ext uri="{FF2B5EF4-FFF2-40B4-BE49-F238E27FC236}">
-                <a16:creationId xmlns:a16="http://schemas.microsoft.com/office/drawing/2014/main" id="{A4A2A165-DE8C-ED87-E697-2FAAB6D90FDF}"/>
-              </a:ext>
-            </a:extLst>
-          </p:cNvPr>
-          <p:cNvSpPr>
-            <a:spLocks noGrp="1"/>
-          </p:cNvSpPr>
-          <p:nvPr>
-            <p:ph idx="1"/>
-          </p:nvPr>
-        </p:nvSpPr>
-        <p:spPr/>
-        <p:txBody>
-          <a:bodyPr>
-            <a:normAutofit/>
-          </a:bodyPr>
-          <a:lstStyle/>
-          <a:p>
-            <a:r>
-              <a:rPr lang="en-US" sz="2400" dirty="0"/>
-              <a:t>If you have not identified and asked a potential faculty advisor, do it ASAP.</a:t>
-            </a:r>
-          </a:p>
-          <a:p>
-            <a:r>
-              <a:rPr lang="en-US" sz="2400" dirty="0"/>
-              <a:t>For areas of research interest/expertise, consult the ISEN website, follow research tab to Research Fields.</a:t>
-            </a:r>
-          </a:p>
-          <a:p>
-            <a:r>
-              <a:rPr lang="en-US" sz="2400" dirty="0"/>
-              <a:t>Your project does not need to perfectly align with a professor's research field, but they are more likely to accept if it is something that interests them.</a:t>
-            </a:r>
-          </a:p>
-        </p:txBody>
-      </p:sp>
-      <p:pic>
-        <p:nvPicPr>
-          <p:cNvPr id="4" name="Picture 3" descr="A group of people with different colors&#10;&#10;AI-generated content may be incorrect.">
-            <a:extLst>
-              <a:ext uri="{FF2B5EF4-FFF2-40B4-BE49-F238E27FC236}">
-                <a16:creationId xmlns:a16="http://schemas.microsoft.com/office/drawing/2014/main" id="{8A330E22-B0E5-34B4-15C8-B270B703227A}"/>
-              </a:ext>
-            </a:extLst>
-          </p:cNvPr>
-          <p:cNvPicPr>
-            <a:picLocks noChangeAspect="1"/>
-          </p:cNvPicPr>
-          <p:nvPr/>
-        </p:nvPicPr>
-        <p:blipFill>
-          <a:blip r:embed="rId3"/>
           <a:stretch>
             <a:fillRect/>
           </a:stretch>
@@ -4575,6 +4550,36 @@
           </a:p>
         </p:txBody>
       </p:sp>
+      <p:pic>
+        <p:nvPicPr>
+          <p:cNvPr id="14" name="Picture 13" descr="A black and white image of a smiley face&#10;&#10;AI-generated content may be incorrect.">
+            <a:extLst>
+              <a:ext uri="{FF2B5EF4-FFF2-40B4-BE49-F238E27FC236}">
+                <a16:creationId xmlns:a16="http://schemas.microsoft.com/office/drawing/2014/main" id="{B71B3CF2-3229-DBA5-7FE8-9E8A17341566}"/>
+              </a:ext>
+            </a:extLst>
+          </p:cNvPr>
+          <p:cNvPicPr>
+            <a:picLocks noChangeAspect="1"/>
+          </p:cNvPicPr>
+          <p:nvPr/>
+        </p:nvPicPr>
+        <p:blipFill>
+          <a:blip r:embed="rId3"/>
+          <a:stretch>
+            <a:fillRect/>
+          </a:stretch>
+        </p:blipFill>
+        <p:spPr>
+          <a:xfrm>
+            <a:off x="281939" y="288977"/>
+            <a:ext cx="1828800" cy="1469180"/>
+          </a:xfrm>
+          <a:prstGeom prst="rect">
+            <a:avLst/>
+          </a:prstGeom>
+        </p:spPr>
+      </p:pic>
     </p:spTree>
     <p:extLst>
       <p:ext uri="{BB962C8B-B14F-4D97-AF65-F5344CB8AC3E}">
@@ -4589,6 +4594,106 @@
 </file>
 
 <file path=ppt/slides/slide15.xml><?xml version="1.0" encoding="utf-8"?>
+<p:sld xmlns:a="http://schemas.openxmlformats.org/drawingml/2006/main" xmlns:r="http://schemas.openxmlformats.org/officeDocument/2006/relationships" xmlns:p="http://schemas.openxmlformats.org/presentationml/2006/main">
+  <p:cSld>
+    <p:bg>
+      <p:bgPr>
+        <a:solidFill>
+          <a:schemeClr val="accent6">
+            <a:lumMod val="40000"/>
+            <a:lumOff val="60000"/>
+          </a:schemeClr>
+        </a:solidFill>
+        <a:effectLst/>
+      </p:bgPr>
+    </p:bg>
+    <p:spTree>
+      <p:nvGrpSpPr>
+        <p:cNvPr id="1" name=""/>
+        <p:cNvGrpSpPr/>
+        <p:nvPr/>
+      </p:nvGrpSpPr>
+      <p:grpSpPr>
+        <a:xfrm>
+          <a:off x="0" y="0"/>
+          <a:ext cx="0" cy="0"/>
+          <a:chOff x="0" y="0"/>
+          <a:chExt cx="0" cy="0"/>
+        </a:xfrm>
+      </p:grpSpPr>
+      <p:sp>
+        <p:nvSpPr>
+          <p:cNvPr id="4" name="Slide Number Placeholder 3">
+            <a:extLst>
+              <a:ext uri="{FF2B5EF4-FFF2-40B4-BE49-F238E27FC236}">
+                <a16:creationId xmlns:a16="http://schemas.microsoft.com/office/drawing/2014/main" id="{D3C819C7-A0A1-298D-B848-D2C447550836}"/>
+              </a:ext>
+            </a:extLst>
+          </p:cNvPr>
+          <p:cNvSpPr>
+            <a:spLocks noGrp="1"/>
+          </p:cNvSpPr>
+          <p:nvPr>
+            <p:ph type="sldNum" sz="quarter" idx="12"/>
+          </p:nvPr>
+        </p:nvSpPr>
+        <p:spPr/>
+        <p:txBody>
+          <a:bodyPr/>
+          <a:lstStyle/>
+          <a:p>
+            <a:fld id="{727B0ACA-53D9-FB44-A37C-A778C10B232A}" type="slidenum">
+              <a:rPr lang="en-US" smtClean="0"/>
+              <a:t>15</a:t>
+            </a:fld>
+            <a:endParaRPr lang="en-US"/>
+          </a:p>
+        </p:txBody>
+      </p:sp>
+      <p:pic>
+        <p:nvPicPr>
+          <p:cNvPr id="6" name="Picture 5" descr="A cartoon character with hands up&#10;&#10;AI-generated content may be incorrect.">
+            <a:extLst>
+              <a:ext uri="{FF2B5EF4-FFF2-40B4-BE49-F238E27FC236}">
+                <a16:creationId xmlns:a16="http://schemas.microsoft.com/office/drawing/2014/main" id="{410C6075-504F-C6FF-1AE0-8184AC8330B3}"/>
+              </a:ext>
+            </a:extLst>
+          </p:cNvPr>
+          <p:cNvPicPr>
+            <a:picLocks noChangeAspect="1"/>
+          </p:cNvPicPr>
+          <p:nvPr/>
+        </p:nvPicPr>
+        <p:blipFill>
+          <a:blip r:embed="rId2"/>
+          <a:stretch>
+            <a:fillRect/>
+          </a:stretch>
+        </p:blipFill>
+        <p:spPr>
+          <a:xfrm>
+            <a:off x="2032001" y="1600200"/>
+            <a:ext cx="5079997" cy="3657600"/>
+          </a:xfrm>
+          <a:prstGeom prst="rect">
+            <a:avLst/>
+          </a:prstGeom>
+        </p:spPr>
+      </p:pic>
+    </p:spTree>
+    <p:extLst>
+      <p:ext uri="{BB962C8B-B14F-4D97-AF65-F5344CB8AC3E}">
+        <p14:creationId xmlns:p14="http://schemas.microsoft.com/office/powerpoint/2010/main" val="1683484887"/>
+      </p:ext>
+    </p:extLst>
+  </p:cSld>
+  <p:clrMapOvr>
+    <a:masterClrMapping/>
+  </p:clrMapOvr>
+</p:sld>
+</file>
+
+<file path=ppt/slides/slide16.xml><?xml version="1.0" encoding="utf-8"?>
 <p:sld xmlns:a="http://schemas.openxmlformats.org/drawingml/2006/main" xmlns:r="http://schemas.openxmlformats.org/officeDocument/2006/relationships" xmlns:p="http://schemas.openxmlformats.org/presentationml/2006/main">
   <p:cSld>
     <p:bg>
@@ -4754,7 +4859,7 @@
           <a:p>
             <a:fld id="{727B0ACA-53D9-FB44-A37C-A778C10B232A}" type="slidenum">
               <a:rPr lang="en-US" smtClean="0"/>
-              <a:t>15</a:t>
+              <a:t>16</a:t>
             </a:fld>
             <a:endParaRPr lang="en-US"/>
           </a:p>
@@ -4773,7 +4878,7 @@
 </p:sld>
 </file>
 
-<file path=ppt/slides/slide16.xml><?xml version="1.0" encoding="utf-8"?>
+<file path=ppt/slides/slide17.xml><?xml version="1.0" encoding="utf-8"?>
 <p:sld xmlns:a="http://schemas.openxmlformats.org/drawingml/2006/main" xmlns:r="http://schemas.openxmlformats.org/officeDocument/2006/relationships" xmlns:p="http://schemas.openxmlformats.org/presentationml/2006/main">
   <p:cSld>
     <p:bg>
@@ -5114,7 +5219,7 @@
           <a:p>
             <a:fld id="{727B0ACA-53D9-FB44-A37C-A778C10B232A}" type="slidenum">
               <a:rPr lang="en-US" smtClean="0"/>
-              <a:t>16</a:t>
+              <a:t>17</a:t>
             </a:fld>
             <a:endParaRPr lang="en-US"/>
           </a:p>
@@ -5255,221 +5360,6 @@
     <p:extLst>
       <p:ext uri="{BB962C8B-B14F-4D97-AF65-F5344CB8AC3E}">
         <p14:creationId xmlns:p14="http://schemas.microsoft.com/office/powerpoint/2010/main" val="1045953054"/>
-      </p:ext>
-    </p:extLst>
-  </p:cSld>
-  <p:clrMapOvr>
-    <a:masterClrMapping/>
-  </p:clrMapOvr>
-</p:sld>
-</file>
-
-<file path=ppt/slides/slide17.xml><?xml version="1.0" encoding="utf-8"?>
-<p:sld xmlns:a="http://schemas.openxmlformats.org/drawingml/2006/main" xmlns:r="http://schemas.openxmlformats.org/officeDocument/2006/relationships" xmlns:p="http://schemas.openxmlformats.org/presentationml/2006/main">
-  <p:cSld>
-    <p:bg>
-      <p:bgPr>
-        <a:solidFill>
-          <a:schemeClr val="bg1"/>
-        </a:solidFill>
-        <a:effectLst/>
-      </p:bgPr>
-    </p:bg>
-    <p:spTree>
-      <p:nvGrpSpPr>
-        <p:cNvPr id="1" name=""/>
-        <p:cNvGrpSpPr/>
-        <p:nvPr/>
-      </p:nvGrpSpPr>
-      <p:grpSpPr>
-        <a:xfrm>
-          <a:off x="0" y="0"/>
-          <a:ext cx="0" cy="0"/>
-          <a:chOff x="0" y="0"/>
-          <a:chExt cx="0" cy="0"/>
-        </a:xfrm>
-      </p:grpSpPr>
-      <p:sp>
-        <p:nvSpPr>
-          <p:cNvPr id="2" name="Title 1">
-            <a:extLst>
-              <a:ext uri="{FF2B5EF4-FFF2-40B4-BE49-F238E27FC236}">
-                <a16:creationId xmlns:a16="http://schemas.microsoft.com/office/drawing/2014/main" id="{2E4B71F1-3662-8338-9401-F2605A9D22CE}"/>
-              </a:ext>
-            </a:extLst>
-          </p:cNvPr>
-          <p:cNvSpPr>
-            <a:spLocks noGrp="1"/>
-          </p:cNvSpPr>
-          <p:nvPr>
-            <p:ph type="title"/>
-          </p:nvPr>
-        </p:nvSpPr>
-        <p:spPr/>
-        <p:txBody>
-          <a:bodyPr/>
-          <a:lstStyle/>
-          <a:p>
-            <a:r>
-              <a:rPr lang="en-US" b="1" dirty="0"/>
-              <a:t>Information Gathering</a:t>
-            </a:r>
-          </a:p>
-        </p:txBody>
-      </p:sp>
-      <p:sp>
-        <p:nvSpPr>
-          <p:cNvPr id="3" name="Content Placeholder 2">
-            <a:extLst>
-              <a:ext uri="{FF2B5EF4-FFF2-40B4-BE49-F238E27FC236}">
-                <a16:creationId xmlns:a16="http://schemas.microsoft.com/office/drawing/2014/main" id="{5D56EFD8-4547-F2B4-D26B-8211E91699F4}"/>
-              </a:ext>
-            </a:extLst>
-          </p:cNvPr>
-          <p:cNvSpPr>
-            <a:spLocks noGrp="1"/>
-          </p:cNvSpPr>
-          <p:nvPr>
-            <p:ph idx="1"/>
-          </p:nvPr>
-        </p:nvSpPr>
-        <p:spPr>
-          <a:xfrm>
-            <a:off x="628650" y="1825625"/>
-            <a:ext cx="8123464" cy="4351338"/>
-          </a:xfrm>
-        </p:spPr>
-        <p:txBody>
-          <a:bodyPr>
-            <a:noAutofit/>
-          </a:bodyPr>
-          <a:lstStyle/>
-          <a:p>
-            <a:r>
-              <a:rPr lang="en-US" sz="2000" dirty="0"/>
-              <a:t>Will occur continuously throughout the project,</a:t>
-            </a:r>
-            <a:br>
-              <a:rPr lang="en-US" sz="2000" dirty="0"/>
-            </a:br>
-            <a:r>
-              <a:rPr lang="en-US" sz="2000" dirty="0"/>
-              <a:t>but critical at beginning.</a:t>
-            </a:r>
-          </a:p>
-          <a:p>
-            <a:r>
-              <a:rPr lang="en-US" sz="2000" dirty="0"/>
-              <a:t>Necessary for defining parameters and scope of project.</a:t>
-            </a:r>
-          </a:p>
-          <a:p>
-            <a:r>
-              <a:rPr lang="en-US" sz="2000" dirty="0"/>
-              <a:t>Information can include (but not limited to)</a:t>
-            </a:r>
-          </a:p>
-          <a:p>
-            <a:pPr lvl="1"/>
-            <a:r>
-              <a:rPr lang="en-US" sz="1600" dirty="0"/>
-              <a:t>Sponsor company,</a:t>
-            </a:r>
-          </a:p>
-          <a:p>
-            <a:pPr lvl="1"/>
-            <a:r>
-              <a:rPr lang="en-US" sz="1600" dirty="0"/>
-              <a:t>Industry/market,</a:t>
-            </a:r>
-          </a:p>
-          <a:p>
-            <a:pPr lvl="1"/>
-            <a:r>
-              <a:rPr lang="en-US" sz="1600" dirty="0"/>
-              <a:t>Competitors,</a:t>
-            </a:r>
-          </a:p>
-          <a:p>
-            <a:pPr lvl="1"/>
-            <a:r>
-              <a:rPr lang="en-US" sz="1600" b="1" dirty="0"/>
-              <a:t>Standards/Constraints </a:t>
-            </a:r>
-            <a:r>
-              <a:rPr lang="en-US" sz="1600" dirty="0"/>
-              <a:t>that guide or limit the solution (ABET requirement).</a:t>
-            </a:r>
-          </a:p>
-          <a:p>
-            <a:r>
-              <a:rPr lang="en-US" sz="2000" dirty="0"/>
-              <a:t>Sources can include</a:t>
-            </a:r>
-          </a:p>
-          <a:p>
-            <a:pPr lvl="1"/>
-            <a:r>
-              <a:rPr lang="en-US" sz="1600" dirty="0"/>
-              <a:t>Sponsor, trade publications or other public published material, internet.</a:t>
-            </a:r>
-          </a:p>
-          <a:p>
-            <a:r>
-              <a:rPr lang="en-US" sz="2000" b="1" dirty="0">
-                <a:solidFill>
-                  <a:srgbClr val="C00000"/>
-                </a:solidFill>
-              </a:rPr>
-              <a:t>The goal of Phase 1 is to gather as much information as possible,</a:t>
-            </a:r>
-            <a:br>
-              <a:rPr lang="en-US" sz="2000" b="1" dirty="0">
-                <a:solidFill>
-                  <a:srgbClr val="C00000"/>
-                </a:solidFill>
-              </a:rPr>
-            </a:br>
-            <a:r>
-              <a:rPr lang="en-US" sz="2000" dirty="0"/>
-              <a:t>even if you're not sure it's relevant.</a:t>
-            </a:r>
-          </a:p>
-        </p:txBody>
-      </p:sp>
-      <p:sp>
-        <p:nvSpPr>
-          <p:cNvPr id="5" name="Slide Number Placeholder 4">
-            <a:extLst>
-              <a:ext uri="{FF2B5EF4-FFF2-40B4-BE49-F238E27FC236}">
-                <a16:creationId xmlns:a16="http://schemas.microsoft.com/office/drawing/2014/main" id="{76142C7D-C1C6-6E03-7BE8-93EAF53B8007}"/>
-              </a:ext>
-            </a:extLst>
-          </p:cNvPr>
-          <p:cNvSpPr>
-            <a:spLocks noGrp="1"/>
-          </p:cNvSpPr>
-          <p:nvPr>
-            <p:ph type="sldNum" sz="quarter" idx="12"/>
-          </p:nvPr>
-        </p:nvSpPr>
-        <p:spPr/>
-        <p:txBody>
-          <a:bodyPr/>
-          <a:lstStyle/>
-          <a:p>
-            <a:fld id="{727B0ACA-53D9-FB44-A37C-A778C10B232A}" type="slidenum">
-              <a:rPr lang="en-US" smtClean="0"/>
-              <a:t>17</a:t>
-            </a:fld>
-            <a:endParaRPr lang="en-US"/>
-          </a:p>
-        </p:txBody>
-      </p:sp>
-    </p:spTree>
-    <p:extLst>
-      <p:ext uri="{BB962C8B-B14F-4D97-AF65-F5344CB8AC3E}">
-        <p14:creationId xmlns:p14="http://schemas.microsoft.com/office/powerpoint/2010/main" val="2540516832"/>
       </p:ext>
     </p:extLst>
   </p:cSld>
@@ -5509,6 +5399,232 @@
           <p:cNvPr id="2" name="Title 1">
             <a:extLst>
               <a:ext uri="{FF2B5EF4-FFF2-40B4-BE49-F238E27FC236}">
+                <a16:creationId xmlns:a16="http://schemas.microsoft.com/office/drawing/2014/main" id="{2E4B71F1-3662-8338-9401-F2605A9D22CE}"/>
+              </a:ext>
+            </a:extLst>
+          </p:cNvPr>
+          <p:cNvSpPr>
+            <a:spLocks noGrp="1"/>
+          </p:cNvSpPr>
+          <p:nvPr>
+            <p:ph type="title"/>
+          </p:nvPr>
+        </p:nvSpPr>
+        <p:spPr/>
+        <p:txBody>
+          <a:bodyPr/>
+          <a:lstStyle/>
+          <a:p>
+            <a:r>
+              <a:rPr lang="en-US" b="1" dirty="0"/>
+              <a:t>Information Gathering</a:t>
+            </a:r>
+          </a:p>
+        </p:txBody>
+      </p:sp>
+      <p:sp>
+        <p:nvSpPr>
+          <p:cNvPr id="3" name="Content Placeholder 2">
+            <a:extLst>
+              <a:ext uri="{FF2B5EF4-FFF2-40B4-BE49-F238E27FC236}">
+                <a16:creationId xmlns:a16="http://schemas.microsoft.com/office/drawing/2014/main" id="{5D56EFD8-4547-F2B4-D26B-8211E91699F4}"/>
+              </a:ext>
+            </a:extLst>
+          </p:cNvPr>
+          <p:cNvSpPr>
+            <a:spLocks noGrp="1"/>
+          </p:cNvSpPr>
+          <p:nvPr>
+            <p:ph idx="1"/>
+          </p:nvPr>
+        </p:nvSpPr>
+        <p:spPr>
+          <a:xfrm>
+            <a:off x="628650" y="1825625"/>
+            <a:ext cx="8123464" cy="4351338"/>
+          </a:xfrm>
+        </p:spPr>
+        <p:txBody>
+          <a:bodyPr>
+            <a:noAutofit/>
+          </a:bodyPr>
+          <a:lstStyle/>
+          <a:p>
+            <a:r>
+              <a:rPr lang="en-US" sz="2000" dirty="0"/>
+              <a:t>Will occur continuously throughout the project,</a:t>
+            </a:r>
+            <a:br>
+              <a:rPr lang="en-US" sz="2000" dirty="0"/>
+            </a:br>
+            <a:r>
+              <a:rPr lang="en-US" sz="2000" dirty="0"/>
+              <a:t>but critical at beginning.</a:t>
+            </a:r>
+          </a:p>
+          <a:p>
+            <a:r>
+              <a:rPr lang="en-US" sz="2000" dirty="0"/>
+              <a:t>Necessary for defining parameters and scope of project.</a:t>
+            </a:r>
+          </a:p>
+          <a:p>
+            <a:r>
+              <a:rPr lang="en-US" sz="2000" dirty="0"/>
+              <a:t>Information can include (but not limited to)</a:t>
+            </a:r>
+          </a:p>
+          <a:p>
+            <a:pPr lvl="1"/>
+            <a:r>
+              <a:rPr lang="en-US" sz="1600" dirty="0"/>
+              <a:t>Sponsor company,</a:t>
+            </a:r>
+          </a:p>
+          <a:p>
+            <a:pPr lvl="1"/>
+            <a:r>
+              <a:rPr lang="en-US" sz="1600" dirty="0"/>
+              <a:t>Industry/market,</a:t>
+            </a:r>
+          </a:p>
+          <a:p>
+            <a:pPr lvl="1"/>
+            <a:r>
+              <a:rPr lang="en-US" sz="1600" dirty="0"/>
+              <a:t>Competitors,</a:t>
+            </a:r>
+          </a:p>
+          <a:p>
+            <a:pPr lvl="1"/>
+            <a:r>
+              <a:rPr lang="en-US" sz="1600" b="1" dirty="0"/>
+              <a:t>Standards/Constraints </a:t>
+            </a:r>
+            <a:r>
+              <a:rPr lang="en-US" sz="1600" dirty="0"/>
+              <a:t>that guide or limit the solution (ABET requirement).</a:t>
+            </a:r>
+          </a:p>
+          <a:p>
+            <a:r>
+              <a:rPr lang="en-US" sz="2000" dirty="0"/>
+              <a:t>Sources can include</a:t>
+            </a:r>
+          </a:p>
+          <a:p>
+            <a:pPr lvl="1"/>
+            <a:r>
+              <a:rPr lang="en-US" sz="1600" dirty="0"/>
+              <a:t>Sponsor, trade publications or other public published material, internet.</a:t>
+            </a:r>
+          </a:p>
+          <a:p>
+            <a:r>
+              <a:rPr lang="en-US" sz="2000" b="1" dirty="0">
+                <a:solidFill>
+                  <a:srgbClr val="C00000"/>
+                </a:solidFill>
+                <a:highlight>
+                  <a:srgbClr val="FFFF00"/>
+                </a:highlight>
+              </a:rPr>
+              <a:t>The goal of Phase 1 is to gather as much information as possible</a:t>
+            </a:r>
+            <a:r>
+              <a:rPr lang="en-US" sz="2000" b="1" dirty="0">
+                <a:solidFill>
+                  <a:srgbClr val="C00000"/>
+                </a:solidFill>
+              </a:rPr>
+              <a:t>,</a:t>
+            </a:r>
+            <a:br>
+              <a:rPr lang="en-US" sz="2000" b="1" dirty="0">
+                <a:solidFill>
+                  <a:srgbClr val="C00000"/>
+                </a:solidFill>
+              </a:rPr>
+            </a:br>
+            <a:r>
+              <a:rPr lang="en-US" sz="2000" dirty="0"/>
+              <a:t>even if you're not sure it's relevant.</a:t>
+            </a:r>
+          </a:p>
+        </p:txBody>
+      </p:sp>
+      <p:sp>
+        <p:nvSpPr>
+          <p:cNvPr id="5" name="Slide Number Placeholder 4">
+            <a:extLst>
+              <a:ext uri="{FF2B5EF4-FFF2-40B4-BE49-F238E27FC236}">
+                <a16:creationId xmlns:a16="http://schemas.microsoft.com/office/drawing/2014/main" id="{76142C7D-C1C6-6E03-7BE8-93EAF53B8007}"/>
+              </a:ext>
+            </a:extLst>
+          </p:cNvPr>
+          <p:cNvSpPr>
+            <a:spLocks noGrp="1"/>
+          </p:cNvSpPr>
+          <p:nvPr>
+            <p:ph type="sldNum" sz="quarter" idx="12"/>
+          </p:nvPr>
+        </p:nvSpPr>
+        <p:spPr/>
+        <p:txBody>
+          <a:bodyPr/>
+          <a:lstStyle/>
+          <a:p>
+            <a:fld id="{727B0ACA-53D9-FB44-A37C-A778C10B232A}" type="slidenum">
+              <a:rPr lang="en-US" smtClean="0"/>
+              <a:t>18</a:t>
+            </a:fld>
+            <a:endParaRPr lang="en-US"/>
+          </a:p>
+        </p:txBody>
+      </p:sp>
+    </p:spTree>
+    <p:extLst>
+      <p:ext uri="{BB962C8B-B14F-4D97-AF65-F5344CB8AC3E}">
+        <p14:creationId xmlns:p14="http://schemas.microsoft.com/office/powerpoint/2010/main" val="2540516832"/>
+      </p:ext>
+    </p:extLst>
+  </p:cSld>
+  <p:clrMapOvr>
+    <a:masterClrMapping/>
+  </p:clrMapOvr>
+</p:sld>
+</file>
+
+<file path=ppt/slides/slide19.xml><?xml version="1.0" encoding="utf-8"?>
+<p:sld xmlns:a="http://schemas.openxmlformats.org/drawingml/2006/main" xmlns:r="http://schemas.openxmlformats.org/officeDocument/2006/relationships" xmlns:p="http://schemas.openxmlformats.org/presentationml/2006/main">
+  <p:cSld>
+    <p:bg>
+      <p:bgPr>
+        <a:solidFill>
+          <a:schemeClr val="bg1"/>
+        </a:solidFill>
+        <a:effectLst/>
+      </p:bgPr>
+    </p:bg>
+    <p:spTree>
+      <p:nvGrpSpPr>
+        <p:cNvPr id="1" name=""/>
+        <p:cNvGrpSpPr/>
+        <p:nvPr/>
+      </p:nvGrpSpPr>
+      <p:grpSpPr>
+        <a:xfrm>
+          <a:off x="0" y="0"/>
+          <a:ext cx="0" cy="0"/>
+          <a:chOff x="0" y="0"/>
+          <a:chExt cx="0" cy="0"/>
+        </a:xfrm>
+      </p:grpSpPr>
+      <p:sp>
+        <p:nvSpPr>
+          <p:cNvPr id="2" name="Title 1">
+            <a:extLst>
+              <a:ext uri="{FF2B5EF4-FFF2-40B4-BE49-F238E27FC236}">
                 <a16:creationId xmlns:a16="http://schemas.microsoft.com/office/drawing/2014/main" id="{6A69F471-75C1-BA88-3F00-EB010F52E4DF}"/>
               </a:ext>
             </a:extLst>
@@ -5612,7 +5728,23 @@
           <a:p>
             <a:r>
               <a:rPr lang="en-US" sz="2000" dirty="0"/>
-              <a:t>Done in conjunction with Information Gathering.</a:t>
+              <a:t>Done </a:t>
+            </a:r>
+            <a:r>
+              <a:rPr lang="en-US" sz="2000" b="1" dirty="0"/>
+              <a:t>in conjunction </a:t>
+            </a:r>
+            <a:r>
+              <a:rPr lang="en-US" sz="2000" dirty="0"/>
+              <a:t>with </a:t>
+            </a:r>
+            <a:r>
+              <a:rPr lang="en-US" sz="2000" i="1" dirty="0"/>
+              <a:t>Information Gathering</a:t>
+            </a:r>
+            <a:r>
+              <a:rPr lang="en-US" sz="2000" dirty="0"/>
+              <a:t>.</a:t>
             </a:r>
           </a:p>
         </p:txBody>
@@ -5640,7 +5772,7 @@
           <a:p>
             <a:fld id="{727B0ACA-53D9-FB44-A37C-A778C10B232A}" type="slidenum">
               <a:rPr lang="en-US" smtClean="0"/>
-              <a:t>18</a:t>
+              <a:t>19</a:t>
             </a:fld>
             <a:endParaRPr lang="en-US"/>
           </a:p>
@@ -5680,336 +5812,6 @@
     <p:extLst>
       <p:ext uri="{BB962C8B-B14F-4D97-AF65-F5344CB8AC3E}">
         <p14:creationId xmlns:p14="http://schemas.microsoft.com/office/powerpoint/2010/main" val="3749012378"/>
-      </p:ext>
-    </p:extLst>
-  </p:cSld>
-  <p:clrMapOvr>
-    <a:masterClrMapping/>
-  </p:clrMapOvr>
-</p:sld>
-</file>
-
-<file path=ppt/slides/slide19.xml><?xml version="1.0" encoding="utf-8"?>
-<p:sld xmlns:a="http://schemas.openxmlformats.org/drawingml/2006/main" xmlns:r="http://schemas.openxmlformats.org/officeDocument/2006/relationships" xmlns:p="http://schemas.openxmlformats.org/presentationml/2006/main">
-  <p:cSld>
-    <p:bg>
-      <p:bgPr>
-        <a:solidFill>
-          <a:schemeClr val="bg1"/>
-        </a:solidFill>
-        <a:effectLst/>
-      </p:bgPr>
-    </p:bg>
-    <p:spTree>
-      <p:nvGrpSpPr>
-        <p:cNvPr id="1" name="">
-          <a:extLst>
-            <a:ext uri="{FF2B5EF4-FFF2-40B4-BE49-F238E27FC236}">
-              <a16:creationId xmlns:a16="http://schemas.microsoft.com/office/drawing/2014/main" id="{517E0CC3-E946-0281-F540-DC159B29EE21}"/>
-            </a:ext>
-          </a:extLst>
-        </p:cNvPr>
-        <p:cNvGrpSpPr/>
-        <p:nvPr/>
-      </p:nvGrpSpPr>
-      <p:grpSpPr>
-        <a:xfrm>
-          <a:off x="0" y="0"/>
-          <a:ext cx="0" cy="0"/>
-          <a:chOff x="0" y="0"/>
-          <a:chExt cx="0" cy="0"/>
-        </a:xfrm>
-      </p:grpSpPr>
-      <p:sp>
-        <p:nvSpPr>
-          <p:cNvPr id="2" name="Title 1">
-            <a:extLst>
-              <a:ext uri="{FF2B5EF4-FFF2-40B4-BE49-F238E27FC236}">
-                <a16:creationId xmlns:a16="http://schemas.microsoft.com/office/drawing/2014/main" id="{C5A4A4DE-B772-8A1F-F1D4-D7307A295543}"/>
-              </a:ext>
-            </a:extLst>
-          </p:cNvPr>
-          <p:cNvSpPr>
-            <a:spLocks noGrp="1"/>
-          </p:cNvSpPr>
-          <p:nvPr>
-            <p:ph type="title"/>
-          </p:nvPr>
-        </p:nvSpPr>
-        <p:spPr/>
-        <p:txBody>
-          <a:bodyPr/>
-          <a:lstStyle/>
-          <a:p>
-            <a:r>
-              <a:rPr lang="en-US" b="1" dirty="0"/>
-              <a:t>Problem Definition</a:t>
-            </a:r>
-          </a:p>
-        </p:txBody>
-      </p:sp>
-      <p:sp>
-        <p:nvSpPr>
-          <p:cNvPr id="3" name="Content Placeholder 2">
-            <a:extLst>
-              <a:ext uri="{FF2B5EF4-FFF2-40B4-BE49-F238E27FC236}">
-                <a16:creationId xmlns:a16="http://schemas.microsoft.com/office/drawing/2014/main" id="{0D037626-49E4-E7D3-370D-64034F35A04D}"/>
-              </a:ext>
-            </a:extLst>
-          </p:cNvPr>
-          <p:cNvSpPr>
-            <a:spLocks noGrp="1"/>
-          </p:cNvSpPr>
-          <p:nvPr>
-            <p:ph idx="1"/>
-          </p:nvPr>
-        </p:nvSpPr>
-        <p:spPr/>
-        <p:txBody>
-          <a:bodyPr>
-            <a:noAutofit/>
-          </a:bodyPr>
-          <a:lstStyle/>
-          <a:p>
-            <a:r>
-              <a:rPr lang="en-US" sz="2000" dirty="0">
-                <a:solidFill>
-                  <a:schemeClr val="bg1">
-                    <a:lumMod val="50000"/>
-                  </a:schemeClr>
-                </a:solidFill>
-              </a:rPr>
-              <a:t>Done in conjunction with </a:t>
-            </a:r>
-            <a:r>
-              <a:rPr lang="en-US" sz="2000" i="1" dirty="0">
-                <a:solidFill>
-                  <a:schemeClr val="bg1">
-                    <a:lumMod val="50000"/>
-                  </a:schemeClr>
-                </a:solidFill>
-              </a:rPr>
-              <a:t>Information Gathering</a:t>
-            </a:r>
-            <a:r>
-              <a:rPr lang="en-US" sz="2000" dirty="0">
-                <a:solidFill>
-                  <a:schemeClr val="bg1">
-                    <a:lumMod val="50000"/>
-                  </a:schemeClr>
-                </a:solidFill>
-              </a:rPr>
-              <a:t>.</a:t>
-            </a:r>
-          </a:p>
-          <a:p>
-            <a:r>
-              <a:rPr lang="en-US" sz="2000" dirty="0">
-                <a:solidFill>
-                  <a:schemeClr val="bg1">
-                    <a:lumMod val="50000"/>
-                  </a:schemeClr>
-                </a:solidFill>
-              </a:rPr>
-              <a:t>Should be a </a:t>
-            </a:r>
-            <a:r>
-              <a:rPr lang="en-US" sz="2000" b="1" dirty="0">
-                <a:solidFill>
-                  <a:schemeClr val="bg1">
-                    <a:lumMod val="50000"/>
-                  </a:schemeClr>
-                </a:solidFill>
-              </a:rPr>
-              <a:t>concise statement </a:t>
-            </a:r>
-            <a:r>
-              <a:rPr lang="en-US" sz="2000" dirty="0">
-                <a:solidFill>
-                  <a:schemeClr val="bg1">
-                    <a:lumMod val="50000"/>
-                  </a:schemeClr>
-                </a:solidFill>
-              </a:rPr>
-              <a:t>of the problem facing your sponsor</a:t>
-            </a:r>
-          </a:p>
-          <a:p>
-            <a:pPr lvl="1"/>
-            <a:r>
-              <a:rPr lang="en-US" sz="2000" dirty="0">
-                <a:solidFill>
-                  <a:schemeClr val="bg1">
-                    <a:lumMod val="50000"/>
-                  </a:schemeClr>
-                </a:solidFill>
-              </a:rPr>
-              <a:t>Focus on the </a:t>
-            </a:r>
-            <a:r>
-              <a:rPr lang="en-US" sz="2000" u="sng" dirty="0">
-                <a:solidFill>
-                  <a:schemeClr val="bg1">
-                    <a:lumMod val="50000"/>
-                  </a:schemeClr>
-                </a:solidFill>
-              </a:rPr>
-              <a:t>source of the problem</a:t>
-            </a:r>
-            <a:r>
-              <a:rPr lang="en-US" sz="2000" dirty="0">
-                <a:solidFill>
-                  <a:schemeClr val="bg1">
-                    <a:lumMod val="50000"/>
-                  </a:schemeClr>
-                </a:solidFill>
-              </a:rPr>
-              <a:t>,</a:t>
-            </a:r>
-            <a:br>
-              <a:rPr lang="en-US" sz="2000" dirty="0">
-                <a:solidFill>
-                  <a:schemeClr val="bg1">
-                    <a:lumMod val="50000"/>
-                  </a:schemeClr>
-                </a:solidFill>
-              </a:rPr>
-            </a:br>
-            <a:r>
-              <a:rPr lang="en-US" sz="2000" dirty="0">
-                <a:solidFill>
-                  <a:schemeClr val="bg1">
-                    <a:lumMod val="50000"/>
-                  </a:schemeClr>
-                </a:solidFill>
-              </a:rPr>
-              <a:t>not the symptoms or solution,</a:t>
-            </a:r>
-          </a:p>
-          <a:p>
-            <a:pPr lvl="1"/>
-            <a:r>
-              <a:rPr lang="en-US" sz="2000" dirty="0">
-                <a:solidFill>
-                  <a:schemeClr val="bg1">
-                    <a:lumMod val="50000"/>
-                  </a:schemeClr>
-                </a:solidFill>
-              </a:rPr>
-              <a:t>Keep the language simple, avoid technical jargon,</a:t>
-            </a:r>
-          </a:p>
-          <a:p>
-            <a:pPr lvl="1"/>
-            <a:r>
-              <a:rPr lang="en-US" sz="2000" dirty="0">
-                <a:solidFill>
-                  <a:schemeClr val="bg1">
-                    <a:lumMod val="50000"/>
-                  </a:schemeClr>
-                </a:solidFill>
-              </a:rPr>
-              <a:t>Avoid detail, that will be fleshed out with customer needs.</a:t>
-            </a:r>
-          </a:p>
-          <a:p>
-            <a:pPr marL="0" indent="0">
-              <a:buNone/>
-            </a:pPr>
-            <a:r>
-              <a:rPr lang="en-US" sz="2000" b="1" dirty="0">
-                <a:solidFill>
-                  <a:srgbClr val="00B050"/>
-                </a:solidFill>
-              </a:rPr>
-              <a:t>Good:</a:t>
-            </a:r>
-            <a:br>
-              <a:rPr lang="en-US" sz="2000" dirty="0"/>
-            </a:br>
-            <a:r>
-              <a:rPr lang="en-US" sz="1800" dirty="0">
-                <a:solidFill>
-                  <a:schemeClr val="accent3"/>
-                </a:solidFill>
-              </a:rPr>
-              <a:t>The Radiology Department at Texas A&amp;M Hospital experiences prolonged imaging turnaround times due to inefficiencies in the order processing workflow, resulting in delayed clinical decision-making.</a:t>
-            </a:r>
-            <a:endParaRPr lang="en-US" sz="2000" dirty="0">
-              <a:solidFill>
-                <a:schemeClr val="accent3"/>
-              </a:solidFill>
-            </a:endParaRPr>
-          </a:p>
-          <a:p>
-            <a:pPr marL="0" indent="0">
-              <a:buNone/>
-            </a:pPr>
-            <a:r>
-              <a:rPr lang="en-US" sz="2000" b="1" dirty="0">
-                <a:solidFill>
-                  <a:srgbClr val="FF0000"/>
-                </a:solidFill>
-              </a:rPr>
-              <a:t>Not so good</a:t>
-            </a:r>
-            <a:r>
-              <a:rPr lang="en-US" sz="2000" dirty="0">
-                <a:solidFill>
-                  <a:srgbClr val="FF0000"/>
-                </a:solidFill>
-              </a:rPr>
-              <a:t>:</a:t>
-            </a:r>
-            <a:br>
-              <a:rPr lang="en-US" sz="2000" dirty="0"/>
-            </a:br>
-            <a:r>
-              <a:rPr lang="en-US" sz="1800" dirty="0">
-                <a:solidFill>
-                  <a:schemeClr val="accent2">
-                    <a:lumMod val="50000"/>
-                  </a:schemeClr>
-                </a:solidFill>
-              </a:rPr>
-              <a:t>The Radiology Department at Texas A&amp;M Hospital has many problems with imaging, staff availability, communication between departments, patient flow, and rising costs, which together negatively impact hospital efficiency and patient satisfaction.</a:t>
-            </a:r>
-          </a:p>
-        </p:txBody>
-      </p:sp>
-      <p:sp>
-        <p:nvSpPr>
-          <p:cNvPr id="7" name="Slide Number Placeholder 6">
-            <a:extLst>
-              <a:ext uri="{FF2B5EF4-FFF2-40B4-BE49-F238E27FC236}">
-                <a16:creationId xmlns:a16="http://schemas.microsoft.com/office/drawing/2014/main" id="{88E04DD4-5301-879A-AABE-A694B83A5E5E}"/>
-              </a:ext>
-            </a:extLst>
-          </p:cNvPr>
-          <p:cNvSpPr>
-            <a:spLocks noGrp="1"/>
-          </p:cNvSpPr>
-          <p:nvPr>
-            <p:ph type="sldNum" sz="quarter" idx="12"/>
-          </p:nvPr>
-        </p:nvSpPr>
-        <p:spPr/>
-        <p:txBody>
-          <a:bodyPr/>
-          <a:lstStyle/>
-          <a:p>
-            <a:fld id="{727B0ACA-53D9-FB44-A37C-A778C10B232A}" type="slidenum">
-              <a:rPr lang="en-US" smtClean="0"/>
-              <a:t>19</a:t>
-            </a:fld>
-            <a:endParaRPr lang="en-US"/>
-          </a:p>
-        </p:txBody>
-      </p:sp>
-    </p:spTree>
-    <p:extLst>
-      <p:ext uri="{BB962C8B-B14F-4D97-AF65-F5344CB8AC3E}">
-        <p14:creationId xmlns:p14="http://schemas.microsoft.com/office/powerpoint/2010/main" val="955347802"/>
       </p:ext>
     </p:extLst>
   </p:cSld>
@@ -6119,6 +5921,320 @@
 <file path=ppt/slides/slide20.xml><?xml version="1.0" encoding="utf-8"?>
 <p:sld xmlns:a="http://schemas.openxmlformats.org/drawingml/2006/main" xmlns:r="http://schemas.openxmlformats.org/officeDocument/2006/relationships" xmlns:p="http://schemas.openxmlformats.org/presentationml/2006/main">
   <p:cSld>
+    <p:bg>
+      <p:bgPr>
+        <a:solidFill>
+          <a:schemeClr val="bg1"/>
+        </a:solidFill>
+        <a:effectLst/>
+      </p:bgPr>
+    </p:bg>
+    <p:spTree>
+      <p:nvGrpSpPr>
+        <p:cNvPr id="1" name="">
+          <a:extLst>
+            <a:ext uri="{FF2B5EF4-FFF2-40B4-BE49-F238E27FC236}">
+              <a16:creationId xmlns:a16="http://schemas.microsoft.com/office/drawing/2014/main" id="{517E0CC3-E946-0281-F540-DC159B29EE21}"/>
+            </a:ext>
+          </a:extLst>
+        </p:cNvPr>
+        <p:cNvGrpSpPr/>
+        <p:nvPr/>
+      </p:nvGrpSpPr>
+      <p:grpSpPr>
+        <a:xfrm>
+          <a:off x="0" y="0"/>
+          <a:ext cx="0" cy="0"/>
+          <a:chOff x="0" y="0"/>
+          <a:chExt cx="0" cy="0"/>
+        </a:xfrm>
+      </p:grpSpPr>
+      <p:sp>
+        <p:nvSpPr>
+          <p:cNvPr id="2" name="Title 1">
+            <a:extLst>
+              <a:ext uri="{FF2B5EF4-FFF2-40B4-BE49-F238E27FC236}">
+                <a16:creationId xmlns:a16="http://schemas.microsoft.com/office/drawing/2014/main" id="{C5A4A4DE-B772-8A1F-F1D4-D7307A295543}"/>
+              </a:ext>
+            </a:extLst>
+          </p:cNvPr>
+          <p:cNvSpPr>
+            <a:spLocks noGrp="1"/>
+          </p:cNvSpPr>
+          <p:nvPr>
+            <p:ph type="title"/>
+          </p:nvPr>
+        </p:nvSpPr>
+        <p:spPr/>
+        <p:txBody>
+          <a:bodyPr/>
+          <a:lstStyle/>
+          <a:p>
+            <a:r>
+              <a:rPr lang="en-US" b="1" dirty="0"/>
+              <a:t>Problem Definition </a:t>
+            </a:r>
+            <a:r>
+              <a:rPr lang="en-US" baseline="30000" dirty="0"/>
+              <a:t>(Example)</a:t>
+            </a:r>
+          </a:p>
+        </p:txBody>
+      </p:sp>
+      <p:sp>
+        <p:nvSpPr>
+          <p:cNvPr id="3" name="Content Placeholder 2">
+            <a:extLst>
+              <a:ext uri="{FF2B5EF4-FFF2-40B4-BE49-F238E27FC236}">
+                <a16:creationId xmlns:a16="http://schemas.microsoft.com/office/drawing/2014/main" id="{0D037626-49E4-E7D3-370D-64034F35A04D}"/>
+              </a:ext>
+            </a:extLst>
+          </p:cNvPr>
+          <p:cNvSpPr>
+            <a:spLocks noGrp="1"/>
+          </p:cNvSpPr>
+          <p:nvPr>
+            <p:ph idx="1"/>
+          </p:nvPr>
+        </p:nvSpPr>
+        <p:spPr/>
+        <p:txBody>
+          <a:bodyPr>
+            <a:noAutofit/>
+          </a:bodyPr>
+          <a:lstStyle/>
+          <a:p>
+            <a:r>
+              <a:rPr lang="en-US" sz="2000" dirty="0">
+                <a:solidFill>
+                  <a:schemeClr val="bg1">
+                    <a:lumMod val="50000"/>
+                  </a:schemeClr>
+                </a:solidFill>
+              </a:rPr>
+              <a:t>Should be a </a:t>
+            </a:r>
+            <a:r>
+              <a:rPr lang="en-US" sz="2000" b="1" dirty="0">
+                <a:solidFill>
+                  <a:schemeClr val="bg1">
+                    <a:lumMod val="50000"/>
+                  </a:schemeClr>
+                </a:solidFill>
+              </a:rPr>
+              <a:t>concise statement </a:t>
+            </a:r>
+            <a:r>
+              <a:rPr lang="en-US" sz="2000" dirty="0">
+                <a:solidFill>
+                  <a:schemeClr val="bg1">
+                    <a:lumMod val="50000"/>
+                  </a:schemeClr>
+                </a:solidFill>
+              </a:rPr>
+              <a:t>of the problem facing your sponsor</a:t>
+            </a:r>
+          </a:p>
+          <a:p>
+            <a:pPr lvl="1"/>
+            <a:r>
+              <a:rPr lang="en-US" sz="2000" dirty="0">
+                <a:solidFill>
+                  <a:schemeClr val="bg1">
+                    <a:lumMod val="50000"/>
+                  </a:schemeClr>
+                </a:solidFill>
+              </a:rPr>
+              <a:t>Focus on the source of the problem,</a:t>
+            </a:r>
+            <a:br>
+              <a:rPr lang="en-US" sz="2000" dirty="0">
+                <a:solidFill>
+                  <a:schemeClr val="bg1">
+                    <a:lumMod val="50000"/>
+                  </a:schemeClr>
+                </a:solidFill>
+              </a:rPr>
+            </a:br>
+            <a:r>
+              <a:rPr lang="en-US" sz="2000" dirty="0">
+                <a:solidFill>
+                  <a:schemeClr val="bg1">
+                    <a:lumMod val="50000"/>
+                  </a:schemeClr>
+                </a:solidFill>
+              </a:rPr>
+              <a:t>not the symptoms or solution,</a:t>
+            </a:r>
+          </a:p>
+          <a:p>
+            <a:pPr lvl="1"/>
+            <a:r>
+              <a:rPr lang="en-US" sz="2000" dirty="0">
+                <a:solidFill>
+                  <a:schemeClr val="bg1">
+                    <a:lumMod val="50000"/>
+                  </a:schemeClr>
+                </a:solidFill>
+              </a:rPr>
+              <a:t>Keep the language simple, avoid technical jargon,</a:t>
+            </a:r>
+          </a:p>
+          <a:p>
+            <a:pPr lvl="1"/>
+            <a:r>
+              <a:rPr lang="en-US" sz="2000" dirty="0">
+                <a:solidFill>
+                  <a:schemeClr val="bg1">
+                    <a:lumMod val="50000"/>
+                  </a:schemeClr>
+                </a:solidFill>
+              </a:rPr>
+              <a:t>Avoid detail, that will be fleshed out with customer needs.</a:t>
+            </a:r>
+          </a:p>
+          <a:p>
+            <a:r>
+              <a:rPr lang="en-US" sz="2000" dirty="0">
+                <a:solidFill>
+                  <a:schemeClr val="bg1">
+                    <a:lumMod val="50000"/>
+                  </a:schemeClr>
+                </a:solidFill>
+              </a:rPr>
+              <a:t>Done </a:t>
+            </a:r>
+            <a:r>
+              <a:rPr lang="en-US" sz="2000" b="1" dirty="0">
+                <a:solidFill>
+                  <a:schemeClr val="bg1">
+                    <a:lumMod val="50000"/>
+                  </a:schemeClr>
+                </a:solidFill>
+              </a:rPr>
+              <a:t>in conjunction </a:t>
+            </a:r>
+            <a:r>
+              <a:rPr lang="en-US" sz="2000" dirty="0">
+                <a:solidFill>
+                  <a:schemeClr val="bg1">
+                    <a:lumMod val="50000"/>
+                  </a:schemeClr>
+                </a:solidFill>
+              </a:rPr>
+              <a:t>with Information Gathering.</a:t>
+            </a:r>
+          </a:p>
+          <a:p>
+            <a:pPr marL="0" indent="0">
+              <a:buNone/>
+            </a:pPr>
+            <a:r>
+              <a:rPr lang="en-US" sz="2000" b="1" dirty="0">
+                <a:solidFill>
+                  <a:srgbClr val="00B050"/>
+                </a:solidFill>
+              </a:rPr>
+              <a:t>Good:</a:t>
+            </a:r>
+            <a:br>
+              <a:rPr lang="en-US" sz="2000" dirty="0"/>
+            </a:br>
+            <a:r>
+              <a:rPr lang="en-US" sz="1800" dirty="0">
+                <a:solidFill>
+                  <a:schemeClr val="accent3"/>
+                </a:solidFill>
+              </a:rPr>
+              <a:t>The Radiology Department at Texas A&amp;M Hospital experiences prolonged imaging turnaround times due to inefficiencies in the order processing workflow, resulting in delayed clinical decision-making.</a:t>
+            </a:r>
+            <a:endParaRPr lang="en-US" sz="2000" dirty="0">
+              <a:solidFill>
+                <a:schemeClr val="accent3"/>
+              </a:solidFill>
+            </a:endParaRPr>
+          </a:p>
+          <a:p>
+            <a:pPr marL="0" indent="0">
+              <a:buNone/>
+            </a:pPr>
+            <a:r>
+              <a:rPr lang="en-US" sz="2000" b="1" dirty="0">
+                <a:solidFill>
+                  <a:srgbClr val="FF0000"/>
+                </a:solidFill>
+              </a:rPr>
+              <a:t>Not so good</a:t>
+            </a:r>
+            <a:r>
+              <a:rPr lang="en-US" sz="2000" dirty="0">
+                <a:solidFill>
+                  <a:srgbClr val="FF0000"/>
+                </a:solidFill>
+              </a:rPr>
+              <a:t>:</a:t>
+            </a:r>
+            <a:br>
+              <a:rPr lang="en-US" sz="2000" dirty="0"/>
+            </a:br>
+            <a:r>
+              <a:rPr lang="en-US" sz="1800" dirty="0">
+                <a:solidFill>
+                  <a:schemeClr val="accent2">
+                    <a:lumMod val="50000"/>
+                  </a:schemeClr>
+                </a:solidFill>
+              </a:rPr>
+              <a:t>The Radiology Department at Texas A&amp;M Hospital has many problems with imaging, staff availability, communication between departments, patient flow, and rising costs, which together negatively impact hospital efficiency and patient satisfaction.</a:t>
+            </a:r>
+          </a:p>
+        </p:txBody>
+      </p:sp>
+      <p:sp>
+        <p:nvSpPr>
+          <p:cNvPr id="7" name="Slide Number Placeholder 6">
+            <a:extLst>
+              <a:ext uri="{FF2B5EF4-FFF2-40B4-BE49-F238E27FC236}">
+                <a16:creationId xmlns:a16="http://schemas.microsoft.com/office/drawing/2014/main" id="{88E04DD4-5301-879A-AABE-A694B83A5E5E}"/>
+              </a:ext>
+            </a:extLst>
+          </p:cNvPr>
+          <p:cNvSpPr>
+            <a:spLocks noGrp="1"/>
+          </p:cNvSpPr>
+          <p:nvPr>
+            <p:ph type="sldNum" sz="quarter" idx="12"/>
+          </p:nvPr>
+        </p:nvSpPr>
+        <p:spPr/>
+        <p:txBody>
+          <a:bodyPr/>
+          <a:lstStyle/>
+          <a:p>
+            <a:fld id="{727B0ACA-53D9-FB44-A37C-A778C10B232A}" type="slidenum">
+              <a:rPr lang="en-US" smtClean="0"/>
+              <a:t>20</a:t>
+            </a:fld>
+            <a:endParaRPr lang="en-US"/>
+          </a:p>
+        </p:txBody>
+      </p:sp>
+    </p:spTree>
+    <p:extLst>
+      <p:ext uri="{BB962C8B-B14F-4D97-AF65-F5344CB8AC3E}">
+        <p14:creationId xmlns:p14="http://schemas.microsoft.com/office/powerpoint/2010/main" val="955347802"/>
+      </p:ext>
+    </p:extLst>
+  </p:cSld>
+  <p:clrMapOvr>
+    <a:masterClrMapping/>
+  </p:clrMapOvr>
+</p:sld>
+</file>
+
+<file path=ppt/slides/slide21.xml><?xml version="1.0" encoding="utf-8"?>
+<p:sld xmlns:a="http://schemas.openxmlformats.org/drawingml/2006/main" xmlns:r="http://schemas.openxmlformats.org/officeDocument/2006/relationships" xmlns:p="http://schemas.openxmlformats.org/presentationml/2006/main">
+  <p:cSld>
     <p:spTree>
       <p:nvGrpSpPr>
         <p:cNvPr id="1" name=""/>
@@ -6184,7 +6300,7 @@
           <a:p>
             <a:fld id="{727B0ACA-53D9-FB44-A37C-A778C10B232A}" type="slidenum">
               <a:rPr lang="en-US" smtClean="0"/>
-              <a:t>20</a:t>
+              <a:t>21</a:t>
             </a:fld>
             <a:endParaRPr lang="en-US"/>
           </a:p>
@@ -6282,7 +6398,7 @@
 </p:sld>
 </file>
 
-<file path=ppt/slides/slide21.xml><?xml version="1.0" encoding="utf-8"?>
+<file path=ppt/slides/slide22.xml><?xml version="1.0" encoding="utf-8"?>
 <p:sld xmlns:a="http://schemas.openxmlformats.org/drawingml/2006/main" xmlns:r="http://schemas.openxmlformats.org/officeDocument/2006/relationships" xmlns:p="http://schemas.openxmlformats.org/presentationml/2006/main">
   <p:cSld>
     <p:spTree>
@@ -6433,7 +6549,7 @@
           <a:p>
             <a:fld id="{727B0ACA-53D9-FB44-A37C-A778C10B232A}" type="slidenum">
               <a:rPr lang="en-US" smtClean="0"/>
-              <a:t>21</a:t>
+              <a:t>22</a:t>
             </a:fld>
             <a:endParaRPr lang="en-US"/>
           </a:p>
@@ -6531,7 +6647,7 @@
 </p:sld>
 </file>
 
-<file path=ppt/slides/slide22.xml><?xml version="1.0" encoding="utf-8"?>
+<file path=ppt/slides/slide23.xml><?xml version="1.0" encoding="utf-8"?>
 <p:sld xmlns:a="http://schemas.openxmlformats.org/drawingml/2006/main" xmlns:r="http://schemas.openxmlformats.org/officeDocument/2006/relationships" xmlns:p="http://schemas.openxmlformats.org/presentationml/2006/main">
   <p:cSld>
     <p:spTree>
@@ -6635,7 +6751,7 @@
           <a:p>
             <a:fld id="{727B0ACA-53D9-FB44-A37C-A778C10B232A}" type="slidenum">
               <a:rPr lang="en-US" smtClean="0"/>
-              <a:t>22</a:t>
+              <a:t>23</a:t>
             </a:fld>
             <a:endParaRPr lang="en-US"/>
           </a:p>
@@ -6696,7 +6812,7 @@
 </p:sld>
 </file>
 
-<file path=ppt/slides/slide23.xml><?xml version="1.0" encoding="utf-8"?>
+<file path=ppt/slides/slide24.xml><?xml version="1.0" encoding="utf-8"?>
 <p:sld xmlns:a="http://schemas.openxmlformats.org/drawingml/2006/main" xmlns:r="http://schemas.openxmlformats.org/officeDocument/2006/relationships" xmlns:p="http://schemas.openxmlformats.org/presentationml/2006/main">
   <p:cSld>
     <p:spTree>
@@ -6956,7 +7072,7 @@
           <a:p>
             <a:fld id="{727B0ACA-53D9-FB44-A37C-A778C10B232A}" type="slidenum">
               <a:rPr lang="en-US" smtClean="0"/>
-              <a:t>23</a:t>
+              <a:t>24</a:t>
             </a:fld>
             <a:endParaRPr lang="en-US"/>
           </a:p>
@@ -6966,283 +7082,6 @@
     <p:extLst>
       <p:ext uri="{BB962C8B-B14F-4D97-AF65-F5344CB8AC3E}">
         <p14:creationId xmlns:p14="http://schemas.microsoft.com/office/powerpoint/2010/main" val="4222826247"/>
-      </p:ext>
-    </p:extLst>
-  </p:cSld>
-  <p:clrMapOvr>
-    <a:masterClrMapping/>
-  </p:clrMapOvr>
-</p:sld>
-</file>
-
-<file path=ppt/slides/slide24.xml><?xml version="1.0" encoding="utf-8"?>
-<p:sld xmlns:a="http://schemas.openxmlformats.org/drawingml/2006/main" xmlns:r="http://schemas.openxmlformats.org/officeDocument/2006/relationships" xmlns:p="http://schemas.openxmlformats.org/presentationml/2006/main">
-  <p:cSld>
-    <p:bg>
-      <p:bgPr>
-        <a:solidFill>
-          <a:schemeClr val="bg1"/>
-        </a:solidFill>
-        <a:effectLst/>
-      </p:bgPr>
-    </p:bg>
-    <p:spTree>
-      <p:nvGrpSpPr>
-        <p:cNvPr id="1" name=""/>
-        <p:cNvGrpSpPr/>
-        <p:nvPr/>
-      </p:nvGrpSpPr>
-      <p:grpSpPr>
-        <a:xfrm>
-          <a:off x="0" y="0"/>
-          <a:ext cx="0" cy="0"/>
-          <a:chOff x="0" y="0"/>
-          <a:chExt cx="0" cy="0"/>
-        </a:xfrm>
-      </p:grpSpPr>
-      <p:sp>
-        <p:nvSpPr>
-          <p:cNvPr id="2" name="Title 1">
-            <a:extLst>
-              <a:ext uri="{FF2B5EF4-FFF2-40B4-BE49-F238E27FC236}">
-                <a16:creationId xmlns:a16="http://schemas.microsoft.com/office/drawing/2014/main" id="{573A541B-EDA2-FDB2-FA06-9345CAFFADDE}"/>
-              </a:ext>
-            </a:extLst>
-          </p:cNvPr>
-          <p:cNvSpPr>
-            <a:spLocks noGrp="1"/>
-          </p:cNvSpPr>
-          <p:nvPr>
-            <p:ph type="title"/>
-          </p:nvPr>
-        </p:nvSpPr>
-        <p:spPr/>
-        <p:txBody>
-          <a:bodyPr/>
-          <a:lstStyle/>
-          <a:p>
-            <a:r>
-              <a:rPr lang="en-US" b="1" dirty="0"/>
-              <a:t>Client Needs</a:t>
-            </a:r>
-          </a:p>
-        </p:txBody>
-      </p:sp>
-      <p:sp>
-        <p:nvSpPr>
-          <p:cNvPr id="3" name="Content Placeholder 2">
-            <a:extLst>
-              <a:ext uri="{FF2B5EF4-FFF2-40B4-BE49-F238E27FC236}">
-                <a16:creationId xmlns:a16="http://schemas.microsoft.com/office/drawing/2014/main" id="{ECBCA1C3-B54B-F0D2-FF7F-8261D54B9527}"/>
-              </a:ext>
-            </a:extLst>
-          </p:cNvPr>
-          <p:cNvSpPr>
-            <a:spLocks noGrp="1"/>
-          </p:cNvSpPr>
-          <p:nvPr>
-            <p:ph idx="1"/>
-          </p:nvPr>
-        </p:nvSpPr>
-        <p:spPr>
-          <a:xfrm>
-            <a:off x="628649" y="1825625"/>
-            <a:ext cx="8120239" cy="4351338"/>
-          </a:xfrm>
-        </p:spPr>
-        <p:txBody>
-          <a:bodyPr>
-            <a:noAutofit/>
-          </a:bodyPr>
-          <a:lstStyle/>
-          <a:p>
-            <a:r>
-              <a:rPr lang="en-US" sz="2000" dirty="0"/>
-              <a:t>Likely discovered as part of problem definition development,</a:t>
-            </a:r>
-            <a:br>
-              <a:rPr lang="en-US" sz="2000" dirty="0"/>
-            </a:br>
-            <a:r>
-              <a:rPr lang="en-US" sz="2000" dirty="0"/>
-              <a:t>but this allows you to expand on the problem definition with </a:t>
-            </a:r>
-            <a:r>
-              <a:rPr lang="en-US" sz="2000" b="1" dirty="0"/>
-              <a:t>statements of specific needs</a:t>
-            </a:r>
-          </a:p>
-          <a:p>
-            <a:r>
-              <a:rPr lang="en-US" sz="2000" dirty="0"/>
-              <a:t>Should be a </a:t>
-            </a:r>
-            <a:r>
-              <a:rPr lang="en-US" sz="2000" b="1" dirty="0"/>
-              <a:t>list of things </a:t>
-            </a:r>
-            <a:r>
-              <a:rPr lang="en-US" sz="2000" dirty="0"/>
-              <a:t>in clear, unambiguous, non-technical terms</a:t>
-            </a:r>
-          </a:p>
-          <a:p>
-            <a:r>
-              <a:rPr lang="en-US" sz="2000" dirty="0"/>
-              <a:t>May be </a:t>
-            </a:r>
-            <a:r>
-              <a:rPr lang="en-US" sz="2000" b="1" dirty="0"/>
-              <a:t>provided directly by the sponsor </a:t>
-            </a:r>
-            <a:r>
-              <a:rPr lang="en-US" sz="2000" dirty="0"/>
-              <a:t>or you may need to solicit and/or </a:t>
-            </a:r>
-            <a:r>
-              <a:rPr lang="en-US" sz="2000" b="1" dirty="0"/>
-              <a:t>interpret them from conversations </a:t>
-            </a:r>
-            <a:r>
-              <a:rPr lang="en-US" sz="2000" dirty="0"/>
-              <a:t>and other research</a:t>
-            </a:r>
-          </a:p>
-          <a:p>
-            <a:r>
-              <a:rPr lang="en-US" sz="2000" dirty="0"/>
-              <a:t>Number client needs for identification in </a:t>
-            </a:r>
-            <a:r>
-              <a:rPr lang="en-US" sz="2000" b="1" dirty="0"/>
-              <a:t>traceability</a:t>
-            </a:r>
-            <a:r>
-              <a:rPr lang="en-US" sz="2000" dirty="0"/>
-              <a:t> matrix</a:t>
-            </a:r>
-          </a:p>
-          <a:p>
-            <a:r>
-              <a:rPr lang="en-US" sz="2000" dirty="0">
-                <a:solidFill>
-                  <a:srgbClr val="0070C0"/>
-                </a:solidFill>
-              </a:rPr>
-              <a:t>The client needs...</a:t>
-            </a:r>
-          </a:p>
-          <a:p>
-            <a:pPr lvl="1"/>
-            <a:r>
-              <a:rPr lang="en-US" sz="1800" b="1" dirty="0">
-                <a:solidFill>
-                  <a:srgbClr val="0070C0"/>
-                </a:solidFill>
-              </a:rPr>
-              <a:t>N1</a:t>
-            </a:r>
-            <a:r>
-              <a:rPr lang="en-US" sz="1800" dirty="0">
-                <a:solidFill>
-                  <a:srgbClr val="0070C0"/>
-                </a:solidFill>
-              </a:rPr>
-              <a:t>: Awareness of data quality, security, and compliance risks</a:t>
-            </a:r>
-          </a:p>
-          <a:p>
-            <a:pPr lvl="1"/>
-            <a:r>
-              <a:rPr lang="en-US" sz="1800" b="1" dirty="0">
-                <a:solidFill>
-                  <a:srgbClr val="0070C0"/>
-                </a:solidFill>
-              </a:rPr>
-              <a:t>N2</a:t>
-            </a:r>
-            <a:r>
-              <a:rPr lang="en-US" sz="1800" dirty="0">
-                <a:solidFill>
-                  <a:srgbClr val="0070C0"/>
-                </a:solidFill>
-              </a:rPr>
-              <a:t>: Limited exposure to corrupted, incomplete, or inconsistent data in production systems</a:t>
-            </a:r>
-          </a:p>
-          <a:p>
-            <a:pPr lvl="1"/>
-            <a:r>
-              <a:rPr lang="en-US" sz="1800" b="1" dirty="0">
-                <a:solidFill>
-                  <a:srgbClr val="0070C0"/>
-                </a:solidFill>
-              </a:rPr>
-              <a:t>N3</a:t>
-            </a:r>
-            <a:r>
-              <a:rPr lang="en-US" sz="1800" dirty="0">
-                <a:solidFill>
-                  <a:srgbClr val="0070C0"/>
-                </a:solidFill>
-              </a:rPr>
-              <a:t>: A standardized process to increase adoption and correct usage of data pipelines and tools</a:t>
-            </a:r>
-          </a:p>
-          <a:p>
-            <a:pPr lvl="1"/>
-            <a:r>
-              <a:rPr lang="en-US" sz="1800" b="1" dirty="0">
-                <a:solidFill>
-                  <a:srgbClr val="0070C0"/>
-                </a:solidFill>
-              </a:rPr>
-              <a:t>N4</a:t>
-            </a:r>
-            <a:r>
-              <a:rPr lang="en-US" sz="1800" dirty="0">
-                <a:solidFill>
-                  <a:srgbClr val="0070C0"/>
-                </a:solidFill>
-              </a:rPr>
-              <a:t>: Fewer system and pipeline failures, reducing operational downtime</a:t>
-            </a:r>
-          </a:p>
-        </p:txBody>
-      </p:sp>
-      <p:sp>
-        <p:nvSpPr>
-          <p:cNvPr id="4" name="Slide Number Placeholder 3">
-            <a:extLst>
-              <a:ext uri="{FF2B5EF4-FFF2-40B4-BE49-F238E27FC236}">
-                <a16:creationId xmlns:a16="http://schemas.microsoft.com/office/drawing/2014/main" id="{0608642D-276C-988D-1526-79E65B64EE9C}"/>
-              </a:ext>
-            </a:extLst>
-          </p:cNvPr>
-          <p:cNvSpPr>
-            <a:spLocks noGrp="1"/>
-          </p:cNvSpPr>
-          <p:nvPr>
-            <p:ph type="sldNum" sz="quarter" idx="12"/>
-          </p:nvPr>
-        </p:nvSpPr>
-        <p:spPr/>
-        <p:txBody>
-          <a:bodyPr/>
-          <a:lstStyle/>
-          <a:p>
-            <a:fld id="{727B0ACA-53D9-FB44-A37C-A778C10B232A}" type="slidenum">
-              <a:rPr lang="en-US" smtClean="0"/>
-              <a:t>24</a:t>
-            </a:fld>
-            <a:endParaRPr lang="en-US"/>
-          </a:p>
-        </p:txBody>
-      </p:sp>
-    </p:spTree>
-    <p:extLst>
-      <p:ext uri="{BB962C8B-B14F-4D97-AF65-F5344CB8AC3E}">
-        <p14:creationId xmlns:p14="http://schemas.microsoft.com/office/powerpoint/2010/main" val="991667538"/>
       </p:ext>
     </p:extLst>
   </p:cSld>
@@ -7282,6 +7121,283 @@
           <p:cNvPr id="2" name="Title 1">
             <a:extLst>
               <a:ext uri="{FF2B5EF4-FFF2-40B4-BE49-F238E27FC236}">
+                <a16:creationId xmlns:a16="http://schemas.microsoft.com/office/drawing/2014/main" id="{573A541B-EDA2-FDB2-FA06-9345CAFFADDE}"/>
+              </a:ext>
+            </a:extLst>
+          </p:cNvPr>
+          <p:cNvSpPr>
+            <a:spLocks noGrp="1"/>
+          </p:cNvSpPr>
+          <p:nvPr>
+            <p:ph type="title"/>
+          </p:nvPr>
+        </p:nvSpPr>
+        <p:spPr/>
+        <p:txBody>
+          <a:bodyPr/>
+          <a:lstStyle/>
+          <a:p>
+            <a:r>
+              <a:rPr lang="en-US" b="1" dirty="0"/>
+              <a:t>Client Needs</a:t>
+            </a:r>
+          </a:p>
+        </p:txBody>
+      </p:sp>
+      <p:sp>
+        <p:nvSpPr>
+          <p:cNvPr id="3" name="Content Placeholder 2">
+            <a:extLst>
+              <a:ext uri="{FF2B5EF4-FFF2-40B4-BE49-F238E27FC236}">
+                <a16:creationId xmlns:a16="http://schemas.microsoft.com/office/drawing/2014/main" id="{ECBCA1C3-B54B-F0D2-FF7F-8261D54B9527}"/>
+              </a:ext>
+            </a:extLst>
+          </p:cNvPr>
+          <p:cNvSpPr>
+            <a:spLocks noGrp="1"/>
+          </p:cNvSpPr>
+          <p:nvPr>
+            <p:ph idx="1"/>
+          </p:nvPr>
+        </p:nvSpPr>
+        <p:spPr>
+          <a:xfrm>
+            <a:off x="628649" y="1825625"/>
+            <a:ext cx="8120239" cy="4351338"/>
+          </a:xfrm>
+        </p:spPr>
+        <p:txBody>
+          <a:bodyPr>
+            <a:noAutofit/>
+          </a:bodyPr>
+          <a:lstStyle/>
+          <a:p>
+            <a:r>
+              <a:rPr lang="en-US" sz="2000" dirty="0"/>
+              <a:t>Likely discovered as part of problem definition development,</a:t>
+            </a:r>
+            <a:br>
+              <a:rPr lang="en-US" sz="2000" dirty="0"/>
+            </a:br>
+            <a:r>
+              <a:rPr lang="en-US" sz="2000" dirty="0"/>
+              <a:t>but this allows you to expand on the problem definition with </a:t>
+            </a:r>
+            <a:r>
+              <a:rPr lang="en-US" sz="2000" b="1" dirty="0"/>
+              <a:t>statements of specific needs</a:t>
+            </a:r>
+          </a:p>
+          <a:p>
+            <a:r>
+              <a:rPr lang="en-US" sz="2000" dirty="0"/>
+              <a:t>Should be a </a:t>
+            </a:r>
+            <a:r>
+              <a:rPr lang="en-US" sz="2000" b="1" dirty="0"/>
+              <a:t>list of things </a:t>
+            </a:r>
+            <a:r>
+              <a:rPr lang="en-US" sz="2000" dirty="0"/>
+              <a:t>in clear, unambiguous, non-technical terms</a:t>
+            </a:r>
+          </a:p>
+          <a:p>
+            <a:r>
+              <a:rPr lang="en-US" sz="2000" dirty="0"/>
+              <a:t>May be </a:t>
+            </a:r>
+            <a:r>
+              <a:rPr lang="en-US" sz="2000" b="1" dirty="0"/>
+              <a:t>provided directly by the sponsor </a:t>
+            </a:r>
+            <a:r>
+              <a:rPr lang="en-US" sz="2000" dirty="0"/>
+              <a:t>or you may need to solicit and/or </a:t>
+            </a:r>
+            <a:r>
+              <a:rPr lang="en-US" sz="2000" b="1" dirty="0"/>
+              <a:t>interpret them from conversations </a:t>
+            </a:r>
+            <a:r>
+              <a:rPr lang="en-US" sz="2000" dirty="0"/>
+              <a:t>and other research</a:t>
+            </a:r>
+          </a:p>
+          <a:p>
+            <a:r>
+              <a:rPr lang="en-US" sz="2000" dirty="0"/>
+              <a:t>Number client needs for identification in </a:t>
+            </a:r>
+            <a:r>
+              <a:rPr lang="en-US" sz="2000" b="1" dirty="0"/>
+              <a:t>traceability</a:t>
+            </a:r>
+            <a:r>
+              <a:rPr lang="en-US" sz="2000" dirty="0"/>
+              <a:t> matrix</a:t>
+            </a:r>
+          </a:p>
+          <a:p>
+            <a:r>
+              <a:rPr lang="en-US" sz="2000" dirty="0">
+                <a:solidFill>
+                  <a:srgbClr val="0070C0"/>
+                </a:solidFill>
+              </a:rPr>
+              <a:t>The client needs...</a:t>
+            </a:r>
+          </a:p>
+          <a:p>
+            <a:pPr lvl="1"/>
+            <a:r>
+              <a:rPr lang="en-US" sz="1800" b="1" dirty="0">
+                <a:solidFill>
+                  <a:srgbClr val="0070C0"/>
+                </a:solidFill>
+              </a:rPr>
+              <a:t>N1</a:t>
+            </a:r>
+            <a:r>
+              <a:rPr lang="en-US" sz="1800" dirty="0">
+                <a:solidFill>
+                  <a:srgbClr val="0070C0"/>
+                </a:solidFill>
+              </a:rPr>
+              <a:t>: Awareness of data quality, security, and compliance risks</a:t>
+            </a:r>
+          </a:p>
+          <a:p>
+            <a:pPr lvl="1"/>
+            <a:r>
+              <a:rPr lang="en-US" sz="1800" b="1" dirty="0">
+                <a:solidFill>
+                  <a:srgbClr val="0070C0"/>
+                </a:solidFill>
+              </a:rPr>
+              <a:t>N2</a:t>
+            </a:r>
+            <a:r>
+              <a:rPr lang="en-US" sz="1800" dirty="0">
+                <a:solidFill>
+                  <a:srgbClr val="0070C0"/>
+                </a:solidFill>
+              </a:rPr>
+              <a:t>: Limited exposure to corrupted, incomplete, or inconsistent data in production systems</a:t>
+            </a:r>
+          </a:p>
+          <a:p>
+            <a:pPr lvl="1"/>
+            <a:r>
+              <a:rPr lang="en-US" sz="1800" b="1" dirty="0">
+                <a:solidFill>
+                  <a:srgbClr val="0070C0"/>
+                </a:solidFill>
+              </a:rPr>
+              <a:t>N3</a:t>
+            </a:r>
+            <a:r>
+              <a:rPr lang="en-US" sz="1800" dirty="0">
+                <a:solidFill>
+                  <a:srgbClr val="0070C0"/>
+                </a:solidFill>
+              </a:rPr>
+              <a:t>: A standardized process to increase adoption and correct usage of data pipelines and tools</a:t>
+            </a:r>
+          </a:p>
+          <a:p>
+            <a:pPr lvl="1"/>
+            <a:r>
+              <a:rPr lang="en-US" sz="1800" b="1" dirty="0">
+                <a:solidFill>
+                  <a:srgbClr val="0070C0"/>
+                </a:solidFill>
+              </a:rPr>
+              <a:t>N4</a:t>
+            </a:r>
+            <a:r>
+              <a:rPr lang="en-US" sz="1800" dirty="0">
+                <a:solidFill>
+                  <a:srgbClr val="0070C0"/>
+                </a:solidFill>
+              </a:rPr>
+              <a:t>: Fewer system and pipeline failures, reducing operational downtime</a:t>
+            </a:r>
+          </a:p>
+        </p:txBody>
+      </p:sp>
+      <p:sp>
+        <p:nvSpPr>
+          <p:cNvPr id="4" name="Slide Number Placeholder 3">
+            <a:extLst>
+              <a:ext uri="{FF2B5EF4-FFF2-40B4-BE49-F238E27FC236}">
+                <a16:creationId xmlns:a16="http://schemas.microsoft.com/office/drawing/2014/main" id="{0608642D-276C-988D-1526-79E65B64EE9C}"/>
+              </a:ext>
+            </a:extLst>
+          </p:cNvPr>
+          <p:cNvSpPr>
+            <a:spLocks noGrp="1"/>
+          </p:cNvSpPr>
+          <p:nvPr>
+            <p:ph type="sldNum" sz="quarter" idx="12"/>
+          </p:nvPr>
+        </p:nvSpPr>
+        <p:spPr/>
+        <p:txBody>
+          <a:bodyPr/>
+          <a:lstStyle/>
+          <a:p>
+            <a:fld id="{727B0ACA-53D9-FB44-A37C-A778C10B232A}" type="slidenum">
+              <a:rPr lang="en-US" smtClean="0"/>
+              <a:t>25</a:t>
+            </a:fld>
+            <a:endParaRPr lang="en-US"/>
+          </a:p>
+        </p:txBody>
+      </p:sp>
+    </p:spTree>
+    <p:extLst>
+      <p:ext uri="{BB962C8B-B14F-4D97-AF65-F5344CB8AC3E}">
+        <p14:creationId xmlns:p14="http://schemas.microsoft.com/office/powerpoint/2010/main" val="991667538"/>
+      </p:ext>
+    </p:extLst>
+  </p:cSld>
+  <p:clrMapOvr>
+    <a:masterClrMapping/>
+  </p:clrMapOvr>
+</p:sld>
+</file>
+
+<file path=ppt/slides/slide26.xml><?xml version="1.0" encoding="utf-8"?>
+<p:sld xmlns:a="http://schemas.openxmlformats.org/drawingml/2006/main" xmlns:r="http://schemas.openxmlformats.org/officeDocument/2006/relationships" xmlns:p="http://schemas.openxmlformats.org/presentationml/2006/main">
+  <p:cSld>
+    <p:bg>
+      <p:bgPr>
+        <a:solidFill>
+          <a:schemeClr val="bg1"/>
+        </a:solidFill>
+        <a:effectLst/>
+      </p:bgPr>
+    </p:bg>
+    <p:spTree>
+      <p:nvGrpSpPr>
+        <p:cNvPr id="1" name=""/>
+        <p:cNvGrpSpPr/>
+        <p:nvPr/>
+      </p:nvGrpSpPr>
+      <p:grpSpPr>
+        <a:xfrm>
+          <a:off x="0" y="0"/>
+          <a:ext cx="0" cy="0"/>
+          <a:chOff x="0" y="0"/>
+          <a:chExt cx="0" cy="0"/>
+        </a:xfrm>
+      </p:grpSpPr>
+      <p:sp>
+        <p:nvSpPr>
+          <p:cNvPr id="2" name="Title 1">
+            <a:extLst>
+              <a:ext uri="{FF2B5EF4-FFF2-40B4-BE49-F238E27FC236}">
                 <a16:creationId xmlns:a16="http://schemas.microsoft.com/office/drawing/2014/main" id="{779FA822-4C57-7C8F-BB9C-A795349E05FB}"/>
               </a:ext>
             </a:extLst>
@@ -7409,7 +7525,7 @@
           <a:p>
             <a:fld id="{727B0ACA-53D9-FB44-A37C-A778C10B232A}" type="slidenum">
               <a:rPr lang="en-US" smtClean="0"/>
-              <a:t>25</a:t>
+              <a:t>26</a:t>
             </a:fld>
             <a:endParaRPr lang="en-US"/>
           </a:p>
@@ -7458,7 +7574,7 @@
 </p:sld>
 </file>
 
-<file path=ppt/slides/slide26.xml><?xml version="1.0" encoding="utf-8"?>
+<file path=ppt/slides/slide27.xml><?xml version="1.0" encoding="utf-8"?>
 <p:sld xmlns:a="http://schemas.openxmlformats.org/drawingml/2006/main" xmlns:r="http://schemas.openxmlformats.org/officeDocument/2006/relationships" xmlns:p="http://schemas.openxmlformats.org/presentationml/2006/main">
   <p:cSld>
     <p:bg>
@@ -7879,7 +7995,7 @@
           <a:p>
             <a:fld id="{727B0ACA-53D9-FB44-A37C-A778C10B232A}" type="slidenum">
               <a:rPr lang="en-US" smtClean="0"/>
-              <a:t>26</a:t>
+              <a:t>27</a:t>
             </a:fld>
             <a:endParaRPr lang="en-US"/>
           </a:p>
@@ -7898,7 +8014,7 @@
 </p:sld>
 </file>
 
-<file path=ppt/slides/slide27.xml><?xml version="1.0" encoding="utf-8"?>
+<file path=ppt/slides/slide28.xml><?xml version="1.0" encoding="utf-8"?>
 <p:sld xmlns:a="http://schemas.openxmlformats.org/drawingml/2006/main" xmlns:r="http://schemas.openxmlformats.org/officeDocument/2006/relationships" xmlns:p="http://schemas.openxmlformats.org/presentationml/2006/main">
   <p:cSld>
     <p:bg>
@@ -8361,7 +8477,7 @@
           <a:p>
             <a:fld id="{727B0ACA-53D9-FB44-A37C-A778C10B232A}" type="slidenum">
               <a:rPr lang="en-US" smtClean="0"/>
-              <a:t>27</a:t>
+              <a:t>28</a:t>
             </a:fld>
             <a:endParaRPr lang="en-US"/>
           </a:p>
@@ -8380,7 +8496,7 @@
 </p:sld>
 </file>
 
-<file path=ppt/slides/slide28.xml><?xml version="1.0" encoding="utf-8"?>
+<file path=ppt/slides/slide29.xml><?xml version="1.0" encoding="utf-8"?>
 <p:sld xmlns:a="http://schemas.openxmlformats.org/drawingml/2006/main" xmlns:r="http://schemas.openxmlformats.org/officeDocument/2006/relationships" xmlns:p="http://schemas.openxmlformats.org/presentationml/2006/main">
   <p:cSld>
     <p:bg>
@@ -8733,7 +8849,7 @@
           <a:p>
             <a:fld id="{727B0ACA-53D9-FB44-A37C-A778C10B232A}" type="slidenum">
               <a:rPr lang="en-US" smtClean="0"/>
-              <a:t>28</a:t>
+              <a:t>29</a:t>
             </a:fld>
             <a:endParaRPr lang="en-US"/>
           </a:p>
@@ -8752,7 +8868,165 @@
 </p:sld>
 </file>
 
-<file path=ppt/slides/slide29.xml><?xml version="1.0" encoding="utf-8"?>
+<file path=ppt/slides/slide3.xml><?xml version="1.0" encoding="utf-8"?>
+<p:sld xmlns:a="http://schemas.openxmlformats.org/drawingml/2006/main" xmlns:r="http://schemas.openxmlformats.org/officeDocument/2006/relationships" xmlns:p="http://schemas.openxmlformats.org/presentationml/2006/main">
+  <p:cSld>
+    <p:bg>
+      <p:bgPr>
+        <a:solidFill>
+          <a:srgbClr val="F2F2F2"/>
+        </a:solidFill>
+        <a:effectLst/>
+      </p:bgPr>
+    </p:bg>
+    <p:spTree>
+      <p:nvGrpSpPr>
+        <p:cNvPr id="1" name="">
+          <a:extLst>
+            <a:ext uri="{FF2B5EF4-FFF2-40B4-BE49-F238E27FC236}">
+              <a16:creationId xmlns:a16="http://schemas.microsoft.com/office/drawing/2014/main" id="{BC5326B2-6BD3-A096-730D-E5D9E1B5652F}"/>
+            </a:ext>
+          </a:extLst>
+        </p:cNvPr>
+        <p:cNvGrpSpPr/>
+        <p:nvPr/>
+      </p:nvGrpSpPr>
+      <p:grpSpPr>
+        <a:xfrm>
+          <a:off x="0" y="0"/>
+          <a:ext cx="0" cy="0"/>
+          <a:chOff x="0" y="0"/>
+          <a:chExt cx="0" cy="0"/>
+        </a:xfrm>
+      </p:grpSpPr>
+      <p:sp>
+        <p:nvSpPr>
+          <p:cNvPr id="2" name="Title 1">
+            <a:extLst>
+              <a:ext uri="{FF2B5EF4-FFF2-40B4-BE49-F238E27FC236}">
+                <a16:creationId xmlns:a16="http://schemas.microsoft.com/office/drawing/2014/main" id="{2C986763-6FE1-B4D7-29FC-3E2837332D44}"/>
+              </a:ext>
+            </a:extLst>
+          </p:cNvPr>
+          <p:cNvSpPr>
+            <a:spLocks noGrp="1"/>
+          </p:cNvSpPr>
+          <p:nvPr>
+            <p:ph type="title"/>
+          </p:nvPr>
+        </p:nvSpPr>
+        <p:spPr/>
+        <p:txBody>
+          <a:bodyPr/>
+          <a:lstStyle/>
+          <a:p>
+            <a:r>
+              <a:rPr lang="en-US" dirty="0"/>
+              <a:t>Bosses are firing Gen Z grads just months after hiring them</a:t>
+            </a:r>
+          </a:p>
+        </p:txBody>
+      </p:sp>
+      <p:sp>
+        <p:nvSpPr>
+          <p:cNvPr id="3" name="Content Placeholder 2">
+            <a:extLst>
+              <a:ext uri="{FF2B5EF4-FFF2-40B4-BE49-F238E27FC236}">
+                <a16:creationId xmlns:a16="http://schemas.microsoft.com/office/drawing/2014/main" id="{9470F43E-9007-1D8B-9348-D42473D0EB4B}"/>
+              </a:ext>
+            </a:extLst>
+          </p:cNvPr>
+          <p:cNvSpPr>
+            <a:spLocks noGrp="1"/>
+          </p:cNvSpPr>
+          <p:nvPr>
+            <p:ph idx="1"/>
+          </p:nvPr>
+        </p:nvSpPr>
+        <p:spPr/>
+        <p:txBody>
+          <a:bodyPr>
+            <a:noAutofit/>
+          </a:bodyPr>
+          <a:lstStyle/>
+          <a:p>
+            <a:r>
+              <a:rPr lang="en-US" sz="2000" dirty="0"/>
+              <a:t>After two years of complaints, employers are now </a:t>
+            </a:r>
+            <a:r>
+              <a:rPr lang="en-US" sz="2000" i="1" dirty="0"/>
+              <a:t>acting</a:t>
+            </a:r>
+            <a:r>
+              <a:rPr lang="en-US" sz="2000" dirty="0"/>
+              <a:t>.</a:t>
+            </a:r>
+            <a:br>
+              <a:rPr lang="en-US" sz="2000" dirty="0"/>
+            </a:br>
+            <a:r>
+              <a:rPr lang="en-US" sz="2000" dirty="0"/>
+              <a:t>Many are terminating Gen Z hires within months of onboarding.</a:t>
+            </a:r>
+          </a:p>
+          <a:p>
+            <a:r>
+              <a:rPr lang="en-US" sz="2000" b="1" dirty="0"/>
+              <a:t>Top concern?</a:t>
+            </a:r>
+          </a:p>
+          <a:p>
+            <a:pPr marL="457200" lvl="1" indent="0">
+              <a:buNone/>
+            </a:pPr>
+            <a:endParaRPr lang="en-US" sz="2000" dirty="0"/>
+          </a:p>
+        </p:txBody>
+      </p:sp>
+      <p:sp>
+        <p:nvSpPr>
+          <p:cNvPr id="5" name="Slide Number Placeholder 4">
+            <a:extLst>
+              <a:ext uri="{FF2B5EF4-FFF2-40B4-BE49-F238E27FC236}">
+                <a16:creationId xmlns:a16="http://schemas.microsoft.com/office/drawing/2014/main" id="{0B773D0D-2CA1-49E6-A905-C4DEDB986A2C}"/>
+              </a:ext>
+            </a:extLst>
+          </p:cNvPr>
+          <p:cNvSpPr>
+            <a:spLocks noGrp="1"/>
+          </p:cNvSpPr>
+          <p:nvPr>
+            <p:ph type="sldNum" sz="quarter" idx="12"/>
+          </p:nvPr>
+        </p:nvSpPr>
+        <p:spPr/>
+        <p:txBody>
+          <a:bodyPr/>
+          <a:lstStyle/>
+          <a:p>
+            <a:fld id="{727B0ACA-53D9-FB44-A37C-A778C10B232A}" type="slidenum">
+              <a:rPr lang="en-US" smtClean="0"/>
+              <a:t>3</a:t>
+            </a:fld>
+            <a:endParaRPr lang="en-US"/>
+          </a:p>
+        </p:txBody>
+      </p:sp>
+    </p:spTree>
+    <p:extLst>
+      <p:ext uri="{BB962C8B-B14F-4D97-AF65-F5344CB8AC3E}">
+        <p14:creationId xmlns:p14="http://schemas.microsoft.com/office/powerpoint/2010/main" val="1838316025"/>
+      </p:ext>
+    </p:extLst>
+  </p:cSld>
+  <p:clrMapOvr>
+    <a:masterClrMapping/>
+  </p:clrMapOvr>
+</p:sld>
+</file>
+
+<file path=ppt/slides/slide30.xml><?xml version="1.0" encoding="utf-8"?>
 <p:sld xmlns:a="http://schemas.openxmlformats.org/drawingml/2006/main" xmlns:r="http://schemas.openxmlformats.org/officeDocument/2006/relationships" xmlns:p="http://schemas.openxmlformats.org/presentationml/2006/main">
   <p:cSld>
     <p:bg>
@@ -9424,7 +9698,7 @@
           <a:p>
             <a:fld id="{727B0ACA-53D9-FB44-A37C-A778C10B232A}" type="slidenum">
               <a:rPr lang="en-US" smtClean="0"/>
-              <a:t>29</a:t>
+              <a:t>30</a:t>
             </a:fld>
             <a:endParaRPr lang="en-US"/>
           </a:p>
@@ -9434,373 +9708,6 @@
     <p:extLst>
       <p:ext uri="{BB962C8B-B14F-4D97-AF65-F5344CB8AC3E}">
         <p14:creationId xmlns:p14="http://schemas.microsoft.com/office/powerpoint/2010/main" val="915696027"/>
-      </p:ext>
-    </p:extLst>
-  </p:cSld>
-  <p:clrMapOvr>
-    <a:masterClrMapping/>
-  </p:clrMapOvr>
-</p:sld>
-</file>
-
-<file path=ppt/slides/slide3.xml><?xml version="1.0" encoding="utf-8"?>
-<p:sld xmlns:a="http://schemas.openxmlformats.org/drawingml/2006/main" xmlns:r="http://schemas.openxmlformats.org/officeDocument/2006/relationships" xmlns:p="http://schemas.openxmlformats.org/presentationml/2006/main">
-  <p:cSld>
-    <p:bg>
-      <p:bgPr>
-        <a:solidFill>
-          <a:srgbClr val="F2F2F2"/>
-        </a:solidFill>
-        <a:effectLst/>
-      </p:bgPr>
-    </p:bg>
-    <p:spTree>
-      <p:nvGrpSpPr>
-        <p:cNvPr id="1" name="">
-          <a:extLst>
-            <a:ext uri="{FF2B5EF4-FFF2-40B4-BE49-F238E27FC236}">
-              <a16:creationId xmlns:a16="http://schemas.microsoft.com/office/drawing/2014/main" id="{BC5326B2-6BD3-A096-730D-E5D9E1B5652F}"/>
-            </a:ext>
-          </a:extLst>
-        </p:cNvPr>
-        <p:cNvGrpSpPr/>
-        <p:nvPr/>
-      </p:nvGrpSpPr>
-      <p:grpSpPr>
-        <a:xfrm>
-          <a:off x="0" y="0"/>
-          <a:ext cx="0" cy="0"/>
-          <a:chOff x="0" y="0"/>
-          <a:chExt cx="0" cy="0"/>
-        </a:xfrm>
-      </p:grpSpPr>
-      <p:sp>
-        <p:nvSpPr>
-          <p:cNvPr id="2" name="Title 1">
-            <a:extLst>
-              <a:ext uri="{FF2B5EF4-FFF2-40B4-BE49-F238E27FC236}">
-                <a16:creationId xmlns:a16="http://schemas.microsoft.com/office/drawing/2014/main" id="{2C986763-6FE1-B4D7-29FC-3E2837332D44}"/>
-              </a:ext>
-            </a:extLst>
-          </p:cNvPr>
-          <p:cNvSpPr>
-            <a:spLocks noGrp="1"/>
-          </p:cNvSpPr>
-          <p:nvPr>
-            <p:ph type="title"/>
-          </p:nvPr>
-        </p:nvSpPr>
-        <p:spPr/>
-        <p:txBody>
-          <a:bodyPr/>
-          <a:lstStyle/>
-          <a:p>
-            <a:r>
-              <a:rPr lang="en-US" dirty="0"/>
-              <a:t>Bosses are firing Gen Z grads just months after hiring them</a:t>
-            </a:r>
-          </a:p>
-        </p:txBody>
-      </p:sp>
-      <p:sp>
-        <p:nvSpPr>
-          <p:cNvPr id="3" name="Content Placeholder 2">
-            <a:extLst>
-              <a:ext uri="{FF2B5EF4-FFF2-40B4-BE49-F238E27FC236}">
-                <a16:creationId xmlns:a16="http://schemas.microsoft.com/office/drawing/2014/main" id="{9470F43E-9007-1D8B-9348-D42473D0EB4B}"/>
-              </a:ext>
-            </a:extLst>
-          </p:cNvPr>
-          <p:cNvSpPr>
-            <a:spLocks noGrp="1"/>
-          </p:cNvSpPr>
-          <p:nvPr>
-            <p:ph idx="1"/>
-          </p:nvPr>
-        </p:nvSpPr>
-        <p:spPr/>
-        <p:txBody>
-          <a:bodyPr>
-            <a:noAutofit/>
-          </a:bodyPr>
-          <a:lstStyle/>
-          <a:p>
-            <a:r>
-              <a:rPr lang="en-US" sz="2000" dirty="0"/>
-              <a:t>After two years of complaints, employers are now </a:t>
-            </a:r>
-            <a:r>
-              <a:rPr lang="en-US" sz="2000" i="1" dirty="0"/>
-              <a:t>acting</a:t>
-            </a:r>
-            <a:r>
-              <a:rPr lang="en-US" sz="2000" dirty="0"/>
-              <a:t>.</a:t>
-            </a:r>
-            <a:br>
-              <a:rPr lang="en-US" sz="2000" dirty="0"/>
-            </a:br>
-            <a:r>
-              <a:rPr lang="en-US" sz="2000" dirty="0"/>
-              <a:t>Many are terminating Gen Z hires within months of onboarding.</a:t>
-            </a:r>
-          </a:p>
-          <a:p>
-            <a:r>
-              <a:rPr lang="en-US" sz="2000" b="1" dirty="0"/>
-              <a:t>Top concern?</a:t>
-            </a:r>
-          </a:p>
-          <a:p>
-            <a:pPr marL="457200" lvl="1" indent="0">
-              <a:buNone/>
-            </a:pPr>
-            <a:endParaRPr lang="en-US" sz="2000" dirty="0"/>
-          </a:p>
-        </p:txBody>
-      </p:sp>
-      <p:sp>
-        <p:nvSpPr>
-          <p:cNvPr id="5" name="Slide Number Placeholder 4">
-            <a:extLst>
-              <a:ext uri="{FF2B5EF4-FFF2-40B4-BE49-F238E27FC236}">
-                <a16:creationId xmlns:a16="http://schemas.microsoft.com/office/drawing/2014/main" id="{0B773D0D-2CA1-49E6-A905-C4DEDB986A2C}"/>
-              </a:ext>
-            </a:extLst>
-          </p:cNvPr>
-          <p:cNvSpPr>
-            <a:spLocks noGrp="1"/>
-          </p:cNvSpPr>
-          <p:nvPr>
-            <p:ph type="sldNum" sz="quarter" idx="12"/>
-          </p:nvPr>
-        </p:nvSpPr>
-        <p:spPr/>
-        <p:txBody>
-          <a:bodyPr/>
-          <a:lstStyle/>
-          <a:p>
-            <a:fld id="{727B0ACA-53D9-FB44-A37C-A778C10B232A}" type="slidenum">
-              <a:rPr lang="en-US" smtClean="0"/>
-              <a:t>3</a:t>
-            </a:fld>
-            <a:endParaRPr lang="en-US"/>
-          </a:p>
-        </p:txBody>
-      </p:sp>
-    </p:spTree>
-    <p:extLst>
-      <p:ext uri="{BB962C8B-B14F-4D97-AF65-F5344CB8AC3E}">
-        <p14:creationId xmlns:p14="http://schemas.microsoft.com/office/powerpoint/2010/main" val="1838316025"/>
-      </p:ext>
-    </p:extLst>
-  </p:cSld>
-  <p:clrMapOvr>
-    <a:masterClrMapping/>
-  </p:clrMapOvr>
-</p:sld>
-</file>
-
-<file path=ppt/slides/slide30.xml><?xml version="1.0" encoding="utf-8"?>
-<p:sld xmlns:a="http://schemas.openxmlformats.org/drawingml/2006/main" xmlns:r="http://schemas.openxmlformats.org/officeDocument/2006/relationships" xmlns:p="http://schemas.openxmlformats.org/presentationml/2006/main">
-  <p:cSld>
-    <p:bg>
-      <p:bgPr>
-        <a:solidFill>
-          <a:schemeClr val="bg1"/>
-        </a:solidFill>
-        <a:effectLst/>
-      </p:bgPr>
-    </p:bg>
-    <p:spTree>
-      <p:nvGrpSpPr>
-        <p:cNvPr id="1" name=""/>
-        <p:cNvGrpSpPr/>
-        <p:nvPr/>
-      </p:nvGrpSpPr>
-      <p:grpSpPr>
-        <a:xfrm>
-          <a:off x="0" y="0"/>
-          <a:ext cx="0" cy="0"/>
-          <a:chOff x="0" y="0"/>
-          <a:chExt cx="0" cy="0"/>
-        </a:xfrm>
-      </p:grpSpPr>
-      <p:sp>
-        <p:nvSpPr>
-          <p:cNvPr id="2" name="Title 1">
-            <a:extLst>
-              <a:ext uri="{FF2B5EF4-FFF2-40B4-BE49-F238E27FC236}">
-                <a16:creationId xmlns:a16="http://schemas.microsoft.com/office/drawing/2014/main" id="{17F0DCC6-C290-7279-A8CB-CF53450EF3FF}"/>
-              </a:ext>
-            </a:extLst>
-          </p:cNvPr>
-          <p:cNvSpPr>
-            <a:spLocks noGrp="1"/>
-          </p:cNvSpPr>
-          <p:nvPr>
-            <p:ph type="title"/>
-          </p:nvPr>
-        </p:nvSpPr>
-        <p:spPr/>
-        <p:txBody>
-          <a:bodyPr/>
-          <a:lstStyle/>
-          <a:p>
-            <a:r>
-              <a:rPr lang="en-US" dirty="0"/>
-              <a:t>Phase 1 Presentation Guidelines</a:t>
-            </a:r>
-          </a:p>
-        </p:txBody>
-      </p:sp>
-      <p:sp>
-        <p:nvSpPr>
-          <p:cNvPr id="3" name="Content Placeholder 2">
-            <a:extLst>
-              <a:ext uri="{FF2B5EF4-FFF2-40B4-BE49-F238E27FC236}">
-                <a16:creationId xmlns:a16="http://schemas.microsoft.com/office/drawing/2014/main" id="{C1555F72-E6FE-0180-D884-3C0707E023EE}"/>
-              </a:ext>
-            </a:extLst>
-          </p:cNvPr>
-          <p:cNvSpPr>
-            <a:spLocks noGrp="1"/>
-          </p:cNvSpPr>
-          <p:nvPr>
-            <p:ph idx="1"/>
-          </p:nvPr>
-        </p:nvSpPr>
-        <p:spPr>
-          <a:xfrm>
-            <a:off x="628650" y="1825625"/>
-            <a:ext cx="8134350" cy="4351338"/>
-          </a:xfrm>
-        </p:spPr>
-        <p:txBody>
-          <a:bodyPr>
-            <a:noAutofit/>
-          </a:bodyPr>
-          <a:lstStyle/>
-          <a:p>
-            <a:r>
-              <a:rPr lang="en-US" sz="2200" dirty="0"/>
-              <a:t>Presentation guidelines document is posted on Canvas.</a:t>
-            </a:r>
-          </a:p>
-          <a:p>
-            <a:r>
-              <a:rPr lang="en-US" sz="2200" dirty="0"/>
-              <a:t>Provides </a:t>
-            </a:r>
-            <a:r>
-              <a:rPr lang="en-US" sz="2200" b="1" dirty="0"/>
-              <a:t>general guidelines </a:t>
-            </a:r>
-            <a:r>
-              <a:rPr lang="en-US" sz="2200" dirty="0"/>
-              <a:t>on how and what to present,</a:t>
-            </a:r>
-            <a:br>
-              <a:rPr lang="en-US" sz="2200" dirty="0"/>
-            </a:br>
-            <a:r>
-              <a:rPr lang="en-US" sz="2200" dirty="0"/>
-              <a:t>but your project should guide the content.</a:t>
-            </a:r>
-          </a:p>
-          <a:p>
-            <a:r>
-              <a:rPr lang="en-US" sz="2200" dirty="0"/>
-              <a:t>Do not try to present everything you've learned so far</a:t>
-            </a:r>
-            <a:br>
-              <a:rPr lang="en-US" sz="2200" dirty="0"/>
-            </a:br>
-            <a:r>
-              <a:rPr lang="en-US" sz="2000" b="1" dirty="0"/>
-              <a:t>(time is limited).</a:t>
-            </a:r>
-          </a:p>
-          <a:p>
-            <a:r>
-              <a:rPr lang="en-US" sz="2200" dirty="0"/>
-              <a:t>Appendix is for information you've gathered that might be relevant:</a:t>
-            </a:r>
-          </a:p>
-          <a:p>
-            <a:pPr lvl="1"/>
-            <a:r>
-              <a:rPr lang="en-US" sz="2000" dirty="0"/>
-              <a:t>Reference information as necessary in presentation,</a:t>
-            </a:r>
-          </a:p>
-          <a:p>
-            <a:pPr lvl="1"/>
-            <a:r>
-              <a:rPr lang="en-US" sz="2000" dirty="0"/>
-              <a:t>Don't present appendix slides,</a:t>
-            </a:r>
-          </a:p>
-          <a:p>
-            <a:pPr lvl="1"/>
-            <a:r>
-              <a:rPr lang="en-US" sz="2000" dirty="0"/>
-              <a:t>Technical grade for Information Gathering </a:t>
-            </a:r>
-            <a:r>
-              <a:rPr lang="en-US" sz="2000" b="1" dirty="0"/>
-              <a:t>will be</a:t>
-            </a:r>
-            <a:r>
-              <a:rPr lang="en-US" sz="2000" dirty="0"/>
-              <a:t> partially based on appendix content.</a:t>
-            </a:r>
-          </a:p>
-          <a:p>
-            <a:r>
-              <a:rPr lang="en-US" sz="2200" b="1" dirty="0"/>
-              <a:t>Practice</a:t>
-            </a:r>
-            <a:r>
-              <a:rPr lang="en-US" sz="2200" dirty="0"/>
-              <a:t> your presentation, both individual parts and as a team!</a:t>
-            </a:r>
-          </a:p>
-        </p:txBody>
-      </p:sp>
-      <p:sp>
-        <p:nvSpPr>
-          <p:cNvPr id="4" name="Slide Number Placeholder 3">
-            <a:extLst>
-              <a:ext uri="{FF2B5EF4-FFF2-40B4-BE49-F238E27FC236}">
-                <a16:creationId xmlns:a16="http://schemas.microsoft.com/office/drawing/2014/main" id="{E5253D59-56A0-7DD2-F9D3-339DF7B00B1D}"/>
-              </a:ext>
-            </a:extLst>
-          </p:cNvPr>
-          <p:cNvSpPr>
-            <a:spLocks noGrp="1"/>
-          </p:cNvSpPr>
-          <p:nvPr>
-            <p:ph type="sldNum" sz="quarter" idx="12"/>
-          </p:nvPr>
-        </p:nvSpPr>
-        <p:spPr/>
-        <p:txBody>
-          <a:bodyPr/>
-          <a:lstStyle/>
-          <a:p>
-            <a:fld id="{727B0ACA-53D9-FB44-A37C-A778C10B232A}" type="slidenum">
-              <a:rPr lang="en-US" smtClean="0"/>
-              <a:t>30</a:t>
-            </a:fld>
-            <a:endParaRPr lang="en-US"/>
-          </a:p>
-        </p:txBody>
-      </p:sp>
-    </p:spTree>
-    <p:extLst>
-      <p:ext uri="{BB962C8B-B14F-4D97-AF65-F5344CB8AC3E}">
-        <p14:creationId xmlns:p14="http://schemas.microsoft.com/office/powerpoint/2010/main" val="877954563"/>
       </p:ext>
     </p:extLst>
   </p:cSld>
@@ -9840,6 +9747,215 @@
           <p:cNvPr id="2" name="Title 1">
             <a:extLst>
               <a:ext uri="{FF2B5EF4-FFF2-40B4-BE49-F238E27FC236}">
+                <a16:creationId xmlns:a16="http://schemas.microsoft.com/office/drawing/2014/main" id="{17F0DCC6-C290-7279-A8CB-CF53450EF3FF}"/>
+              </a:ext>
+            </a:extLst>
+          </p:cNvPr>
+          <p:cNvSpPr>
+            <a:spLocks noGrp="1"/>
+          </p:cNvSpPr>
+          <p:nvPr>
+            <p:ph type="title"/>
+          </p:nvPr>
+        </p:nvSpPr>
+        <p:spPr/>
+        <p:txBody>
+          <a:bodyPr/>
+          <a:lstStyle/>
+          <a:p>
+            <a:r>
+              <a:rPr lang="en-US" dirty="0"/>
+              <a:t>Phase 1 Presentation Guidelines</a:t>
+            </a:r>
+          </a:p>
+        </p:txBody>
+      </p:sp>
+      <p:sp>
+        <p:nvSpPr>
+          <p:cNvPr id="3" name="Content Placeholder 2">
+            <a:extLst>
+              <a:ext uri="{FF2B5EF4-FFF2-40B4-BE49-F238E27FC236}">
+                <a16:creationId xmlns:a16="http://schemas.microsoft.com/office/drawing/2014/main" id="{C1555F72-E6FE-0180-D884-3C0707E023EE}"/>
+              </a:ext>
+            </a:extLst>
+          </p:cNvPr>
+          <p:cNvSpPr>
+            <a:spLocks noGrp="1"/>
+          </p:cNvSpPr>
+          <p:nvPr>
+            <p:ph idx="1"/>
+          </p:nvPr>
+        </p:nvSpPr>
+        <p:spPr>
+          <a:xfrm>
+            <a:off x="628650" y="1825625"/>
+            <a:ext cx="8134350" cy="4351338"/>
+          </a:xfrm>
+        </p:spPr>
+        <p:txBody>
+          <a:bodyPr>
+            <a:noAutofit/>
+          </a:bodyPr>
+          <a:lstStyle/>
+          <a:p>
+            <a:r>
+              <a:rPr lang="en-US" sz="2200" dirty="0"/>
+              <a:t>Presentation guidelines document is posted on Canvas.</a:t>
+            </a:r>
+          </a:p>
+          <a:p>
+            <a:r>
+              <a:rPr lang="en-US" sz="2200" dirty="0"/>
+              <a:t>Provides </a:t>
+            </a:r>
+            <a:r>
+              <a:rPr lang="en-US" sz="2200" b="1" dirty="0"/>
+              <a:t>general guidelines </a:t>
+            </a:r>
+            <a:r>
+              <a:rPr lang="en-US" sz="2200" dirty="0"/>
+              <a:t>on how and what to present,</a:t>
+            </a:r>
+            <a:br>
+              <a:rPr lang="en-US" sz="2200" dirty="0"/>
+            </a:br>
+            <a:r>
+              <a:rPr lang="en-US" sz="2200" dirty="0"/>
+              <a:t>but your project should guide the content.</a:t>
+            </a:r>
+          </a:p>
+          <a:p>
+            <a:r>
+              <a:rPr lang="en-US" sz="2200" dirty="0"/>
+              <a:t>Do not try to present everything you've learned so far</a:t>
+            </a:r>
+            <a:br>
+              <a:rPr lang="en-US" sz="2200" dirty="0"/>
+            </a:br>
+            <a:r>
+              <a:rPr lang="en-US" sz="2000" b="1" dirty="0"/>
+              <a:t>(time is limited).</a:t>
+            </a:r>
+          </a:p>
+          <a:p>
+            <a:r>
+              <a:rPr lang="en-US" sz="2200" dirty="0"/>
+              <a:t>Appendix is for information you've gathered that might be relevant:</a:t>
+            </a:r>
+          </a:p>
+          <a:p>
+            <a:pPr lvl="1"/>
+            <a:r>
+              <a:rPr lang="en-US" sz="2000" dirty="0"/>
+              <a:t>Reference information as necessary in presentation,</a:t>
+            </a:r>
+          </a:p>
+          <a:p>
+            <a:pPr lvl="1"/>
+            <a:r>
+              <a:rPr lang="en-US" sz="2000" dirty="0"/>
+              <a:t>Don't present appendix slides,</a:t>
+            </a:r>
+          </a:p>
+          <a:p>
+            <a:pPr lvl="1"/>
+            <a:r>
+              <a:rPr lang="en-US" sz="2000" dirty="0"/>
+              <a:t>Technical grade for Information Gathering </a:t>
+            </a:r>
+            <a:r>
+              <a:rPr lang="en-US" sz="2000" b="1" dirty="0"/>
+              <a:t>will be</a:t>
+            </a:r>
+            <a:r>
+              <a:rPr lang="en-US" sz="2000" dirty="0"/>
+              <a:t> partially based on appendix content.</a:t>
+            </a:r>
+          </a:p>
+          <a:p>
+            <a:r>
+              <a:rPr lang="en-US" sz="2200" b="1" dirty="0"/>
+              <a:t>Practice</a:t>
+            </a:r>
+            <a:r>
+              <a:rPr lang="en-US" sz="2200" dirty="0"/>
+              <a:t> your presentation, both individual parts and as a team!</a:t>
+            </a:r>
+          </a:p>
+        </p:txBody>
+      </p:sp>
+      <p:sp>
+        <p:nvSpPr>
+          <p:cNvPr id="4" name="Slide Number Placeholder 3">
+            <a:extLst>
+              <a:ext uri="{FF2B5EF4-FFF2-40B4-BE49-F238E27FC236}">
+                <a16:creationId xmlns:a16="http://schemas.microsoft.com/office/drawing/2014/main" id="{E5253D59-56A0-7DD2-F9D3-339DF7B00B1D}"/>
+              </a:ext>
+            </a:extLst>
+          </p:cNvPr>
+          <p:cNvSpPr>
+            <a:spLocks noGrp="1"/>
+          </p:cNvSpPr>
+          <p:nvPr>
+            <p:ph type="sldNum" sz="quarter" idx="12"/>
+          </p:nvPr>
+        </p:nvSpPr>
+        <p:spPr/>
+        <p:txBody>
+          <a:bodyPr/>
+          <a:lstStyle/>
+          <a:p>
+            <a:fld id="{727B0ACA-53D9-FB44-A37C-A778C10B232A}" type="slidenum">
+              <a:rPr lang="en-US" smtClean="0"/>
+              <a:t>31</a:t>
+            </a:fld>
+            <a:endParaRPr lang="en-US"/>
+          </a:p>
+        </p:txBody>
+      </p:sp>
+    </p:spTree>
+    <p:extLst>
+      <p:ext uri="{BB962C8B-B14F-4D97-AF65-F5344CB8AC3E}">
+        <p14:creationId xmlns:p14="http://schemas.microsoft.com/office/powerpoint/2010/main" val="877954563"/>
+      </p:ext>
+    </p:extLst>
+  </p:cSld>
+  <p:clrMapOvr>
+    <a:masterClrMapping/>
+  </p:clrMapOvr>
+</p:sld>
+</file>
+
+<file path=ppt/slides/slide32.xml><?xml version="1.0" encoding="utf-8"?>
+<p:sld xmlns:a="http://schemas.openxmlformats.org/drawingml/2006/main" xmlns:r="http://schemas.openxmlformats.org/officeDocument/2006/relationships" xmlns:p="http://schemas.openxmlformats.org/presentationml/2006/main">
+  <p:cSld>
+    <p:bg>
+      <p:bgPr>
+        <a:solidFill>
+          <a:schemeClr val="bg1"/>
+        </a:solidFill>
+        <a:effectLst/>
+      </p:bgPr>
+    </p:bg>
+    <p:spTree>
+      <p:nvGrpSpPr>
+        <p:cNvPr id="1" name=""/>
+        <p:cNvGrpSpPr/>
+        <p:nvPr/>
+      </p:nvGrpSpPr>
+      <p:grpSpPr>
+        <a:xfrm>
+          <a:off x="0" y="0"/>
+          <a:ext cx="0" cy="0"/>
+          <a:chOff x="0" y="0"/>
+          <a:chExt cx="0" cy="0"/>
+        </a:xfrm>
+      </p:grpSpPr>
+      <p:sp>
+        <p:nvSpPr>
+          <p:cNvPr id="2" name="Title 1">
+            <a:extLst>
+              <a:ext uri="{FF2B5EF4-FFF2-40B4-BE49-F238E27FC236}">
                 <a16:creationId xmlns:a16="http://schemas.microsoft.com/office/drawing/2014/main" id="{A15705B6-7097-454B-4524-591EEC679A72}"/>
               </a:ext>
             </a:extLst>
@@ -9958,7 +10074,7 @@
           <a:p>
             <a:fld id="{727B0ACA-53D9-FB44-A37C-A778C10B232A}" type="slidenum">
               <a:rPr lang="en-US" smtClean="0"/>
-              <a:t>31</a:t>
+              <a:t>32</a:t>
             </a:fld>
             <a:endParaRPr lang="en-US"/>
           </a:p>
@@ -9977,7 +10093,7 @@
 </p:sld>
 </file>
 
-<file path=ppt/slides/slide32.xml><?xml version="1.0" encoding="utf-8"?>
+<file path=ppt/slides/slide33.xml><?xml version="1.0" encoding="utf-8"?>
 <p:sld xmlns:a="http://schemas.openxmlformats.org/drawingml/2006/main" xmlns:r="http://schemas.openxmlformats.org/officeDocument/2006/relationships" xmlns:p="http://schemas.openxmlformats.org/presentationml/2006/main">
   <p:cSld>
     <p:bg>
@@ -10176,7 +10292,7 @@
           <a:p>
             <a:fld id="{727B0ACA-53D9-FB44-A37C-A778C10B232A}" type="slidenum">
               <a:rPr lang="en-US" smtClean="0"/>
-              <a:t>32</a:t>
+              <a:t>33</a:t>
             </a:fld>
             <a:endParaRPr lang="en-US"/>
           </a:p>
@@ -10225,7 +10341,7 @@
 </p:sld>
 </file>
 
-<file path=ppt/slides/slide33.xml><?xml version="1.0" encoding="utf-8"?>
+<file path=ppt/slides/slide34.xml><?xml version="1.0" encoding="utf-8"?>
 <p:sld xmlns:a="http://schemas.openxmlformats.org/drawingml/2006/main" xmlns:r="http://schemas.openxmlformats.org/officeDocument/2006/relationships" xmlns:p="http://schemas.openxmlformats.org/presentationml/2006/main">
   <p:cSld>
     <p:bg>
@@ -10374,7 +10490,7 @@
           <a:p>
             <a:fld id="{727B0ACA-53D9-FB44-A37C-A778C10B232A}" type="slidenum">
               <a:rPr lang="en-US" smtClean="0"/>
-              <a:t>33</a:t>
+              <a:t>34</a:t>
             </a:fld>
             <a:endParaRPr lang="en-US"/>
           </a:p>
@@ -10500,7 +10616,10 @@
               <a:buNone/>
             </a:pPr>
             <a:r>
-              <a:rPr lang="en-US" sz="2000" dirty="0">
+              <a:rPr lang="en-US" sz="2000" b="1" dirty="0">
+                <a:solidFill>
+                  <a:schemeClr val="accent5"/>
+                </a:solidFill>
                 <a:highlight>
                   <a:srgbClr val="FFFF00"/>
                 </a:highlight>
@@ -10780,7 +10899,7 @@
           <a:p>
             <a:r>
               <a:rPr lang="en-US" dirty="0"/>
-              <a:t>Today Agenda</a:t>
+              <a:t>Today’s Agenda</a:t>
             </a:r>
           </a:p>
         </p:txBody>
@@ -10803,7 +10922,9 @@
         </p:nvSpPr>
         <p:spPr/>
         <p:txBody>
-          <a:bodyPr/>
+          <a:bodyPr>
+            <a:normAutofit/>
+          </a:bodyPr>
           <a:lstStyle/>
           <a:p>
             <a:r>
@@ -10822,7 +10943,7 @@
                   <a:srgbClr val="00B050"/>
                 </a:solidFill>
               </a:rPr>
-              <a:t>Communications Team</a:t>
+              <a:t>Communication Team</a:t>
             </a:r>
           </a:p>
           <a:p>
@@ -10836,13 +10957,16 @@
             </a:r>
           </a:p>
           <a:p>
-            <a:r>
-              <a:rPr lang="en-US" b="1" dirty="0">
+            <a:pPr marL="457200" lvl="1" indent="0">
+              <a:buNone/>
+            </a:pPr>
+            <a:r>
+              <a:rPr lang="en-US" sz="2800" b="1" dirty="0">
                 <a:solidFill>
                   <a:srgbClr val="C00000"/>
                 </a:solidFill>
               </a:rPr>
-              <a:t>Phase 1 Presentation Guidelines</a:t>
+              <a:t>&amp; Presentation Guidelines</a:t>
             </a:r>
           </a:p>
           <a:p>

--- a/DAEN460S26/week3.pptx
+++ b/DAEN460S26/week3.pptx
@@ -5,7 +5,7 @@
     <p:sldMasterId id="2147483660" r:id="rId1"/>
   </p:sldMasterIdLst>
   <p:notesMasterIdLst>
-    <p:notesMasterId r:id="rId36"/>
+    <p:notesMasterId r:id="rId37"/>
   </p:notesMasterIdLst>
   <p:sldIdLst>
     <p:sldId id="256" r:id="rId2"/>
@@ -25,23 +25,24 @@
     <p:sldId id="291" r:id="rId16"/>
     <p:sldId id="268" r:id="rId17"/>
     <p:sldId id="283" r:id="rId18"/>
-    <p:sldId id="269" r:id="rId19"/>
-    <p:sldId id="270" r:id="rId20"/>
-    <p:sldId id="284" r:id="rId21"/>
-    <p:sldId id="285" r:id="rId22"/>
-    <p:sldId id="287" r:id="rId23"/>
-    <p:sldId id="286" r:id="rId24"/>
-    <p:sldId id="288" r:id="rId25"/>
-    <p:sldId id="271" r:id="rId26"/>
-    <p:sldId id="272" r:id="rId27"/>
-    <p:sldId id="289" r:id="rId28"/>
-    <p:sldId id="273" r:id="rId29"/>
-    <p:sldId id="282" r:id="rId30"/>
-    <p:sldId id="274" r:id="rId31"/>
-    <p:sldId id="275" r:id="rId32"/>
-    <p:sldId id="276" r:id="rId33"/>
-    <p:sldId id="277" r:id="rId34"/>
-    <p:sldId id="278" r:id="rId35"/>
+    <p:sldId id="292" r:id="rId19"/>
+    <p:sldId id="269" r:id="rId20"/>
+    <p:sldId id="270" r:id="rId21"/>
+    <p:sldId id="284" r:id="rId22"/>
+    <p:sldId id="285" r:id="rId23"/>
+    <p:sldId id="287" r:id="rId24"/>
+    <p:sldId id="286" r:id="rId25"/>
+    <p:sldId id="288" r:id="rId26"/>
+    <p:sldId id="271" r:id="rId27"/>
+    <p:sldId id="272" r:id="rId28"/>
+    <p:sldId id="289" r:id="rId29"/>
+    <p:sldId id="273" r:id="rId30"/>
+    <p:sldId id="282" r:id="rId31"/>
+    <p:sldId id="274" r:id="rId32"/>
+    <p:sldId id="275" r:id="rId33"/>
+    <p:sldId id="276" r:id="rId34"/>
+    <p:sldId id="277" r:id="rId35"/>
+    <p:sldId id="278" r:id="rId36"/>
   </p:sldIdLst>
   <p:sldSz cx="9144000" cy="6858000" type="screen4x3"/>
   <p:notesSz cx="6858000" cy="9144000"/>
@@ -230,7 +231,7 @@
           <a:p>
             <a:fld id="{9BCFA349-295A-9648-AC81-268E9C74AF3D}" type="datetimeFigureOut">
               <a:rPr lang="en-US" smtClean="0"/>
-              <a:t>1/26/26</a:t>
+              <a:t>1/27/26</a:t>
             </a:fld>
             <a:endParaRPr lang="en-US"/>
           </a:p>
@@ -628,7 +629,7 @@
           <a:p>
             <a:fld id="{71E70913-1F13-4744-B94A-DD1167A56E7D}" type="datetime1">
               <a:rPr lang="en-US" smtClean="0"/>
-              <a:t>1/26/26</a:t>
+              <a:t>1/27/26</a:t>
             </a:fld>
             <a:endParaRPr lang="en-US"/>
           </a:p>
@@ -798,7 +799,7 @@
           <a:p>
             <a:fld id="{26BAC7D1-F120-9444-A8E9-CC8E63B024C0}" type="datetime1">
               <a:rPr lang="en-US" smtClean="0"/>
-              <a:t>1/26/26</a:t>
+              <a:t>1/27/26</a:t>
             </a:fld>
             <a:endParaRPr lang="en-US"/>
           </a:p>
@@ -978,7 +979,7 @@
           <a:p>
             <a:fld id="{49D86640-3593-E045-822D-D104552937CC}" type="datetime1">
               <a:rPr lang="en-US" smtClean="0"/>
-              <a:t>1/26/26</a:t>
+              <a:t>1/27/26</a:t>
             </a:fld>
             <a:endParaRPr lang="en-US"/>
           </a:p>
@@ -1148,7 +1149,7 @@
           <a:p>
             <a:fld id="{7F27163F-7EC9-5B47-A192-CB50DE612FED}" type="datetime1">
               <a:rPr lang="en-US" smtClean="0"/>
-              <a:t>1/26/26</a:t>
+              <a:t>1/27/26</a:t>
             </a:fld>
             <a:endParaRPr lang="en-US"/>
           </a:p>
@@ -1394,7 +1395,7 @@
           <a:p>
             <a:fld id="{7734F2BC-3CB7-1146-A19E-4D5E63F3B742}" type="datetime1">
               <a:rPr lang="en-US" smtClean="0"/>
-              <a:t>1/26/26</a:t>
+              <a:t>1/27/26</a:t>
             </a:fld>
             <a:endParaRPr lang="en-US"/>
           </a:p>
@@ -1626,7 +1627,7 @@
           <a:p>
             <a:fld id="{B7F91693-1844-8848-86CC-F923317986AD}" type="datetime1">
               <a:rPr lang="en-US" smtClean="0"/>
-              <a:t>1/26/26</a:t>
+              <a:t>1/27/26</a:t>
             </a:fld>
             <a:endParaRPr lang="en-US"/>
           </a:p>
@@ -1993,7 +1994,7 @@
           <a:p>
             <a:fld id="{42C7BDF2-3CCE-3449-B48D-F4595C3D57FE}" type="datetime1">
               <a:rPr lang="en-US" smtClean="0"/>
-              <a:t>1/26/26</a:t>
+              <a:t>1/27/26</a:t>
             </a:fld>
             <a:endParaRPr lang="en-US"/>
           </a:p>
@@ -2111,7 +2112,7 @@
           <a:p>
             <a:fld id="{9659FDB3-FCD2-A24F-8241-8DA72B16D6B1}" type="datetime1">
               <a:rPr lang="en-US" smtClean="0"/>
-              <a:t>1/26/26</a:t>
+              <a:t>1/27/26</a:t>
             </a:fld>
             <a:endParaRPr lang="en-US"/>
           </a:p>
@@ -2206,7 +2207,7 @@
           <a:p>
             <a:fld id="{006AC91C-CE34-DA4E-B4C2-6B29BDE88023}" type="datetime1">
               <a:rPr lang="en-US" smtClean="0"/>
-              <a:t>1/26/26</a:t>
+              <a:t>1/27/26</a:t>
             </a:fld>
             <a:endParaRPr lang="en-US"/>
           </a:p>
@@ -2483,7 +2484,7 @@
           <a:p>
             <a:fld id="{8DE724E1-3786-E644-95CD-0EC484282321}" type="datetime1">
               <a:rPr lang="en-US" smtClean="0"/>
-              <a:t>1/26/26</a:t>
+              <a:t>1/27/26</a:t>
             </a:fld>
             <a:endParaRPr lang="en-US"/>
           </a:p>
@@ -2740,7 +2741,7 @@
           <a:p>
             <a:fld id="{26DD75EC-C44D-6048-B3A9-C5F04F3202FD}" type="datetime1">
               <a:rPr lang="en-US" smtClean="0"/>
-              <a:t>1/26/26</a:t>
+              <a:t>1/27/26</a:t>
             </a:fld>
             <a:endParaRPr lang="en-US"/>
           </a:p>
@@ -2953,7 +2954,7 @@
           <a:p>
             <a:fld id="{497CE539-832A-BA41-9408-4A63384D7065}" type="datetime1">
               <a:rPr lang="en-US" smtClean="0"/>
-              <a:t>1/26/26</a:t>
+              <a:t>1/27/26</a:t>
             </a:fld>
             <a:endParaRPr lang="en-US"/>
           </a:p>
@@ -3765,7 +3766,7 @@
           <a:p>
             <a:r>
               <a:rPr lang="en-US" dirty="0"/>
-              <a:t>Sponsor Meeting Tips</a:t>
+              <a:t>Sponsor Meeting Tips                !</a:t>
             </a:r>
           </a:p>
         </p:txBody>
@@ -3811,8 +3812,15 @@
             </a:r>
             <a:r>
               <a:rPr lang="en-US" sz="2400" dirty="0"/>
-              <a:t>),</a:t>
-            </a:r>
+              <a:t>) </a:t>
+            </a:r>
+            <a:r>
+              <a:rPr lang="en-US" sz="1400" dirty="0">
+                <a:hlinkClick r:id="rId2"/>
+              </a:rPr>
+              <a:t>https://careercloset.tamu.edu/</a:t>
+            </a:r>
+            <a:endParaRPr lang="en-US" sz="2400" dirty="0"/>
           </a:p>
           <a:p>
             <a:r>
@@ -3876,7 +3884,7 @@
               <a:t>You are representing </a:t>
             </a:r>
             <a:r>
-              <a:rPr lang="en-US" b="1" dirty="0">
+              <a:rPr lang="en-US" sz="2400" b="1" dirty="0">
                 <a:solidFill>
                   <a:srgbClr val="4B1211"/>
                 </a:solidFill>
@@ -3934,7 +3942,7 @@
           <p:nvPr/>
         </p:nvPicPr>
         <p:blipFill>
-          <a:blip r:embed="rId2"/>
+          <a:blip r:embed="rId3"/>
           <a:stretch>
             <a:fillRect/>
           </a:stretch>
@@ -3964,7 +3972,7 @@
           <p:nvPr/>
         </p:nvPicPr>
         <p:blipFill>
-          <a:blip r:embed="rId3"/>
+          <a:blip r:embed="rId4"/>
           <a:stretch>
             <a:fillRect/>
           </a:stretch>
@@ -3979,6 +3987,63 @@
           </a:prstGeom>
         </p:spPr>
       </p:pic>
+      <p:sp>
+        <p:nvSpPr>
+          <p:cNvPr id="4" name="TextBox 3">
+            <a:extLst>
+              <a:ext uri="{FF2B5EF4-FFF2-40B4-BE49-F238E27FC236}">
+                <a16:creationId xmlns:a16="http://schemas.microsoft.com/office/drawing/2014/main" id="{F93B971D-EED0-06C4-9E6D-0AF044012822}"/>
+              </a:ext>
+            </a:extLst>
+          </p:cNvPr>
+          <p:cNvSpPr txBox="1"/>
+          <p:nvPr/>
+        </p:nvSpPr>
+        <p:spPr>
+          <a:xfrm>
+            <a:off x="5685899" y="692240"/>
+            <a:ext cx="1449102" cy="671334"/>
+          </a:xfrm>
+          <a:prstGeom prst="roundRect">
+            <a:avLst>
+              <a:gd name="adj" fmla="val 6703"/>
+            </a:avLst>
+          </a:prstGeom>
+          <a:solidFill>
+            <a:schemeClr val="accent5">
+              <a:lumMod val="20000"/>
+              <a:lumOff val="80000"/>
+              <a:alpha val="50000"/>
+            </a:schemeClr>
+          </a:solidFill>
+          <a:ln w="12700">
+            <a:solidFill>
+              <a:schemeClr val="accent5">
+                <a:lumMod val="75000"/>
+              </a:schemeClr>
+            </a:solidFill>
+          </a:ln>
+        </p:spPr>
+        <p:txBody>
+          <a:bodyPr wrap="square" lIns="0" tIns="0" rIns="0" bIns="0" rtlCol="0">
+            <a:spAutoFit/>
+          </a:bodyPr>
+          <a:lstStyle/>
+          <a:p>
+            <a:pPr algn="ctr"/>
+            <a:r>
+              <a:rPr lang="en-US" sz="1400" i="1" dirty="0">
+                <a:solidFill>
+                  <a:schemeClr val="accent5">
+                    <a:lumMod val="75000"/>
+                  </a:schemeClr>
+                </a:solidFill>
+              </a:rPr>
+              <a:t>You'll be surprised by the doors this can open...</a:t>
+            </a:r>
+          </a:p>
+        </p:txBody>
+      </p:sp>
     </p:spTree>
     <p:extLst>
       <p:ext uri="{BB962C8B-B14F-4D97-AF65-F5344CB8AC3E}">
@@ -4820,11 +4885,7 @@
             </a:r>
             <a:r>
               <a:rPr lang="en-US" sz="2400" b="1" dirty="0"/>
-              <a:t>not about solutions</a:t>
-            </a:r>
-            <a:r>
-              <a:rPr lang="en-US" sz="2400" dirty="0"/>
-              <a:t>,</a:t>
+              <a:t>not about solutions;</a:t>
             </a:r>
             <a:br>
               <a:rPr lang="en-US" sz="2400" dirty="0"/>
@@ -5303,17 +5364,26 @@
                   </a:schemeClr>
                 </a:solidFill>
               </a:rPr>
-              <a:t>not about solutions</a:t>
-            </a:r>
-            <a:r>
-              <a:rPr lang="en-US" sz="2400" dirty="0">
+              <a:t>not about solutions;</a:t>
+            </a:r>
+            <a:br>
+              <a:rPr lang="en-US" sz="2400" b="1" dirty="0">
                 <a:solidFill>
                   <a:schemeClr val="bg1">
                     <a:lumMod val="50000"/>
                   </a:schemeClr>
                 </a:solidFill>
               </a:rPr>
-              <a:t>, it is about the problem/opportunity.</a:t>
+            </a:br>
+            <a:r>
+              <a:rPr lang="en-US" sz="2400" dirty="0">
+                <a:solidFill>
+                  <a:schemeClr val="bg1">
+                    <a:lumMod val="50000"/>
+                  </a:schemeClr>
+                </a:solidFill>
+              </a:rPr>
+              <a:t>it is about the problem/opportunity.</a:t>
             </a:r>
           </a:p>
           <a:p>
@@ -5396,38 +5466,10 @@
       </p:grpSpPr>
       <p:sp>
         <p:nvSpPr>
-          <p:cNvPr id="2" name="Title 1">
-            <a:extLst>
-              <a:ext uri="{FF2B5EF4-FFF2-40B4-BE49-F238E27FC236}">
-                <a16:creationId xmlns:a16="http://schemas.microsoft.com/office/drawing/2014/main" id="{2E4B71F1-3662-8338-9401-F2605A9D22CE}"/>
-              </a:ext>
-            </a:extLst>
-          </p:cNvPr>
-          <p:cNvSpPr>
-            <a:spLocks noGrp="1"/>
-          </p:cNvSpPr>
-          <p:nvPr>
-            <p:ph type="title"/>
-          </p:nvPr>
-        </p:nvSpPr>
-        <p:spPr/>
-        <p:txBody>
-          <a:bodyPr/>
-          <a:lstStyle/>
-          <a:p>
-            <a:r>
-              <a:rPr lang="en-US" b="1" dirty="0"/>
-              <a:t>Information Gathering</a:t>
-            </a:r>
-          </a:p>
-        </p:txBody>
-      </p:sp>
-      <p:sp>
-        <p:nvSpPr>
           <p:cNvPr id="3" name="Content Placeholder 2">
             <a:extLst>
               <a:ext uri="{FF2B5EF4-FFF2-40B4-BE49-F238E27FC236}">
-                <a16:creationId xmlns:a16="http://schemas.microsoft.com/office/drawing/2014/main" id="{5D56EFD8-4547-F2B4-D26B-8211E91699F4}"/>
+                <a16:creationId xmlns:a16="http://schemas.microsoft.com/office/drawing/2014/main" id="{AE7B8B6E-329F-38D2-90F0-602E0D884B35}"/>
               </a:ext>
             </a:extLst>
           </p:cNvPr>
@@ -5440,8 +5482,8 @@
         </p:nvSpPr>
         <p:spPr>
           <a:xfrm>
-            <a:off x="628650" y="1825625"/>
-            <a:ext cx="8123464" cy="4351338"/>
+            <a:off x="628650" y="3060825"/>
+            <a:ext cx="8135340" cy="3116138"/>
           </a:xfrm>
         </p:spPr>
         <p:txBody>
@@ -5451,114 +5493,104 @@
           <a:lstStyle/>
           <a:p>
             <a:r>
-              <a:rPr lang="en-US" sz="2000" dirty="0"/>
-              <a:t>Will occur continuously throughout the project,</a:t>
+              <a:rPr lang="en-US" sz="2200" dirty="0"/>
+              <a:t>Critique your own project against </a:t>
+            </a:r>
+            <a:r>
+              <a:rPr lang="en-US" sz="2200" b="1" dirty="0"/>
+              <a:t>learning goals </a:t>
+            </a:r>
+            <a:r>
+              <a:rPr lang="en-US" sz="2200" dirty="0"/>
+              <a:t>rather than </a:t>
+            </a:r>
+            <a:r>
+              <a:rPr lang="en-US" sz="2200" u="sng" dirty="0"/>
+              <a:t>technical checklists only</a:t>
+            </a:r>
+            <a:r>
+              <a:rPr lang="en-US" sz="2200" dirty="0"/>
+              <a:t>!</a:t>
+            </a:r>
+          </a:p>
+          <a:p>
+            <a:r>
+              <a:rPr lang="en-US" sz="2200" dirty="0"/>
+              <a:t>You are not being graded on reproducing a solution but</a:t>
             </a:r>
             <a:br>
-              <a:rPr lang="en-US" sz="2000" dirty="0"/>
+              <a:rPr lang="en-US" sz="2200" dirty="0"/>
             </a:br>
             <a:r>
-              <a:rPr lang="en-US" sz="2000" dirty="0"/>
-              <a:t>but critical at beginning.</a:t>
-            </a:r>
-          </a:p>
-          <a:p>
-            <a:r>
-              <a:rPr lang="en-US" sz="2000" dirty="0"/>
-              <a:t>Necessary for defining parameters and scope of project.</a:t>
-            </a:r>
-          </a:p>
-          <a:p>
-            <a:r>
-              <a:rPr lang="en-US" sz="2000" dirty="0"/>
-              <a:t>Information can include (but not limited to)</a:t>
-            </a:r>
-          </a:p>
-          <a:p>
-            <a:pPr lvl="1"/>
-            <a:r>
-              <a:rPr lang="en-US" sz="1600" dirty="0"/>
-              <a:t>Sponsor company,</a:t>
-            </a:r>
-          </a:p>
-          <a:p>
-            <a:pPr lvl="1"/>
-            <a:r>
-              <a:rPr lang="en-US" sz="1600" dirty="0"/>
-              <a:t>Industry/market,</a:t>
-            </a:r>
-          </a:p>
-          <a:p>
-            <a:pPr lvl="1"/>
-            <a:r>
-              <a:rPr lang="en-US" sz="1600" dirty="0"/>
-              <a:t>Competitors,</a:t>
-            </a:r>
-          </a:p>
-          <a:p>
-            <a:pPr lvl="1"/>
-            <a:r>
-              <a:rPr lang="en-US" sz="1600" b="1" dirty="0"/>
-              <a:t>Standards/Constraints </a:t>
-            </a:r>
-            <a:r>
-              <a:rPr lang="en-US" sz="1600" dirty="0"/>
-              <a:t>that guide or limit the solution (ABET requirement).</a:t>
-            </a:r>
-          </a:p>
-          <a:p>
-            <a:r>
-              <a:rPr lang="en-US" sz="2000" dirty="0"/>
-              <a:t>Sources can include</a:t>
-            </a:r>
-          </a:p>
-          <a:p>
-            <a:pPr lvl="1"/>
-            <a:r>
-              <a:rPr lang="en-US" sz="1600" dirty="0"/>
-              <a:t>Sponsor, trade publications or other public published material, internet.</a:t>
-            </a:r>
-          </a:p>
-          <a:p>
-            <a:r>
-              <a:rPr lang="en-US" sz="2000" b="1" dirty="0">
-                <a:solidFill>
-                  <a:srgbClr val="C00000"/>
-                </a:solidFill>
-                <a:highlight>
-                  <a:srgbClr val="FFFF00"/>
-                </a:highlight>
-              </a:rPr>
-              <a:t>The goal of Phase 1 is to gather as much information as possible</a:t>
-            </a:r>
-            <a:r>
-              <a:rPr lang="en-US" sz="2000" b="1" dirty="0">
-                <a:solidFill>
-                  <a:srgbClr val="C00000"/>
-                </a:solidFill>
-              </a:rPr>
-              <a:t>,</a:t>
+              <a:rPr lang="en-US" sz="2200" dirty="0"/>
+              <a:t>on the </a:t>
+            </a:r>
+            <a:r>
+              <a:rPr lang="en-US" sz="2200" b="1" dirty="0"/>
+              <a:t>quality of your thinking and decisions</a:t>
+            </a:r>
+            <a:r>
+              <a:rPr lang="en-US" sz="2200" dirty="0"/>
+              <a:t>!</a:t>
+            </a:r>
+          </a:p>
+          <a:p>
+            <a:r>
+              <a:rPr lang="en-US" sz="2200" dirty="0"/>
+              <a:t>Peers are not parallel workers, but as part of a </a:t>
+            </a:r>
+            <a:r>
+              <a:rPr lang="en-US" sz="2200" b="1" dirty="0"/>
+              <a:t>shared system</a:t>
+            </a:r>
+            <a:r>
+              <a:rPr lang="en-US" sz="2200" dirty="0"/>
+              <a:t>. Shift the culture from individual performance to collective responsibility and make </a:t>
+            </a:r>
+            <a:r>
+              <a:rPr lang="en-US" sz="2200" b="1" dirty="0"/>
+              <a:t>collaboration</a:t>
+            </a:r>
+            <a:r>
+              <a:rPr lang="en-US" sz="2200" dirty="0"/>
+              <a:t> (not cooperation only)!</a:t>
+            </a:r>
+          </a:p>
+          <a:p>
+            <a:r>
+              <a:rPr lang="en-US" sz="2200" b="1" dirty="0"/>
+              <a:t>Metacognition</a:t>
+            </a:r>
+            <a:r>
+              <a:rPr lang="en-US" sz="2200" dirty="0"/>
+              <a:t> ...</a:t>
             </a:r>
             <a:br>
-              <a:rPr lang="en-US" sz="2000" b="1" dirty="0">
-                <a:solidFill>
-                  <a:srgbClr val="C00000"/>
-                </a:solidFill>
-              </a:rPr>
+              <a:rPr lang="en-US" sz="2200" dirty="0"/>
             </a:br>
             <a:r>
-              <a:rPr lang="en-US" sz="2000" dirty="0"/>
-              <a:t>even if you're not sure it's relevant.</a:t>
-            </a:r>
-          </a:p>
-        </p:txBody>
-      </p:sp>
-      <p:sp>
-        <p:nvSpPr>
-          <p:cNvPr id="5" name="Slide Number Placeholder 4">
-            <a:extLst>
-              <a:ext uri="{FF2B5EF4-FFF2-40B4-BE49-F238E27FC236}">
-                <a16:creationId xmlns:a16="http://schemas.microsoft.com/office/drawing/2014/main" id="{76142C7D-C1C6-6E03-7BE8-93EAF53B8007}"/>
+              <a:rPr lang="en-US" sz="2200" dirty="0"/>
+              <a:t>why I'm thinking what I'm thinking </a:t>
+            </a:r>
+            <a:r>
+              <a:rPr lang="en-US" sz="2200" dirty="0">
+                <a:sym typeface="Wingdings" pitchFamily="2" charset="2"/>
+              </a:rPr>
+              <a:t> m</a:t>
+            </a:r>
+            <a:r>
+              <a:rPr lang="en-US" sz="2200" dirty="0"/>
+              <a:t>ake the invisible visible!</a:t>
+            </a:r>
+          </a:p>
+        </p:txBody>
+      </p:sp>
+      <p:sp>
+        <p:nvSpPr>
+          <p:cNvPr id="4" name="Slide Number Placeholder 3">
+            <a:extLst>
+              <a:ext uri="{FF2B5EF4-FFF2-40B4-BE49-F238E27FC236}">
+                <a16:creationId xmlns:a16="http://schemas.microsoft.com/office/drawing/2014/main" id="{112F7177-E4F2-112D-C5DE-580CC5F9B646}"/>
               </a:ext>
             </a:extLst>
           </p:cNvPr>
@@ -5582,10 +5614,40 @@
           </a:p>
         </p:txBody>
       </p:sp>
+      <p:pic>
+        <p:nvPicPr>
+          <p:cNvPr id="6" name="Picture 5" descr="A person drawing a staircase with words&#10;&#10;AI-generated content may be incorrect.">
+            <a:extLst>
+              <a:ext uri="{FF2B5EF4-FFF2-40B4-BE49-F238E27FC236}">
+                <a16:creationId xmlns:a16="http://schemas.microsoft.com/office/drawing/2014/main" id="{61D8DED4-5A3F-05B2-A499-861BE7FAD28A}"/>
+              </a:ext>
+            </a:extLst>
+          </p:cNvPr>
+          <p:cNvPicPr>
+            <a:picLocks noChangeAspect="1"/>
+          </p:cNvPicPr>
+          <p:nvPr/>
+        </p:nvPicPr>
+        <p:blipFill>
+          <a:blip r:embed="rId2"/>
+          <a:stretch>
+            <a:fillRect/>
+          </a:stretch>
+        </p:blipFill>
+        <p:spPr>
+          <a:xfrm>
+            <a:off x="2548830" y="185738"/>
+            <a:ext cx="4046339" cy="2695699"/>
+          </a:xfrm>
+          <a:prstGeom prst="rect">
+            <a:avLst/>
+          </a:prstGeom>
+        </p:spPr>
+      </p:pic>
     </p:spTree>
     <p:extLst>
       <p:ext uri="{BB962C8B-B14F-4D97-AF65-F5344CB8AC3E}">
-        <p14:creationId xmlns:p14="http://schemas.microsoft.com/office/powerpoint/2010/main" val="2540516832"/>
+        <p14:creationId xmlns:p14="http://schemas.microsoft.com/office/powerpoint/2010/main" val="3109610451"/>
       </p:ext>
     </p:extLst>
   </p:cSld>
@@ -5625,7 +5687,7 @@
           <p:cNvPr id="2" name="Title 1">
             <a:extLst>
               <a:ext uri="{FF2B5EF4-FFF2-40B4-BE49-F238E27FC236}">
-                <a16:creationId xmlns:a16="http://schemas.microsoft.com/office/drawing/2014/main" id="{6A69F471-75C1-BA88-3F00-EB010F52E4DF}"/>
+                <a16:creationId xmlns:a16="http://schemas.microsoft.com/office/drawing/2014/main" id="{2E4B71F1-3662-8338-9401-F2605A9D22CE}"/>
               </a:ext>
             </a:extLst>
           </p:cNvPr>
@@ -5643,7 +5705,7 @@
           <a:p>
             <a:r>
               <a:rPr lang="en-US" b="1" dirty="0"/>
-              <a:t>Problem Definition</a:t>
+              <a:t>Information Gathering</a:t>
             </a:r>
           </a:p>
         </p:txBody>
@@ -5653,7 +5715,7 @@
           <p:cNvPr id="3" name="Content Placeholder 2">
             <a:extLst>
               <a:ext uri="{FF2B5EF4-FFF2-40B4-BE49-F238E27FC236}">
-                <a16:creationId xmlns:a16="http://schemas.microsoft.com/office/drawing/2014/main" id="{8CB4F20C-AF40-5319-2ADA-6E6FF673BFFD}"/>
+                <a16:creationId xmlns:a16="http://schemas.microsoft.com/office/drawing/2014/main" id="{5D56EFD8-4547-F2B4-D26B-8211E91699F4}"/>
               </a:ext>
             </a:extLst>
           </p:cNvPr>
@@ -5666,8 +5728,8 @@
         </p:nvSpPr>
         <p:spPr>
           <a:xfrm>
-            <a:off x="628650" y="4075289"/>
-            <a:ext cx="7886700" cy="2101674"/>
+            <a:off x="628650" y="1825625"/>
+            <a:ext cx="8123464" cy="4351338"/>
           </a:xfrm>
         </p:spPr>
         <p:txBody>
@@ -5678,83 +5740,113 @@
           <a:p>
             <a:r>
               <a:rPr lang="en-US" sz="2000" dirty="0"/>
-              <a:t>Should be a </a:t>
-            </a:r>
-            <a:r>
-              <a:rPr lang="en-US" sz="2000" b="1" dirty="0"/>
-              <a:t>concise statement </a:t>
-            </a:r>
-            <a:r>
-              <a:rPr lang="en-US" sz="2000" dirty="0"/>
-              <a:t>of the problem facing your sponsor</a:t>
+              <a:t>Will occur continuously throughout the project,</a:t>
+            </a:r>
+            <a:br>
+              <a:rPr lang="en-US" sz="2000" dirty="0"/>
+            </a:br>
+            <a:r>
+              <a:rPr lang="en-US" sz="2000" dirty="0"/>
+              <a:t>but critical at beginning.</a:t>
+            </a:r>
+          </a:p>
+          <a:p>
+            <a:r>
+              <a:rPr lang="en-US" sz="2000" dirty="0"/>
+              <a:t>Necessary for defining parameters and scope of project.</a:t>
+            </a:r>
+          </a:p>
+          <a:p>
+            <a:r>
+              <a:rPr lang="en-US" sz="2000" dirty="0"/>
+              <a:t>Information can include (but not limited to)</a:t>
             </a:r>
           </a:p>
           <a:p>
             <a:pPr lvl="1"/>
             <a:r>
-              <a:rPr lang="en-US" sz="2000" dirty="0"/>
-              <a:t>Focus on the </a:t>
-            </a:r>
-            <a:r>
-              <a:rPr lang="en-US" sz="2000" u="sng" dirty="0"/>
-              <a:t>source of the problem</a:t>
-            </a:r>
-            <a:r>
-              <a:rPr lang="en-US" sz="2000" dirty="0"/>
+              <a:rPr lang="en-US" sz="1800" dirty="0"/>
+              <a:t>Sponsor company,</a:t>
+            </a:r>
+          </a:p>
+          <a:p>
+            <a:pPr lvl="1"/>
+            <a:r>
+              <a:rPr lang="en-US" sz="1800" dirty="0"/>
+              <a:t>Industry/market,</a:t>
+            </a:r>
+          </a:p>
+          <a:p>
+            <a:pPr lvl="1"/>
+            <a:r>
+              <a:rPr lang="en-US" sz="1800" dirty="0"/>
+              <a:t>Competitors,</a:t>
+            </a:r>
+          </a:p>
+          <a:p>
+            <a:pPr lvl="1"/>
+            <a:r>
+              <a:rPr lang="en-US" sz="1800" b="1" dirty="0"/>
+              <a:t>Standards/Constraints </a:t>
+            </a:r>
+            <a:r>
+              <a:rPr lang="en-US" sz="1800" dirty="0"/>
+              <a:t>that guide or limit the solution (ABET).</a:t>
+            </a:r>
+          </a:p>
+          <a:p>
+            <a:r>
+              <a:rPr lang="en-US" sz="2000" dirty="0"/>
+              <a:t>Sources can include</a:t>
+            </a:r>
+          </a:p>
+          <a:p>
+            <a:pPr lvl="1"/>
+            <a:r>
+              <a:rPr lang="en-US" sz="1800" dirty="0"/>
+              <a:t>Sponsor, trade publications or other public published material, internet.</a:t>
+            </a:r>
+          </a:p>
+          <a:p>
+            <a:r>
+              <a:rPr lang="en-US" sz="2000" b="1" dirty="0">
+                <a:solidFill>
+                  <a:srgbClr val="C00000"/>
+                </a:solidFill>
+                <a:highlight>
+                  <a:srgbClr val="FFFF00"/>
+                </a:highlight>
+              </a:rPr>
+              <a:t>The goal of Phase 1 is to gather as much information as possible</a:t>
+            </a:r>
+            <a:r>
+              <a:rPr lang="en-US" sz="2000" b="1" dirty="0">
+                <a:solidFill>
+                  <a:srgbClr val="C00000"/>
+                </a:solidFill>
+              </a:rPr>
               <a:t>,</a:t>
             </a:r>
             <a:br>
-              <a:rPr lang="en-US" sz="2000" dirty="0"/>
+              <a:rPr lang="en-US" sz="2000" b="1" dirty="0">
+                <a:solidFill>
+                  <a:srgbClr val="C00000"/>
+                </a:solidFill>
+              </a:rPr>
             </a:br>
             <a:r>
               <a:rPr lang="en-US" sz="2000" dirty="0"/>
-              <a:t>not the symptoms or solution,</a:t>
-            </a:r>
-          </a:p>
-          <a:p>
-            <a:pPr lvl="1"/>
-            <a:r>
-              <a:rPr lang="en-US" sz="2000" dirty="0"/>
-              <a:t>Keep the language simple, avoid technical jargon,</a:t>
-            </a:r>
-          </a:p>
-          <a:p>
-            <a:pPr lvl="1"/>
-            <a:r>
-              <a:rPr lang="en-US" sz="2000" dirty="0"/>
-              <a:t>Avoid detail, that will be fleshed out with customer needs.</a:t>
-            </a:r>
-          </a:p>
-          <a:p>
-            <a:r>
-              <a:rPr lang="en-US" sz="2000" dirty="0"/>
-              <a:t>Done </a:t>
-            </a:r>
-            <a:r>
-              <a:rPr lang="en-US" sz="2000" b="1" dirty="0"/>
-              <a:t>in conjunction </a:t>
-            </a:r>
-            <a:r>
-              <a:rPr lang="en-US" sz="2000" dirty="0"/>
-              <a:t>with </a:t>
-            </a:r>
-            <a:r>
-              <a:rPr lang="en-US" sz="2000" i="1" dirty="0"/>
-              <a:t>Information Gathering</a:t>
-            </a:r>
-            <a:r>
-              <a:rPr lang="en-US" sz="2000" dirty="0"/>
-              <a:t>.</a:t>
-            </a:r>
-          </a:p>
-        </p:txBody>
-      </p:sp>
-      <p:sp>
-        <p:nvSpPr>
-          <p:cNvPr id="7" name="Slide Number Placeholder 6">
-            <a:extLst>
-              <a:ext uri="{FF2B5EF4-FFF2-40B4-BE49-F238E27FC236}">
-                <a16:creationId xmlns:a16="http://schemas.microsoft.com/office/drawing/2014/main" id="{4D2EA021-8BB7-C3C5-4537-2ED2B0BF5B3B}"/>
+              <a:t>even if you're not sure it's relevant.</a:t>
+            </a:r>
+          </a:p>
+        </p:txBody>
+      </p:sp>
+      <p:sp>
+        <p:nvSpPr>
+          <p:cNvPr id="5" name="Slide Number Placeholder 4">
+            <a:extLst>
+              <a:ext uri="{FF2B5EF4-FFF2-40B4-BE49-F238E27FC236}">
+                <a16:creationId xmlns:a16="http://schemas.microsoft.com/office/drawing/2014/main" id="{76142C7D-C1C6-6E03-7BE8-93EAF53B8007}"/>
               </a:ext>
             </a:extLst>
           </p:cNvPr>
@@ -5778,40 +5870,10 @@
           </a:p>
         </p:txBody>
       </p:sp>
-      <p:pic>
-        <p:nvPicPr>
-          <p:cNvPr id="8" name="Picture 7" descr="A person in a purple suit&#10;&#10;AI-generated content may be incorrect.">
-            <a:extLst>
-              <a:ext uri="{FF2B5EF4-FFF2-40B4-BE49-F238E27FC236}">
-                <a16:creationId xmlns:a16="http://schemas.microsoft.com/office/drawing/2014/main" id="{D4F1CE43-DD88-76E5-FF11-8117CAE8BA99}"/>
-              </a:ext>
-            </a:extLst>
-          </p:cNvPr>
-          <p:cNvPicPr>
-            <a:picLocks noChangeAspect="1"/>
-          </p:cNvPicPr>
-          <p:nvPr/>
-        </p:nvPicPr>
-        <p:blipFill>
-          <a:blip r:embed="rId2"/>
-          <a:stretch>
-            <a:fillRect/>
-          </a:stretch>
-        </p:blipFill>
-        <p:spPr>
-          <a:xfrm>
-            <a:off x="3335867" y="1420111"/>
-            <a:ext cx="2472265" cy="2472265"/>
-          </a:xfrm>
-          <a:prstGeom prst="rect">
-            <a:avLst/>
-          </a:prstGeom>
-        </p:spPr>
-      </p:pic>
     </p:spTree>
     <p:extLst>
       <p:ext uri="{BB962C8B-B14F-4D97-AF65-F5344CB8AC3E}">
-        <p14:creationId xmlns:p14="http://schemas.microsoft.com/office/powerpoint/2010/main" val="3749012378"/>
+        <p14:creationId xmlns:p14="http://schemas.microsoft.com/office/powerpoint/2010/main" val="2540516832"/>
       </p:ext>
     </p:extLst>
   </p:cSld>
@@ -5931,6 +5993,232 @@
     </p:bg>
     <p:spTree>
       <p:nvGrpSpPr>
+        <p:cNvPr id="1" name=""/>
+        <p:cNvGrpSpPr/>
+        <p:nvPr/>
+      </p:nvGrpSpPr>
+      <p:grpSpPr>
+        <a:xfrm>
+          <a:off x="0" y="0"/>
+          <a:ext cx="0" cy="0"/>
+          <a:chOff x="0" y="0"/>
+          <a:chExt cx="0" cy="0"/>
+        </a:xfrm>
+      </p:grpSpPr>
+      <p:sp>
+        <p:nvSpPr>
+          <p:cNvPr id="2" name="Title 1">
+            <a:extLst>
+              <a:ext uri="{FF2B5EF4-FFF2-40B4-BE49-F238E27FC236}">
+                <a16:creationId xmlns:a16="http://schemas.microsoft.com/office/drawing/2014/main" id="{6A69F471-75C1-BA88-3F00-EB010F52E4DF}"/>
+              </a:ext>
+            </a:extLst>
+          </p:cNvPr>
+          <p:cNvSpPr>
+            <a:spLocks noGrp="1"/>
+          </p:cNvSpPr>
+          <p:nvPr>
+            <p:ph type="title"/>
+          </p:nvPr>
+        </p:nvSpPr>
+        <p:spPr/>
+        <p:txBody>
+          <a:bodyPr/>
+          <a:lstStyle/>
+          <a:p>
+            <a:r>
+              <a:rPr lang="en-US" b="1" dirty="0"/>
+              <a:t>Problem Definition</a:t>
+            </a:r>
+          </a:p>
+        </p:txBody>
+      </p:sp>
+      <p:sp>
+        <p:nvSpPr>
+          <p:cNvPr id="3" name="Content Placeholder 2">
+            <a:extLst>
+              <a:ext uri="{FF2B5EF4-FFF2-40B4-BE49-F238E27FC236}">
+                <a16:creationId xmlns:a16="http://schemas.microsoft.com/office/drawing/2014/main" id="{8CB4F20C-AF40-5319-2ADA-6E6FF673BFFD}"/>
+              </a:ext>
+            </a:extLst>
+          </p:cNvPr>
+          <p:cNvSpPr>
+            <a:spLocks noGrp="1"/>
+          </p:cNvSpPr>
+          <p:nvPr>
+            <p:ph idx="1"/>
+          </p:nvPr>
+        </p:nvSpPr>
+        <p:spPr>
+          <a:xfrm>
+            <a:off x="628650" y="4075289"/>
+            <a:ext cx="7886700" cy="2101674"/>
+          </a:xfrm>
+        </p:spPr>
+        <p:txBody>
+          <a:bodyPr>
+            <a:noAutofit/>
+          </a:bodyPr>
+          <a:lstStyle/>
+          <a:p>
+            <a:r>
+              <a:rPr lang="en-US" sz="2000" dirty="0"/>
+              <a:t>Should be a </a:t>
+            </a:r>
+            <a:r>
+              <a:rPr lang="en-US" sz="2000" b="1" dirty="0"/>
+              <a:t>concise statement </a:t>
+            </a:r>
+            <a:r>
+              <a:rPr lang="en-US" sz="2000" dirty="0"/>
+              <a:t>of the problem facing your sponsor</a:t>
+            </a:r>
+          </a:p>
+          <a:p>
+            <a:pPr lvl="1"/>
+            <a:r>
+              <a:rPr lang="en-US" sz="2000" dirty="0"/>
+              <a:t>Focus on the </a:t>
+            </a:r>
+            <a:r>
+              <a:rPr lang="en-US" sz="2000" u="sng" dirty="0"/>
+              <a:t>source of the problem</a:t>
+            </a:r>
+            <a:r>
+              <a:rPr lang="en-US" sz="2000" dirty="0"/>
+              <a:t>,</a:t>
+            </a:r>
+            <a:br>
+              <a:rPr lang="en-US" sz="2000" dirty="0"/>
+            </a:br>
+            <a:r>
+              <a:rPr lang="en-US" sz="2000" dirty="0"/>
+              <a:t>not the symptoms or solution,</a:t>
+            </a:r>
+          </a:p>
+          <a:p>
+            <a:pPr lvl="1"/>
+            <a:r>
+              <a:rPr lang="en-US" sz="2000" dirty="0"/>
+              <a:t>Keep the language simple, avoid technical jargon,</a:t>
+            </a:r>
+          </a:p>
+          <a:p>
+            <a:pPr lvl="1"/>
+            <a:r>
+              <a:rPr lang="en-US" sz="2000" dirty="0"/>
+              <a:t>Avoid detail, that will be fleshed out with customer needs.</a:t>
+            </a:r>
+          </a:p>
+          <a:p>
+            <a:r>
+              <a:rPr lang="en-US" sz="2000" dirty="0"/>
+              <a:t>Done </a:t>
+            </a:r>
+            <a:r>
+              <a:rPr lang="en-US" sz="2000" b="1" dirty="0"/>
+              <a:t>in conjunction </a:t>
+            </a:r>
+            <a:r>
+              <a:rPr lang="en-US" sz="2000" dirty="0"/>
+              <a:t>with </a:t>
+            </a:r>
+            <a:r>
+              <a:rPr lang="en-US" sz="2000" i="1" dirty="0"/>
+              <a:t>Information Gathering</a:t>
+            </a:r>
+            <a:r>
+              <a:rPr lang="en-US" sz="2000" dirty="0"/>
+              <a:t>.</a:t>
+            </a:r>
+          </a:p>
+        </p:txBody>
+      </p:sp>
+      <p:sp>
+        <p:nvSpPr>
+          <p:cNvPr id="7" name="Slide Number Placeholder 6">
+            <a:extLst>
+              <a:ext uri="{FF2B5EF4-FFF2-40B4-BE49-F238E27FC236}">
+                <a16:creationId xmlns:a16="http://schemas.microsoft.com/office/drawing/2014/main" id="{4D2EA021-8BB7-C3C5-4537-2ED2B0BF5B3B}"/>
+              </a:ext>
+            </a:extLst>
+          </p:cNvPr>
+          <p:cNvSpPr>
+            <a:spLocks noGrp="1"/>
+          </p:cNvSpPr>
+          <p:nvPr>
+            <p:ph type="sldNum" sz="quarter" idx="12"/>
+          </p:nvPr>
+        </p:nvSpPr>
+        <p:spPr/>
+        <p:txBody>
+          <a:bodyPr/>
+          <a:lstStyle/>
+          <a:p>
+            <a:fld id="{727B0ACA-53D9-FB44-A37C-A778C10B232A}" type="slidenum">
+              <a:rPr lang="en-US" smtClean="0"/>
+              <a:t>20</a:t>
+            </a:fld>
+            <a:endParaRPr lang="en-US"/>
+          </a:p>
+        </p:txBody>
+      </p:sp>
+      <p:pic>
+        <p:nvPicPr>
+          <p:cNvPr id="8" name="Picture 7" descr="A person in a purple suit&#10;&#10;AI-generated content may be incorrect.">
+            <a:extLst>
+              <a:ext uri="{FF2B5EF4-FFF2-40B4-BE49-F238E27FC236}">
+                <a16:creationId xmlns:a16="http://schemas.microsoft.com/office/drawing/2014/main" id="{D4F1CE43-DD88-76E5-FF11-8117CAE8BA99}"/>
+              </a:ext>
+            </a:extLst>
+          </p:cNvPr>
+          <p:cNvPicPr>
+            <a:picLocks noChangeAspect="1"/>
+          </p:cNvPicPr>
+          <p:nvPr/>
+        </p:nvPicPr>
+        <p:blipFill>
+          <a:blip r:embed="rId2"/>
+          <a:stretch>
+            <a:fillRect/>
+          </a:stretch>
+        </p:blipFill>
+        <p:spPr>
+          <a:xfrm>
+            <a:off x="3335867" y="1420111"/>
+            <a:ext cx="2472265" cy="2472265"/>
+          </a:xfrm>
+          <a:prstGeom prst="rect">
+            <a:avLst/>
+          </a:prstGeom>
+        </p:spPr>
+      </p:pic>
+    </p:spTree>
+    <p:extLst>
+      <p:ext uri="{BB962C8B-B14F-4D97-AF65-F5344CB8AC3E}">
+        <p14:creationId xmlns:p14="http://schemas.microsoft.com/office/powerpoint/2010/main" val="3749012378"/>
+      </p:ext>
+    </p:extLst>
+  </p:cSld>
+  <p:clrMapOvr>
+    <a:masterClrMapping/>
+  </p:clrMapOvr>
+</p:sld>
+</file>
+
+<file path=ppt/slides/slide21.xml><?xml version="1.0" encoding="utf-8"?>
+<p:sld xmlns:a="http://schemas.openxmlformats.org/drawingml/2006/main" xmlns:r="http://schemas.openxmlformats.org/officeDocument/2006/relationships" xmlns:p="http://schemas.openxmlformats.org/presentationml/2006/main">
+  <p:cSld>
+    <p:bg>
+      <p:bgPr>
+        <a:solidFill>
+          <a:schemeClr val="bg1"/>
+        </a:solidFill>
+        <a:effectLst/>
+      </p:bgPr>
+    </p:bg>
+    <p:spTree>
+      <p:nvGrpSpPr>
         <p:cNvPr id="1" name="">
           <a:extLst>
             <a:ext uri="{FF2B5EF4-FFF2-40B4-BE49-F238E27FC236}">
@@ -6213,7 +6501,7 @@
           <a:p>
             <a:fld id="{727B0ACA-53D9-FB44-A37C-A778C10B232A}" type="slidenum">
               <a:rPr lang="en-US" smtClean="0"/>
-              <a:t>20</a:t>
+              <a:t>21</a:t>
             </a:fld>
             <a:endParaRPr lang="en-US"/>
           </a:p>
@@ -6232,7 +6520,7 @@
 </p:sld>
 </file>
 
-<file path=ppt/slides/slide21.xml><?xml version="1.0" encoding="utf-8"?>
+<file path=ppt/slides/slide22.xml><?xml version="1.0" encoding="utf-8"?>
 <p:sld xmlns:a="http://schemas.openxmlformats.org/drawingml/2006/main" xmlns:r="http://schemas.openxmlformats.org/officeDocument/2006/relationships" xmlns:p="http://schemas.openxmlformats.org/presentationml/2006/main">
   <p:cSld>
     <p:spTree>
@@ -6300,7 +6588,7 @@
           <a:p>
             <a:fld id="{727B0ACA-53D9-FB44-A37C-A778C10B232A}" type="slidenum">
               <a:rPr lang="en-US" smtClean="0"/>
-              <a:t>21</a:t>
+              <a:t>22</a:t>
             </a:fld>
             <a:endParaRPr lang="en-US"/>
           </a:p>
@@ -6398,7 +6686,7 @@
 </p:sld>
 </file>
 
-<file path=ppt/slides/slide22.xml><?xml version="1.0" encoding="utf-8"?>
+<file path=ppt/slides/slide23.xml><?xml version="1.0" encoding="utf-8"?>
 <p:sld xmlns:a="http://schemas.openxmlformats.org/drawingml/2006/main" xmlns:r="http://schemas.openxmlformats.org/officeDocument/2006/relationships" xmlns:p="http://schemas.openxmlformats.org/presentationml/2006/main">
   <p:cSld>
     <p:spTree>
@@ -6549,7 +6837,7 @@
           <a:p>
             <a:fld id="{727B0ACA-53D9-FB44-A37C-A778C10B232A}" type="slidenum">
               <a:rPr lang="en-US" smtClean="0"/>
-              <a:t>22</a:t>
+              <a:t>23</a:t>
             </a:fld>
             <a:endParaRPr lang="en-US"/>
           </a:p>
@@ -6647,7 +6935,7 @@
 </p:sld>
 </file>
 
-<file path=ppt/slides/slide23.xml><?xml version="1.0" encoding="utf-8"?>
+<file path=ppt/slides/slide24.xml><?xml version="1.0" encoding="utf-8"?>
 <p:sld xmlns:a="http://schemas.openxmlformats.org/drawingml/2006/main" xmlns:r="http://schemas.openxmlformats.org/officeDocument/2006/relationships" xmlns:p="http://schemas.openxmlformats.org/presentationml/2006/main">
   <p:cSld>
     <p:spTree>
@@ -6751,7 +7039,7 @@
           <a:p>
             <a:fld id="{727B0ACA-53D9-FB44-A37C-A778C10B232A}" type="slidenum">
               <a:rPr lang="en-US" smtClean="0"/>
-              <a:t>23</a:t>
+              <a:t>24</a:t>
             </a:fld>
             <a:endParaRPr lang="en-US"/>
           </a:p>
@@ -6812,7 +7100,7 @@
 </p:sld>
 </file>
 
-<file path=ppt/slides/slide24.xml><?xml version="1.0" encoding="utf-8"?>
+<file path=ppt/slides/slide25.xml><?xml version="1.0" encoding="utf-8"?>
 <p:sld xmlns:a="http://schemas.openxmlformats.org/drawingml/2006/main" xmlns:r="http://schemas.openxmlformats.org/officeDocument/2006/relationships" xmlns:p="http://schemas.openxmlformats.org/presentationml/2006/main">
   <p:cSld>
     <p:spTree>
@@ -7072,7 +7360,7 @@
           <a:p>
             <a:fld id="{727B0ACA-53D9-FB44-A37C-A778C10B232A}" type="slidenum">
               <a:rPr lang="en-US" smtClean="0"/>
-              <a:t>24</a:t>
+              <a:t>25</a:t>
             </a:fld>
             <a:endParaRPr lang="en-US"/>
           </a:p>
@@ -7082,283 +7370,6 @@
     <p:extLst>
       <p:ext uri="{BB962C8B-B14F-4D97-AF65-F5344CB8AC3E}">
         <p14:creationId xmlns:p14="http://schemas.microsoft.com/office/powerpoint/2010/main" val="4222826247"/>
-      </p:ext>
-    </p:extLst>
-  </p:cSld>
-  <p:clrMapOvr>
-    <a:masterClrMapping/>
-  </p:clrMapOvr>
-</p:sld>
-</file>
-
-<file path=ppt/slides/slide25.xml><?xml version="1.0" encoding="utf-8"?>
-<p:sld xmlns:a="http://schemas.openxmlformats.org/drawingml/2006/main" xmlns:r="http://schemas.openxmlformats.org/officeDocument/2006/relationships" xmlns:p="http://schemas.openxmlformats.org/presentationml/2006/main">
-  <p:cSld>
-    <p:bg>
-      <p:bgPr>
-        <a:solidFill>
-          <a:schemeClr val="bg1"/>
-        </a:solidFill>
-        <a:effectLst/>
-      </p:bgPr>
-    </p:bg>
-    <p:spTree>
-      <p:nvGrpSpPr>
-        <p:cNvPr id="1" name=""/>
-        <p:cNvGrpSpPr/>
-        <p:nvPr/>
-      </p:nvGrpSpPr>
-      <p:grpSpPr>
-        <a:xfrm>
-          <a:off x="0" y="0"/>
-          <a:ext cx="0" cy="0"/>
-          <a:chOff x="0" y="0"/>
-          <a:chExt cx="0" cy="0"/>
-        </a:xfrm>
-      </p:grpSpPr>
-      <p:sp>
-        <p:nvSpPr>
-          <p:cNvPr id="2" name="Title 1">
-            <a:extLst>
-              <a:ext uri="{FF2B5EF4-FFF2-40B4-BE49-F238E27FC236}">
-                <a16:creationId xmlns:a16="http://schemas.microsoft.com/office/drawing/2014/main" id="{573A541B-EDA2-FDB2-FA06-9345CAFFADDE}"/>
-              </a:ext>
-            </a:extLst>
-          </p:cNvPr>
-          <p:cNvSpPr>
-            <a:spLocks noGrp="1"/>
-          </p:cNvSpPr>
-          <p:nvPr>
-            <p:ph type="title"/>
-          </p:nvPr>
-        </p:nvSpPr>
-        <p:spPr/>
-        <p:txBody>
-          <a:bodyPr/>
-          <a:lstStyle/>
-          <a:p>
-            <a:r>
-              <a:rPr lang="en-US" b="1" dirty="0"/>
-              <a:t>Client Needs</a:t>
-            </a:r>
-          </a:p>
-        </p:txBody>
-      </p:sp>
-      <p:sp>
-        <p:nvSpPr>
-          <p:cNvPr id="3" name="Content Placeholder 2">
-            <a:extLst>
-              <a:ext uri="{FF2B5EF4-FFF2-40B4-BE49-F238E27FC236}">
-                <a16:creationId xmlns:a16="http://schemas.microsoft.com/office/drawing/2014/main" id="{ECBCA1C3-B54B-F0D2-FF7F-8261D54B9527}"/>
-              </a:ext>
-            </a:extLst>
-          </p:cNvPr>
-          <p:cNvSpPr>
-            <a:spLocks noGrp="1"/>
-          </p:cNvSpPr>
-          <p:nvPr>
-            <p:ph idx="1"/>
-          </p:nvPr>
-        </p:nvSpPr>
-        <p:spPr>
-          <a:xfrm>
-            <a:off x="628649" y="1825625"/>
-            <a:ext cx="8120239" cy="4351338"/>
-          </a:xfrm>
-        </p:spPr>
-        <p:txBody>
-          <a:bodyPr>
-            <a:noAutofit/>
-          </a:bodyPr>
-          <a:lstStyle/>
-          <a:p>
-            <a:r>
-              <a:rPr lang="en-US" sz="2000" dirty="0"/>
-              <a:t>Likely discovered as part of problem definition development,</a:t>
-            </a:r>
-            <a:br>
-              <a:rPr lang="en-US" sz="2000" dirty="0"/>
-            </a:br>
-            <a:r>
-              <a:rPr lang="en-US" sz="2000" dirty="0"/>
-              <a:t>but this allows you to expand on the problem definition with </a:t>
-            </a:r>
-            <a:r>
-              <a:rPr lang="en-US" sz="2000" b="1" dirty="0"/>
-              <a:t>statements of specific needs</a:t>
-            </a:r>
-          </a:p>
-          <a:p>
-            <a:r>
-              <a:rPr lang="en-US" sz="2000" dirty="0"/>
-              <a:t>Should be a </a:t>
-            </a:r>
-            <a:r>
-              <a:rPr lang="en-US" sz="2000" b="1" dirty="0"/>
-              <a:t>list of things </a:t>
-            </a:r>
-            <a:r>
-              <a:rPr lang="en-US" sz="2000" dirty="0"/>
-              <a:t>in clear, unambiguous, non-technical terms</a:t>
-            </a:r>
-          </a:p>
-          <a:p>
-            <a:r>
-              <a:rPr lang="en-US" sz="2000" dirty="0"/>
-              <a:t>May be </a:t>
-            </a:r>
-            <a:r>
-              <a:rPr lang="en-US" sz="2000" b="1" dirty="0"/>
-              <a:t>provided directly by the sponsor </a:t>
-            </a:r>
-            <a:r>
-              <a:rPr lang="en-US" sz="2000" dirty="0"/>
-              <a:t>or you may need to solicit and/or </a:t>
-            </a:r>
-            <a:r>
-              <a:rPr lang="en-US" sz="2000" b="1" dirty="0"/>
-              <a:t>interpret them from conversations </a:t>
-            </a:r>
-            <a:r>
-              <a:rPr lang="en-US" sz="2000" dirty="0"/>
-              <a:t>and other research</a:t>
-            </a:r>
-          </a:p>
-          <a:p>
-            <a:r>
-              <a:rPr lang="en-US" sz="2000" dirty="0"/>
-              <a:t>Number client needs for identification in </a:t>
-            </a:r>
-            <a:r>
-              <a:rPr lang="en-US" sz="2000" b="1" dirty="0"/>
-              <a:t>traceability</a:t>
-            </a:r>
-            <a:r>
-              <a:rPr lang="en-US" sz="2000" dirty="0"/>
-              <a:t> matrix</a:t>
-            </a:r>
-          </a:p>
-          <a:p>
-            <a:r>
-              <a:rPr lang="en-US" sz="2000" dirty="0">
-                <a:solidFill>
-                  <a:srgbClr val="0070C0"/>
-                </a:solidFill>
-              </a:rPr>
-              <a:t>The client needs...</a:t>
-            </a:r>
-          </a:p>
-          <a:p>
-            <a:pPr lvl="1"/>
-            <a:r>
-              <a:rPr lang="en-US" sz="1800" b="1" dirty="0">
-                <a:solidFill>
-                  <a:srgbClr val="0070C0"/>
-                </a:solidFill>
-              </a:rPr>
-              <a:t>N1</a:t>
-            </a:r>
-            <a:r>
-              <a:rPr lang="en-US" sz="1800" dirty="0">
-                <a:solidFill>
-                  <a:srgbClr val="0070C0"/>
-                </a:solidFill>
-              </a:rPr>
-              <a:t>: Awareness of data quality, security, and compliance risks</a:t>
-            </a:r>
-          </a:p>
-          <a:p>
-            <a:pPr lvl="1"/>
-            <a:r>
-              <a:rPr lang="en-US" sz="1800" b="1" dirty="0">
-                <a:solidFill>
-                  <a:srgbClr val="0070C0"/>
-                </a:solidFill>
-              </a:rPr>
-              <a:t>N2</a:t>
-            </a:r>
-            <a:r>
-              <a:rPr lang="en-US" sz="1800" dirty="0">
-                <a:solidFill>
-                  <a:srgbClr val="0070C0"/>
-                </a:solidFill>
-              </a:rPr>
-              <a:t>: Limited exposure to corrupted, incomplete, or inconsistent data in production systems</a:t>
-            </a:r>
-          </a:p>
-          <a:p>
-            <a:pPr lvl="1"/>
-            <a:r>
-              <a:rPr lang="en-US" sz="1800" b="1" dirty="0">
-                <a:solidFill>
-                  <a:srgbClr val="0070C0"/>
-                </a:solidFill>
-              </a:rPr>
-              <a:t>N3</a:t>
-            </a:r>
-            <a:r>
-              <a:rPr lang="en-US" sz="1800" dirty="0">
-                <a:solidFill>
-                  <a:srgbClr val="0070C0"/>
-                </a:solidFill>
-              </a:rPr>
-              <a:t>: A standardized process to increase adoption and correct usage of data pipelines and tools</a:t>
-            </a:r>
-          </a:p>
-          <a:p>
-            <a:pPr lvl="1"/>
-            <a:r>
-              <a:rPr lang="en-US" sz="1800" b="1" dirty="0">
-                <a:solidFill>
-                  <a:srgbClr val="0070C0"/>
-                </a:solidFill>
-              </a:rPr>
-              <a:t>N4</a:t>
-            </a:r>
-            <a:r>
-              <a:rPr lang="en-US" sz="1800" dirty="0">
-                <a:solidFill>
-                  <a:srgbClr val="0070C0"/>
-                </a:solidFill>
-              </a:rPr>
-              <a:t>: Fewer system and pipeline failures, reducing operational downtime</a:t>
-            </a:r>
-          </a:p>
-        </p:txBody>
-      </p:sp>
-      <p:sp>
-        <p:nvSpPr>
-          <p:cNvPr id="4" name="Slide Number Placeholder 3">
-            <a:extLst>
-              <a:ext uri="{FF2B5EF4-FFF2-40B4-BE49-F238E27FC236}">
-                <a16:creationId xmlns:a16="http://schemas.microsoft.com/office/drawing/2014/main" id="{0608642D-276C-988D-1526-79E65B64EE9C}"/>
-              </a:ext>
-            </a:extLst>
-          </p:cNvPr>
-          <p:cNvSpPr>
-            <a:spLocks noGrp="1"/>
-          </p:cNvSpPr>
-          <p:nvPr>
-            <p:ph type="sldNum" sz="quarter" idx="12"/>
-          </p:nvPr>
-        </p:nvSpPr>
-        <p:spPr/>
-        <p:txBody>
-          <a:bodyPr/>
-          <a:lstStyle/>
-          <a:p>
-            <a:fld id="{727B0ACA-53D9-FB44-A37C-A778C10B232A}" type="slidenum">
-              <a:rPr lang="en-US" smtClean="0"/>
-              <a:t>25</a:t>
-            </a:fld>
-            <a:endParaRPr lang="en-US"/>
-          </a:p>
-        </p:txBody>
-      </p:sp>
-    </p:spTree>
-    <p:extLst>
-      <p:ext uri="{BB962C8B-B14F-4D97-AF65-F5344CB8AC3E}">
-        <p14:creationId xmlns:p14="http://schemas.microsoft.com/office/powerpoint/2010/main" val="991667538"/>
       </p:ext>
     </p:extLst>
   </p:cSld>
@@ -7398,6 +7409,283 @@
           <p:cNvPr id="2" name="Title 1">
             <a:extLst>
               <a:ext uri="{FF2B5EF4-FFF2-40B4-BE49-F238E27FC236}">
+                <a16:creationId xmlns:a16="http://schemas.microsoft.com/office/drawing/2014/main" id="{573A541B-EDA2-FDB2-FA06-9345CAFFADDE}"/>
+              </a:ext>
+            </a:extLst>
+          </p:cNvPr>
+          <p:cNvSpPr>
+            <a:spLocks noGrp="1"/>
+          </p:cNvSpPr>
+          <p:nvPr>
+            <p:ph type="title"/>
+          </p:nvPr>
+        </p:nvSpPr>
+        <p:spPr/>
+        <p:txBody>
+          <a:bodyPr/>
+          <a:lstStyle/>
+          <a:p>
+            <a:r>
+              <a:rPr lang="en-US" b="1" dirty="0"/>
+              <a:t>Client Needs</a:t>
+            </a:r>
+          </a:p>
+        </p:txBody>
+      </p:sp>
+      <p:sp>
+        <p:nvSpPr>
+          <p:cNvPr id="3" name="Content Placeholder 2">
+            <a:extLst>
+              <a:ext uri="{FF2B5EF4-FFF2-40B4-BE49-F238E27FC236}">
+                <a16:creationId xmlns:a16="http://schemas.microsoft.com/office/drawing/2014/main" id="{ECBCA1C3-B54B-F0D2-FF7F-8261D54B9527}"/>
+              </a:ext>
+            </a:extLst>
+          </p:cNvPr>
+          <p:cNvSpPr>
+            <a:spLocks noGrp="1"/>
+          </p:cNvSpPr>
+          <p:nvPr>
+            <p:ph idx="1"/>
+          </p:nvPr>
+        </p:nvSpPr>
+        <p:spPr>
+          <a:xfrm>
+            <a:off x="628649" y="1825625"/>
+            <a:ext cx="8120239" cy="4351338"/>
+          </a:xfrm>
+        </p:spPr>
+        <p:txBody>
+          <a:bodyPr>
+            <a:noAutofit/>
+          </a:bodyPr>
+          <a:lstStyle/>
+          <a:p>
+            <a:r>
+              <a:rPr lang="en-US" sz="2000" dirty="0"/>
+              <a:t>Likely discovered as part of problem definition development,</a:t>
+            </a:r>
+            <a:br>
+              <a:rPr lang="en-US" sz="2000" dirty="0"/>
+            </a:br>
+            <a:r>
+              <a:rPr lang="en-US" sz="2000" dirty="0"/>
+              <a:t>but this allows you to expand on the problem definition with </a:t>
+            </a:r>
+            <a:r>
+              <a:rPr lang="en-US" sz="2000" b="1" dirty="0"/>
+              <a:t>statements of specific needs</a:t>
+            </a:r>
+          </a:p>
+          <a:p>
+            <a:r>
+              <a:rPr lang="en-US" sz="2000" dirty="0"/>
+              <a:t>Should be a </a:t>
+            </a:r>
+            <a:r>
+              <a:rPr lang="en-US" sz="2000" b="1" dirty="0"/>
+              <a:t>list of things </a:t>
+            </a:r>
+            <a:r>
+              <a:rPr lang="en-US" sz="2000" dirty="0"/>
+              <a:t>in clear, unambiguous, non-technical terms</a:t>
+            </a:r>
+          </a:p>
+          <a:p>
+            <a:r>
+              <a:rPr lang="en-US" sz="2000" dirty="0"/>
+              <a:t>May be </a:t>
+            </a:r>
+            <a:r>
+              <a:rPr lang="en-US" sz="2000" b="1" dirty="0"/>
+              <a:t>provided directly by the sponsor </a:t>
+            </a:r>
+            <a:r>
+              <a:rPr lang="en-US" sz="2000" dirty="0"/>
+              <a:t>or you may need to solicit and/or </a:t>
+            </a:r>
+            <a:r>
+              <a:rPr lang="en-US" sz="2000" b="1" dirty="0"/>
+              <a:t>interpret them from conversations </a:t>
+            </a:r>
+            <a:r>
+              <a:rPr lang="en-US" sz="2000" dirty="0"/>
+              <a:t>and other research</a:t>
+            </a:r>
+          </a:p>
+          <a:p>
+            <a:r>
+              <a:rPr lang="en-US" sz="2000" dirty="0"/>
+              <a:t>Number client needs for identification in </a:t>
+            </a:r>
+            <a:r>
+              <a:rPr lang="en-US" sz="2000" b="1" dirty="0"/>
+              <a:t>traceability</a:t>
+            </a:r>
+            <a:r>
+              <a:rPr lang="en-US" sz="2000" dirty="0"/>
+              <a:t> matrix</a:t>
+            </a:r>
+          </a:p>
+          <a:p>
+            <a:r>
+              <a:rPr lang="en-US" sz="2000" dirty="0">
+                <a:solidFill>
+                  <a:srgbClr val="0070C0"/>
+                </a:solidFill>
+              </a:rPr>
+              <a:t>The client needs...</a:t>
+            </a:r>
+          </a:p>
+          <a:p>
+            <a:pPr lvl="1"/>
+            <a:r>
+              <a:rPr lang="en-US" sz="1800" b="1" dirty="0">
+                <a:solidFill>
+                  <a:srgbClr val="0070C0"/>
+                </a:solidFill>
+              </a:rPr>
+              <a:t>N1</a:t>
+            </a:r>
+            <a:r>
+              <a:rPr lang="en-US" sz="1800" dirty="0">
+                <a:solidFill>
+                  <a:srgbClr val="0070C0"/>
+                </a:solidFill>
+              </a:rPr>
+              <a:t>: Awareness of data quality, security, and compliance risks</a:t>
+            </a:r>
+          </a:p>
+          <a:p>
+            <a:pPr lvl="1"/>
+            <a:r>
+              <a:rPr lang="en-US" sz="1800" b="1" dirty="0">
+                <a:solidFill>
+                  <a:srgbClr val="0070C0"/>
+                </a:solidFill>
+              </a:rPr>
+              <a:t>N2</a:t>
+            </a:r>
+            <a:r>
+              <a:rPr lang="en-US" sz="1800" dirty="0">
+                <a:solidFill>
+                  <a:srgbClr val="0070C0"/>
+                </a:solidFill>
+              </a:rPr>
+              <a:t>: Limited exposure to corrupted, incomplete, or inconsistent data in production systems</a:t>
+            </a:r>
+          </a:p>
+          <a:p>
+            <a:pPr lvl="1"/>
+            <a:r>
+              <a:rPr lang="en-US" sz="1800" b="1" dirty="0">
+                <a:solidFill>
+                  <a:srgbClr val="0070C0"/>
+                </a:solidFill>
+              </a:rPr>
+              <a:t>N3</a:t>
+            </a:r>
+            <a:r>
+              <a:rPr lang="en-US" sz="1800" dirty="0">
+                <a:solidFill>
+                  <a:srgbClr val="0070C0"/>
+                </a:solidFill>
+              </a:rPr>
+              <a:t>: A standardized process to increase adoption and correct usage of data pipelines and tools</a:t>
+            </a:r>
+          </a:p>
+          <a:p>
+            <a:pPr lvl="1"/>
+            <a:r>
+              <a:rPr lang="en-US" sz="1800" b="1" dirty="0">
+                <a:solidFill>
+                  <a:srgbClr val="0070C0"/>
+                </a:solidFill>
+              </a:rPr>
+              <a:t>N4</a:t>
+            </a:r>
+            <a:r>
+              <a:rPr lang="en-US" sz="1800" dirty="0">
+                <a:solidFill>
+                  <a:srgbClr val="0070C0"/>
+                </a:solidFill>
+              </a:rPr>
+              <a:t>: Fewer system and pipeline failures, reducing operational downtime</a:t>
+            </a:r>
+          </a:p>
+        </p:txBody>
+      </p:sp>
+      <p:sp>
+        <p:nvSpPr>
+          <p:cNvPr id="4" name="Slide Number Placeholder 3">
+            <a:extLst>
+              <a:ext uri="{FF2B5EF4-FFF2-40B4-BE49-F238E27FC236}">
+                <a16:creationId xmlns:a16="http://schemas.microsoft.com/office/drawing/2014/main" id="{0608642D-276C-988D-1526-79E65B64EE9C}"/>
+              </a:ext>
+            </a:extLst>
+          </p:cNvPr>
+          <p:cNvSpPr>
+            <a:spLocks noGrp="1"/>
+          </p:cNvSpPr>
+          <p:nvPr>
+            <p:ph type="sldNum" sz="quarter" idx="12"/>
+          </p:nvPr>
+        </p:nvSpPr>
+        <p:spPr/>
+        <p:txBody>
+          <a:bodyPr/>
+          <a:lstStyle/>
+          <a:p>
+            <a:fld id="{727B0ACA-53D9-FB44-A37C-A778C10B232A}" type="slidenum">
+              <a:rPr lang="en-US" smtClean="0"/>
+              <a:t>26</a:t>
+            </a:fld>
+            <a:endParaRPr lang="en-US"/>
+          </a:p>
+        </p:txBody>
+      </p:sp>
+    </p:spTree>
+    <p:extLst>
+      <p:ext uri="{BB962C8B-B14F-4D97-AF65-F5344CB8AC3E}">
+        <p14:creationId xmlns:p14="http://schemas.microsoft.com/office/powerpoint/2010/main" val="991667538"/>
+      </p:ext>
+    </p:extLst>
+  </p:cSld>
+  <p:clrMapOvr>
+    <a:masterClrMapping/>
+  </p:clrMapOvr>
+</p:sld>
+</file>
+
+<file path=ppt/slides/slide27.xml><?xml version="1.0" encoding="utf-8"?>
+<p:sld xmlns:a="http://schemas.openxmlformats.org/drawingml/2006/main" xmlns:r="http://schemas.openxmlformats.org/officeDocument/2006/relationships" xmlns:p="http://schemas.openxmlformats.org/presentationml/2006/main">
+  <p:cSld>
+    <p:bg>
+      <p:bgPr>
+        <a:solidFill>
+          <a:schemeClr val="bg1"/>
+        </a:solidFill>
+        <a:effectLst/>
+      </p:bgPr>
+    </p:bg>
+    <p:spTree>
+      <p:nvGrpSpPr>
+        <p:cNvPr id="1" name=""/>
+        <p:cNvGrpSpPr/>
+        <p:nvPr/>
+      </p:nvGrpSpPr>
+      <p:grpSpPr>
+        <a:xfrm>
+          <a:off x="0" y="0"/>
+          <a:ext cx="0" cy="0"/>
+          <a:chOff x="0" y="0"/>
+          <a:chExt cx="0" cy="0"/>
+        </a:xfrm>
+      </p:grpSpPr>
+      <p:sp>
+        <p:nvSpPr>
+          <p:cNvPr id="2" name="Title 1">
+            <a:extLst>
+              <a:ext uri="{FF2B5EF4-FFF2-40B4-BE49-F238E27FC236}">
                 <a16:creationId xmlns:a16="http://schemas.microsoft.com/office/drawing/2014/main" id="{779FA822-4C57-7C8F-BB9C-A795349E05FB}"/>
               </a:ext>
             </a:extLst>
@@ -7525,7 +7813,7 @@
           <a:p>
             <a:fld id="{727B0ACA-53D9-FB44-A37C-A778C10B232A}" type="slidenum">
               <a:rPr lang="en-US" smtClean="0"/>
-              <a:t>26</a:t>
+              <a:t>27</a:t>
             </a:fld>
             <a:endParaRPr lang="en-US"/>
           </a:p>
@@ -7574,7 +7862,7 @@
 </p:sld>
 </file>
 
-<file path=ppt/slides/slide27.xml><?xml version="1.0" encoding="utf-8"?>
+<file path=ppt/slides/slide28.xml><?xml version="1.0" encoding="utf-8"?>
 <p:sld xmlns:a="http://schemas.openxmlformats.org/drawingml/2006/main" xmlns:r="http://schemas.openxmlformats.org/officeDocument/2006/relationships" xmlns:p="http://schemas.openxmlformats.org/presentationml/2006/main">
   <p:cSld>
     <p:bg>
@@ -7995,7 +8283,7 @@
           <a:p>
             <a:fld id="{727B0ACA-53D9-FB44-A37C-A778C10B232A}" type="slidenum">
               <a:rPr lang="en-US" smtClean="0"/>
-              <a:t>27</a:t>
+              <a:t>28</a:t>
             </a:fld>
             <a:endParaRPr lang="en-US"/>
           </a:p>
@@ -8014,7 +8302,7 @@
 </p:sld>
 </file>
 
-<file path=ppt/slides/slide28.xml><?xml version="1.0" encoding="utf-8"?>
+<file path=ppt/slides/slide29.xml><?xml version="1.0" encoding="utf-8"?>
 <p:sld xmlns:a="http://schemas.openxmlformats.org/drawingml/2006/main" xmlns:r="http://schemas.openxmlformats.org/officeDocument/2006/relationships" xmlns:p="http://schemas.openxmlformats.org/presentationml/2006/main">
   <p:cSld>
     <p:bg>
@@ -8477,7 +8765,7 @@
           <a:p>
             <a:fld id="{727B0ACA-53D9-FB44-A37C-A778C10B232A}" type="slidenum">
               <a:rPr lang="en-US" smtClean="0"/>
-              <a:t>28</a:t>
+              <a:t>29</a:t>
             </a:fld>
             <a:endParaRPr lang="en-US"/>
           </a:p>
@@ -8487,378 +8775,6 @@
     <p:extLst>
       <p:ext uri="{BB962C8B-B14F-4D97-AF65-F5344CB8AC3E}">
         <p14:creationId xmlns:p14="http://schemas.microsoft.com/office/powerpoint/2010/main" val="3934400447"/>
-      </p:ext>
-    </p:extLst>
-  </p:cSld>
-  <p:clrMapOvr>
-    <a:masterClrMapping/>
-  </p:clrMapOvr>
-</p:sld>
-</file>
-
-<file path=ppt/slides/slide29.xml><?xml version="1.0" encoding="utf-8"?>
-<p:sld xmlns:a="http://schemas.openxmlformats.org/drawingml/2006/main" xmlns:r="http://schemas.openxmlformats.org/officeDocument/2006/relationships" xmlns:p="http://schemas.openxmlformats.org/presentationml/2006/main">
-  <p:cSld>
-    <p:bg>
-      <p:bgPr>
-        <a:solidFill>
-          <a:schemeClr val="bg1"/>
-        </a:solidFill>
-        <a:effectLst/>
-      </p:bgPr>
-    </p:bg>
-    <p:spTree>
-      <p:nvGrpSpPr>
-        <p:cNvPr id="1" name="">
-          <a:extLst>
-            <a:ext uri="{FF2B5EF4-FFF2-40B4-BE49-F238E27FC236}">
-              <a16:creationId xmlns:a16="http://schemas.microsoft.com/office/drawing/2014/main" id="{3362B5DA-3199-4699-A99F-8B2739E974FE}"/>
-            </a:ext>
-          </a:extLst>
-        </p:cNvPr>
-        <p:cNvGrpSpPr/>
-        <p:nvPr/>
-      </p:nvGrpSpPr>
-      <p:grpSpPr>
-        <a:xfrm>
-          <a:off x="0" y="0"/>
-          <a:ext cx="0" cy="0"/>
-          <a:chOff x="0" y="0"/>
-          <a:chExt cx="0" cy="0"/>
-        </a:xfrm>
-      </p:grpSpPr>
-      <p:sp>
-        <p:nvSpPr>
-          <p:cNvPr id="2" name="Title 1">
-            <a:extLst>
-              <a:ext uri="{FF2B5EF4-FFF2-40B4-BE49-F238E27FC236}">
-                <a16:creationId xmlns:a16="http://schemas.microsoft.com/office/drawing/2014/main" id="{6084106C-7539-C4F2-4CE2-975709C5CE4F}"/>
-              </a:ext>
-            </a:extLst>
-          </p:cNvPr>
-          <p:cNvSpPr>
-            <a:spLocks noGrp="1"/>
-          </p:cNvSpPr>
-          <p:nvPr>
-            <p:ph type="title"/>
-          </p:nvPr>
-        </p:nvSpPr>
-        <p:spPr/>
-        <p:txBody>
-          <a:bodyPr>
-            <a:normAutofit/>
-          </a:bodyPr>
-          <a:lstStyle/>
-          <a:p>
-            <a:r>
-              <a:rPr lang="en-US" dirty="0"/>
-              <a:t>Example</a:t>
-            </a:r>
-            <a:br>
-              <a:rPr lang="en-US" dirty="0"/>
-            </a:br>
-            <a:r>
-              <a:rPr lang="en-US" sz="2700" dirty="0">
-                <a:solidFill>
-                  <a:schemeClr val="accent5"/>
-                </a:solidFill>
-              </a:rPr>
-              <a:t>Research-Oriented Data Engineering Project Objectives</a:t>
-            </a:r>
-          </a:p>
-        </p:txBody>
-      </p:sp>
-      <p:sp>
-        <p:nvSpPr>
-          <p:cNvPr id="3" name="Content Placeholder 2">
-            <a:extLst>
-              <a:ext uri="{FF2B5EF4-FFF2-40B4-BE49-F238E27FC236}">
-                <a16:creationId xmlns:a16="http://schemas.microsoft.com/office/drawing/2014/main" id="{7C54D766-37A3-9B8E-05A8-84FA9ED2B1FC}"/>
-              </a:ext>
-            </a:extLst>
-          </p:cNvPr>
-          <p:cNvSpPr>
-            <a:spLocks noGrp="1"/>
-          </p:cNvSpPr>
-          <p:nvPr>
-            <p:ph idx="1"/>
-          </p:nvPr>
-        </p:nvSpPr>
-        <p:spPr>
-          <a:xfrm>
-            <a:off x="628650" y="1825625"/>
-            <a:ext cx="8233128" cy="4351338"/>
-          </a:xfrm>
-        </p:spPr>
-        <p:txBody>
-          <a:bodyPr>
-            <a:noAutofit/>
-          </a:bodyPr>
-          <a:lstStyle/>
-          <a:p>
-            <a:pPr marL="0" indent="0">
-              <a:buNone/>
-            </a:pPr>
-            <a:r>
-              <a:rPr lang="en-US" sz="1800" dirty="0"/>
-              <a:t>Suppose your team is studying </a:t>
-            </a:r>
-            <a:r>
-              <a:rPr lang="en-US" sz="1800" u="sng" dirty="0"/>
-              <a:t>data pipeline reliability </a:t>
-            </a:r>
-            <a:r>
-              <a:rPr lang="en-US" sz="1800" dirty="0"/>
-              <a:t>in large-scale streaming systems. Your technical objectives might be:</a:t>
-            </a:r>
-          </a:p>
-          <a:p>
-            <a:r>
-              <a:rPr lang="en-US" sz="1800" b="1" dirty="0"/>
-              <a:t>Key Questions</a:t>
-            </a:r>
-            <a:br>
-              <a:rPr lang="en-US" sz="1600" dirty="0"/>
-            </a:br>
-            <a:r>
-              <a:rPr lang="en-US" sz="1400" b="1" dirty="0">
-                <a:solidFill>
-                  <a:schemeClr val="accent5"/>
-                </a:solidFill>
-              </a:rPr>
-              <a:t>– What factors </a:t>
-            </a:r>
-            <a:r>
-              <a:rPr lang="en-US" sz="1400" dirty="0">
-                <a:solidFill>
-                  <a:schemeClr val="accent5"/>
-                </a:solidFill>
-              </a:rPr>
-              <a:t>most strongly influence end-to-end latency and data loss in a real-time streaming  </a:t>
-            </a:r>
-            <a:br>
-              <a:rPr lang="en-US" sz="1400" dirty="0">
-                <a:solidFill>
-                  <a:schemeClr val="accent5"/>
-                </a:solidFill>
-              </a:rPr>
-            </a:br>
-            <a:r>
-              <a:rPr lang="en-US" sz="1400" dirty="0">
-                <a:solidFill>
-                  <a:schemeClr val="accent5"/>
-                </a:solidFill>
-              </a:rPr>
-              <a:t>   pipeline?</a:t>
-            </a:r>
-            <a:br>
-              <a:rPr lang="en-US" sz="1400" dirty="0">
-                <a:solidFill>
-                  <a:schemeClr val="accent5"/>
-                </a:solidFill>
-              </a:rPr>
-            </a:br>
-            <a:r>
-              <a:rPr lang="en-US" sz="1400" b="1" dirty="0">
-                <a:solidFill>
-                  <a:schemeClr val="accent5"/>
-                </a:solidFill>
-              </a:rPr>
-              <a:t>– How do different </a:t>
-            </a:r>
-            <a:r>
-              <a:rPr lang="en-US" sz="1400" dirty="0">
-                <a:solidFill>
-                  <a:schemeClr val="accent5"/>
-                </a:solidFill>
-              </a:rPr>
-              <a:t>buffering strategies affect system stability under peak load?</a:t>
-            </a:r>
-          </a:p>
-          <a:p>
-            <a:r>
-              <a:rPr lang="en-US" sz="1800" b="1" dirty="0"/>
-              <a:t>Analytical Frameworks</a:t>
-            </a:r>
-            <a:br>
-              <a:rPr lang="en-US" sz="1600" b="1" dirty="0"/>
-            </a:br>
-            <a:r>
-              <a:rPr lang="en-US" sz="1400" b="1" dirty="0">
-                <a:solidFill>
-                  <a:schemeClr val="accent5"/>
-                </a:solidFill>
-              </a:rPr>
-              <a:t>– Develop a benchmarking framework </a:t>
-            </a:r>
-            <a:r>
-              <a:rPr lang="en-US" sz="1400" dirty="0">
-                <a:solidFill>
-                  <a:schemeClr val="accent5"/>
-                </a:solidFill>
-              </a:rPr>
-              <a:t>to simulate varying data arrival rates and system loads.</a:t>
-            </a:r>
-            <a:br>
-              <a:rPr lang="en-US" sz="1400" dirty="0">
-                <a:solidFill>
-                  <a:schemeClr val="accent5"/>
-                </a:solidFill>
-              </a:rPr>
-            </a:br>
-            <a:r>
-              <a:rPr lang="en-US" sz="1400" b="1" dirty="0">
-                <a:solidFill>
-                  <a:schemeClr val="accent5"/>
-                </a:solidFill>
-              </a:rPr>
-              <a:t>– Design experiments </a:t>
-            </a:r>
-            <a:r>
-              <a:rPr lang="en-US" sz="1400" dirty="0">
-                <a:solidFill>
-                  <a:schemeClr val="accent5"/>
-                </a:solidFill>
-              </a:rPr>
-              <a:t>using controlled workloads to compare multiple pipeline architectures.</a:t>
-            </a:r>
-          </a:p>
-          <a:p>
-            <a:r>
-              <a:rPr lang="en-US" sz="1800" b="1" dirty="0"/>
-              <a:t>System Relationships</a:t>
-            </a:r>
-            <a:br>
-              <a:rPr lang="en-US" sz="1600" b="1" dirty="0"/>
-            </a:br>
-            <a:r>
-              <a:rPr lang="en-US" sz="1400" b="1" dirty="0">
-                <a:solidFill>
-                  <a:schemeClr val="accent5"/>
-                </a:solidFill>
-              </a:rPr>
-              <a:t>– Analyze how </a:t>
-            </a:r>
-            <a:r>
-              <a:rPr lang="en-US" sz="1400" dirty="0">
-                <a:solidFill>
-                  <a:schemeClr val="accent5"/>
-                </a:solidFill>
-              </a:rPr>
-              <a:t>ingestion rate, buffer size, and processing throughput interact to produce bottlenecks.</a:t>
-            </a:r>
-            <a:br>
-              <a:rPr lang="en-US" sz="1400" dirty="0">
-                <a:solidFill>
-                  <a:schemeClr val="accent5"/>
-                </a:solidFill>
-              </a:rPr>
-            </a:br>
-            <a:r>
-              <a:rPr lang="en-US" sz="1400" b="1" dirty="0">
-                <a:solidFill>
-                  <a:schemeClr val="accent5"/>
-                </a:solidFill>
-              </a:rPr>
-              <a:t>– Model the relationship between </a:t>
-            </a:r>
-            <a:r>
-              <a:rPr lang="en-US" sz="1400" dirty="0">
-                <a:solidFill>
-                  <a:schemeClr val="accent5"/>
-                </a:solidFill>
-              </a:rPr>
-              <a:t>fault frequency and recovery time.</a:t>
-            </a:r>
-          </a:p>
-          <a:p>
-            <a:r>
-              <a:rPr lang="en-US" sz="1800" b="1" dirty="0"/>
-              <a:t>Conceptual or Qualitative Deliverables</a:t>
-            </a:r>
-            <a:br>
-              <a:rPr lang="en-US" sz="1600" b="1" dirty="0"/>
-            </a:br>
-            <a:r>
-              <a:rPr lang="en-US" sz="1400" b="1" dirty="0">
-                <a:solidFill>
-                  <a:schemeClr val="accent5"/>
-                </a:solidFill>
-              </a:rPr>
-              <a:t>– Produce a decision framework that guides engineers </a:t>
-            </a:r>
-            <a:r>
-              <a:rPr lang="en-US" sz="1400" dirty="0">
-                <a:solidFill>
-                  <a:schemeClr val="accent5"/>
-                </a:solidFill>
-              </a:rPr>
-              <a:t>in selecting buffering and checkpointing strategies.</a:t>
-            </a:r>
-            <a:br>
-              <a:rPr lang="en-US" sz="1400" dirty="0">
-                <a:solidFill>
-                  <a:schemeClr val="accent5"/>
-                </a:solidFill>
-              </a:rPr>
-            </a:br>
-            <a:r>
-              <a:rPr lang="en-US" sz="1400" b="1" dirty="0">
-                <a:solidFill>
-                  <a:schemeClr val="accent5"/>
-                </a:solidFill>
-              </a:rPr>
-              <a:t>– Create documentation that outlines best practices </a:t>
-            </a:r>
-            <a:r>
-              <a:rPr lang="en-US" sz="1400" dirty="0">
-                <a:solidFill>
-                  <a:schemeClr val="accent5"/>
-                </a:solidFill>
-              </a:rPr>
-              <a:t>for designing resilient streaming pipelines.</a:t>
-            </a:r>
-            <a:endParaRPr lang="en-US" sz="1600" dirty="0">
-              <a:solidFill>
-                <a:schemeClr val="accent5"/>
-              </a:solidFill>
-            </a:endParaRPr>
-          </a:p>
-        </p:txBody>
-      </p:sp>
-      <p:sp>
-        <p:nvSpPr>
-          <p:cNvPr id="4" name="Slide Number Placeholder 3">
-            <a:extLst>
-              <a:ext uri="{FF2B5EF4-FFF2-40B4-BE49-F238E27FC236}">
-                <a16:creationId xmlns:a16="http://schemas.microsoft.com/office/drawing/2014/main" id="{718A4232-5F1E-154B-65CF-1D7F32BB610A}"/>
-              </a:ext>
-            </a:extLst>
-          </p:cNvPr>
-          <p:cNvSpPr>
-            <a:spLocks noGrp="1"/>
-          </p:cNvSpPr>
-          <p:nvPr>
-            <p:ph type="sldNum" sz="quarter" idx="12"/>
-          </p:nvPr>
-        </p:nvSpPr>
-        <p:spPr/>
-        <p:txBody>
-          <a:bodyPr/>
-          <a:lstStyle/>
-          <a:p>
-            <a:fld id="{727B0ACA-53D9-FB44-A37C-A778C10B232A}" type="slidenum">
-              <a:rPr lang="en-US" smtClean="0"/>
-              <a:t>29</a:t>
-            </a:fld>
-            <a:endParaRPr lang="en-US"/>
-          </a:p>
-        </p:txBody>
-      </p:sp>
-    </p:spTree>
-    <p:extLst>
-      <p:ext uri="{BB962C8B-B14F-4D97-AF65-F5344CB8AC3E}">
-        <p14:creationId xmlns:p14="http://schemas.microsoft.com/office/powerpoint/2010/main" val="466071131"/>
       </p:ext>
     </p:extLst>
   </p:cSld>
@@ -9027,6 +8943,378 @@
 </file>
 
 <file path=ppt/slides/slide30.xml><?xml version="1.0" encoding="utf-8"?>
+<p:sld xmlns:a="http://schemas.openxmlformats.org/drawingml/2006/main" xmlns:r="http://schemas.openxmlformats.org/officeDocument/2006/relationships" xmlns:p="http://schemas.openxmlformats.org/presentationml/2006/main">
+  <p:cSld>
+    <p:bg>
+      <p:bgPr>
+        <a:solidFill>
+          <a:schemeClr val="bg1"/>
+        </a:solidFill>
+        <a:effectLst/>
+      </p:bgPr>
+    </p:bg>
+    <p:spTree>
+      <p:nvGrpSpPr>
+        <p:cNvPr id="1" name="">
+          <a:extLst>
+            <a:ext uri="{FF2B5EF4-FFF2-40B4-BE49-F238E27FC236}">
+              <a16:creationId xmlns:a16="http://schemas.microsoft.com/office/drawing/2014/main" id="{3362B5DA-3199-4699-A99F-8B2739E974FE}"/>
+            </a:ext>
+          </a:extLst>
+        </p:cNvPr>
+        <p:cNvGrpSpPr/>
+        <p:nvPr/>
+      </p:nvGrpSpPr>
+      <p:grpSpPr>
+        <a:xfrm>
+          <a:off x="0" y="0"/>
+          <a:ext cx="0" cy="0"/>
+          <a:chOff x="0" y="0"/>
+          <a:chExt cx="0" cy="0"/>
+        </a:xfrm>
+      </p:grpSpPr>
+      <p:sp>
+        <p:nvSpPr>
+          <p:cNvPr id="2" name="Title 1">
+            <a:extLst>
+              <a:ext uri="{FF2B5EF4-FFF2-40B4-BE49-F238E27FC236}">
+                <a16:creationId xmlns:a16="http://schemas.microsoft.com/office/drawing/2014/main" id="{6084106C-7539-C4F2-4CE2-975709C5CE4F}"/>
+              </a:ext>
+            </a:extLst>
+          </p:cNvPr>
+          <p:cNvSpPr>
+            <a:spLocks noGrp="1"/>
+          </p:cNvSpPr>
+          <p:nvPr>
+            <p:ph type="title"/>
+          </p:nvPr>
+        </p:nvSpPr>
+        <p:spPr/>
+        <p:txBody>
+          <a:bodyPr>
+            <a:normAutofit/>
+          </a:bodyPr>
+          <a:lstStyle/>
+          <a:p>
+            <a:r>
+              <a:rPr lang="en-US" dirty="0"/>
+              <a:t>Example</a:t>
+            </a:r>
+            <a:br>
+              <a:rPr lang="en-US" dirty="0"/>
+            </a:br>
+            <a:r>
+              <a:rPr lang="en-US" sz="2700" dirty="0">
+                <a:solidFill>
+                  <a:schemeClr val="accent5"/>
+                </a:solidFill>
+              </a:rPr>
+              <a:t>Research-Oriented Data Engineering Project Objectives</a:t>
+            </a:r>
+          </a:p>
+        </p:txBody>
+      </p:sp>
+      <p:sp>
+        <p:nvSpPr>
+          <p:cNvPr id="3" name="Content Placeholder 2">
+            <a:extLst>
+              <a:ext uri="{FF2B5EF4-FFF2-40B4-BE49-F238E27FC236}">
+                <a16:creationId xmlns:a16="http://schemas.microsoft.com/office/drawing/2014/main" id="{7C54D766-37A3-9B8E-05A8-84FA9ED2B1FC}"/>
+              </a:ext>
+            </a:extLst>
+          </p:cNvPr>
+          <p:cNvSpPr>
+            <a:spLocks noGrp="1"/>
+          </p:cNvSpPr>
+          <p:nvPr>
+            <p:ph idx="1"/>
+          </p:nvPr>
+        </p:nvSpPr>
+        <p:spPr>
+          <a:xfrm>
+            <a:off x="628650" y="1825625"/>
+            <a:ext cx="8233128" cy="4351338"/>
+          </a:xfrm>
+        </p:spPr>
+        <p:txBody>
+          <a:bodyPr>
+            <a:noAutofit/>
+          </a:bodyPr>
+          <a:lstStyle/>
+          <a:p>
+            <a:pPr marL="0" indent="0">
+              <a:buNone/>
+            </a:pPr>
+            <a:r>
+              <a:rPr lang="en-US" sz="1800" dirty="0"/>
+              <a:t>Suppose your team is studying </a:t>
+            </a:r>
+            <a:r>
+              <a:rPr lang="en-US" sz="1800" u="sng" dirty="0"/>
+              <a:t>data pipeline reliability </a:t>
+            </a:r>
+            <a:r>
+              <a:rPr lang="en-US" sz="1800" dirty="0"/>
+              <a:t>in large-scale streaming systems. Your technical objectives might be:</a:t>
+            </a:r>
+          </a:p>
+          <a:p>
+            <a:r>
+              <a:rPr lang="en-US" sz="1800" b="1" dirty="0"/>
+              <a:t>Key Questions</a:t>
+            </a:r>
+            <a:br>
+              <a:rPr lang="en-US" sz="1600" dirty="0"/>
+            </a:br>
+            <a:r>
+              <a:rPr lang="en-US" sz="1400" b="1" dirty="0">
+                <a:solidFill>
+                  <a:schemeClr val="accent5"/>
+                </a:solidFill>
+              </a:rPr>
+              <a:t>– What factors </a:t>
+            </a:r>
+            <a:r>
+              <a:rPr lang="en-US" sz="1400" dirty="0">
+                <a:solidFill>
+                  <a:schemeClr val="accent5"/>
+                </a:solidFill>
+              </a:rPr>
+              <a:t>most strongly influence end-to-end latency and data loss in a real-time streaming  </a:t>
+            </a:r>
+            <a:br>
+              <a:rPr lang="en-US" sz="1400" dirty="0">
+                <a:solidFill>
+                  <a:schemeClr val="accent5"/>
+                </a:solidFill>
+              </a:rPr>
+            </a:br>
+            <a:r>
+              <a:rPr lang="en-US" sz="1400" dirty="0">
+                <a:solidFill>
+                  <a:schemeClr val="accent5"/>
+                </a:solidFill>
+              </a:rPr>
+              <a:t>   pipeline?</a:t>
+            </a:r>
+            <a:br>
+              <a:rPr lang="en-US" sz="1400" dirty="0">
+                <a:solidFill>
+                  <a:schemeClr val="accent5"/>
+                </a:solidFill>
+              </a:rPr>
+            </a:br>
+            <a:r>
+              <a:rPr lang="en-US" sz="1400" b="1" dirty="0">
+                <a:solidFill>
+                  <a:schemeClr val="accent5"/>
+                </a:solidFill>
+              </a:rPr>
+              <a:t>– How do different </a:t>
+            </a:r>
+            <a:r>
+              <a:rPr lang="en-US" sz="1400" dirty="0">
+                <a:solidFill>
+                  <a:schemeClr val="accent5"/>
+                </a:solidFill>
+              </a:rPr>
+              <a:t>buffering strategies affect system stability under peak load?</a:t>
+            </a:r>
+          </a:p>
+          <a:p>
+            <a:r>
+              <a:rPr lang="en-US" sz="1800" b="1" dirty="0"/>
+              <a:t>Analytical Frameworks</a:t>
+            </a:r>
+            <a:br>
+              <a:rPr lang="en-US" sz="1600" b="1" dirty="0"/>
+            </a:br>
+            <a:r>
+              <a:rPr lang="en-US" sz="1400" b="1" dirty="0">
+                <a:solidFill>
+                  <a:schemeClr val="accent5"/>
+                </a:solidFill>
+              </a:rPr>
+              <a:t>– Develop a benchmarking framework </a:t>
+            </a:r>
+            <a:r>
+              <a:rPr lang="en-US" sz="1400" dirty="0">
+                <a:solidFill>
+                  <a:schemeClr val="accent5"/>
+                </a:solidFill>
+              </a:rPr>
+              <a:t>to simulate varying data arrival rates and system loads.</a:t>
+            </a:r>
+            <a:br>
+              <a:rPr lang="en-US" sz="1400" dirty="0">
+                <a:solidFill>
+                  <a:schemeClr val="accent5"/>
+                </a:solidFill>
+              </a:rPr>
+            </a:br>
+            <a:r>
+              <a:rPr lang="en-US" sz="1400" b="1" dirty="0">
+                <a:solidFill>
+                  <a:schemeClr val="accent5"/>
+                </a:solidFill>
+              </a:rPr>
+              <a:t>– Design experiments </a:t>
+            </a:r>
+            <a:r>
+              <a:rPr lang="en-US" sz="1400" dirty="0">
+                <a:solidFill>
+                  <a:schemeClr val="accent5"/>
+                </a:solidFill>
+              </a:rPr>
+              <a:t>using controlled workloads to compare multiple pipeline architectures.</a:t>
+            </a:r>
+          </a:p>
+          <a:p>
+            <a:r>
+              <a:rPr lang="en-US" sz="1800" b="1" dirty="0"/>
+              <a:t>System Relationships</a:t>
+            </a:r>
+            <a:br>
+              <a:rPr lang="en-US" sz="1600" b="1" dirty="0"/>
+            </a:br>
+            <a:r>
+              <a:rPr lang="en-US" sz="1400" b="1" dirty="0">
+                <a:solidFill>
+                  <a:schemeClr val="accent5"/>
+                </a:solidFill>
+              </a:rPr>
+              <a:t>– Analyze how </a:t>
+            </a:r>
+            <a:r>
+              <a:rPr lang="en-US" sz="1400" dirty="0">
+                <a:solidFill>
+                  <a:schemeClr val="accent5"/>
+                </a:solidFill>
+              </a:rPr>
+              <a:t>ingestion rate, buffer size, and processing throughput interact to produce bottlenecks.</a:t>
+            </a:r>
+            <a:br>
+              <a:rPr lang="en-US" sz="1400" dirty="0">
+                <a:solidFill>
+                  <a:schemeClr val="accent5"/>
+                </a:solidFill>
+              </a:rPr>
+            </a:br>
+            <a:r>
+              <a:rPr lang="en-US" sz="1400" b="1" dirty="0">
+                <a:solidFill>
+                  <a:schemeClr val="accent5"/>
+                </a:solidFill>
+              </a:rPr>
+              <a:t>– Model the relationship between </a:t>
+            </a:r>
+            <a:r>
+              <a:rPr lang="en-US" sz="1400" dirty="0">
+                <a:solidFill>
+                  <a:schemeClr val="accent5"/>
+                </a:solidFill>
+              </a:rPr>
+              <a:t>fault frequency and recovery time.</a:t>
+            </a:r>
+          </a:p>
+          <a:p>
+            <a:r>
+              <a:rPr lang="en-US" sz="1800" b="1" dirty="0"/>
+              <a:t>Conceptual or Qualitative Deliverables</a:t>
+            </a:r>
+            <a:br>
+              <a:rPr lang="en-US" sz="1600" b="1" dirty="0"/>
+            </a:br>
+            <a:r>
+              <a:rPr lang="en-US" sz="1400" b="1" dirty="0">
+                <a:solidFill>
+                  <a:schemeClr val="accent5"/>
+                </a:solidFill>
+              </a:rPr>
+              <a:t>– Produce a decision framework that guides engineers </a:t>
+            </a:r>
+            <a:r>
+              <a:rPr lang="en-US" sz="1400" dirty="0">
+                <a:solidFill>
+                  <a:schemeClr val="accent5"/>
+                </a:solidFill>
+              </a:rPr>
+              <a:t>in selecting buffering and checkpointing strategies.</a:t>
+            </a:r>
+            <a:br>
+              <a:rPr lang="en-US" sz="1400" dirty="0">
+                <a:solidFill>
+                  <a:schemeClr val="accent5"/>
+                </a:solidFill>
+              </a:rPr>
+            </a:br>
+            <a:r>
+              <a:rPr lang="en-US" sz="1400" b="1" dirty="0">
+                <a:solidFill>
+                  <a:schemeClr val="accent5"/>
+                </a:solidFill>
+              </a:rPr>
+              <a:t>– Create documentation that outlines best practices </a:t>
+            </a:r>
+            <a:r>
+              <a:rPr lang="en-US" sz="1400" dirty="0">
+                <a:solidFill>
+                  <a:schemeClr val="accent5"/>
+                </a:solidFill>
+              </a:rPr>
+              <a:t>for designing resilient streaming pipelines.</a:t>
+            </a:r>
+            <a:endParaRPr lang="en-US" sz="1600" dirty="0">
+              <a:solidFill>
+                <a:schemeClr val="accent5"/>
+              </a:solidFill>
+            </a:endParaRPr>
+          </a:p>
+        </p:txBody>
+      </p:sp>
+      <p:sp>
+        <p:nvSpPr>
+          <p:cNvPr id="4" name="Slide Number Placeholder 3">
+            <a:extLst>
+              <a:ext uri="{FF2B5EF4-FFF2-40B4-BE49-F238E27FC236}">
+                <a16:creationId xmlns:a16="http://schemas.microsoft.com/office/drawing/2014/main" id="{718A4232-5F1E-154B-65CF-1D7F32BB610A}"/>
+              </a:ext>
+            </a:extLst>
+          </p:cNvPr>
+          <p:cNvSpPr>
+            <a:spLocks noGrp="1"/>
+          </p:cNvSpPr>
+          <p:nvPr>
+            <p:ph type="sldNum" sz="quarter" idx="12"/>
+          </p:nvPr>
+        </p:nvSpPr>
+        <p:spPr/>
+        <p:txBody>
+          <a:bodyPr/>
+          <a:lstStyle/>
+          <a:p>
+            <a:fld id="{727B0ACA-53D9-FB44-A37C-A778C10B232A}" type="slidenum">
+              <a:rPr lang="en-US" smtClean="0"/>
+              <a:t>30</a:t>
+            </a:fld>
+            <a:endParaRPr lang="en-US"/>
+          </a:p>
+        </p:txBody>
+      </p:sp>
+    </p:spTree>
+    <p:extLst>
+      <p:ext uri="{BB962C8B-B14F-4D97-AF65-F5344CB8AC3E}">
+        <p14:creationId xmlns:p14="http://schemas.microsoft.com/office/powerpoint/2010/main" val="466071131"/>
+      </p:ext>
+    </p:extLst>
+  </p:cSld>
+  <p:clrMapOvr>
+    <a:masterClrMapping/>
+  </p:clrMapOvr>
+</p:sld>
+</file>
+
+<file path=ppt/slides/slide31.xml><?xml version="1.0" encoding="utf-8"?>
 <p:sld xmlns:a="http://schemas.openxmlformats.org/drawingml/2006/main" xmlns:r="http://schemas.openxmlformats.org/officeDocument/2006/relationships" xmlns:p="http://schemas.openxmlformats.org/presentationml/2006/main">
   <p:cSld>
     <p:bg>
@@ -9698,7 +9986,7 @@
           <a:p>
             <a:fld id="{727B0ACA-53D9-FB44-A37C-A778C10B232A}" type="slidenum">
               <a:rPr lang="en-US" smtClean="0"/>
-              <a:t>30</a:t>
+              <a:t>31</a:t>
             </a:fld>
             <a:endParaRPr lang="en-US"/>
           </a:p>
@@ -9708,215 +9996,6 @@
     <p:extLst>
       <p:ext uri="{BB962C8B-B14F-4D97-AF65-F5344CB8AC3E}">
         <p14:creationId xmlns:p14="http://schemas.microsoft.com/office/powerpoint/2010/main" val="915696027"/>
-      </p:ext>
-    </p:extLst>
-  </p:cSld>
-  <p:clrMapOvr>
-    <a:masterClrMapping/>
-  </p:clrMapOvr>
-</p:sld>
-</file>
-
-<file path=ppt/slides/slide31.xml><?xml version="1.0" encoding="utf-8"?>
-<p:sld xmlns:a="http://schemas.openxmlformats.org/drawingml/2006/main" xmlns:r="http://schemas.openxmlformats.org/officeDocument/2006/relationships" xmlns:p="http://schemas.openxmlformats.org/presentationml/2006/main">
-  <p:cSld>
-    <p:bg>
-      <p:bgPr>
-        <a:solidFill>
-          <a:schemeClr val="bg1"/>
-        </a:solidFill>
-        <a:effectLst/>
-      </p:bgPr>
-    </p:bg>
-    <p:spTree>
-      <p:nvGrpSpPr>
-        <p:cNvPr id="1" name=""/>
-        <p:cNvGrpSpPr/>
-        <p:nvPr/>
-      </p:nvGrpSpPr>
-      <p:grpSpPr>
-        <a:xfrm>
-          <a:off x="0" y="0"/>
-          <a:ext cx="0" cy="0"/>
-          <a:chOff x="0" y="0"/>
-          <a:chExt cx="0" cy="0"/>
-        </a:xfrm>
-      </p:grpSpPr>
-      <p:sp>
-        <p:nvSpPr>
-          <p:cNvPr id="2" name="Title 1">
-            <a:extLst>
-              <a:ext uri="{FF2B5EF4-FFF2-40B4-BE49-F238E27FC236}">
-                <a16:creationId xmlns:a16="http://schemas.microsoft.com/office/drawing/2014/main" id="{17F0DCC6-C290-7279-A8CB-CF53450EF3FF}"/>
-              </a:ext>
-            </a:extLst>
-          </p:cNvPr>
-          <p:cNvSpPr>
-            <a:spLocks noGrp="1"/>
-          </p:cNvSpPr>
-          <p:nvPr>
-            <p:ph type="title"/>
-          </p:nvPr>
-        </p:nvSpPr>
-        <p:spPr/>
-        <p:txBody>
-          <a:bodyPr/>
-          <a:lstStyle/>
-          <a:p>
-            <a:r>
-              <a:rPr lang="en-US" dirty="0"/>
-              <a:t>Phase 1 Presentation Guidelines</a:t>
-            </a:r>
-          </a:p>
-        </p:txBody>
-      </p:sp>
-      <p:sp>
-        <p:nvSpPr>
-          <p:cNvPr id="3" name="Content Placeholder 2">
-            <a:extLst>
-              <a:ext uri="{FF2B5EF4-FFF2-40B4-BE49-F238E27FC236}">
-                <a16:creationId xmlns:a16="http://schemas.microsoft.com/office/drawing/2014/main" id="{C1555F72-E6FE-0180-D884-3C0707E023EE}"/>
-              </a:ext>
-            </a:extLst>
-          </p:cNvPr>
-          <p:cNvSpPr>
-            <a:spLocks noGrp="1"/>
-          </p:cNvSpPr>
-          <p:nvPr>
-            <p:ph idx="1"/>
-          </p:nvPr>
-        </p:nvSpPr>
-        <p:spPr>
-          <a:xfrm>
-            <a:off x="628650" y="1825625"/>
-            <a:ext cx="8134350" cy="4351338"/>
-          </a:xfrm>
-        </p:spPr>
-        <p:txBody>
-          <a:bodyPr>
-            <a:noAutofit/>
-          </a:bodyPr>
-          <a:lstStyle/>
-          <a:p>
-            <a:r>
-              <a:rPr lang="en-US" sz="2200" dirty="0"/>
-              <a:t>Presentation guidelines document is posted on Canvas.</a:t>
-            </a:r>
-          </a:p>
-          <a:p>
-            <a:r>
-              <a:rPr lang="en-US" sz="2200" dirty="0"/>
-              <a:t>Provides </a:t>
-            </a:r>
-            <a:r>
-              <a:rPr lang="en-US" sz="2200" b="1" dirty="0"/>
-              <a:t>general guidelines </a:t>
-            </a:r>
-            <a:r>
-              <a:rPr lang="en-US" sz="2200" dirty="0"/>
-              <a:t>on how and what to present,</a:t>
-            </a:r>
-            <a:br>
-              <a:rPr lang="en-US" sz="2200" dirty="0"/>
-            </a:br>
-            <a:r>
-              <a:rPr lang="en-US" sz="2200" dirty="0"/>
-              <a:t>but your project should guide the content.</a:t>
-            </a:r>
-          </a:p>
-          <a:p>
-            <a:r>
-              <a:rPr lang="en-US" sz="2200" dirty="0"/>
-              <a:t>Do not try to present everything you've learned so far</a:t>
-            </a:r>
-            <a:br>
-              <a:rPr lang="en-US" sz="2200" dirty="0"/>
-            </a:br>
-            <a:r>
-              <a:rPr lang="en-US" sz="2000" b="1" dirty="0"/>
-              <a:t>(time is limited).</a:t>
-            </a:r>
-          </a:p>
-          <a:p>
-            <a:r>
-              <a:rPr lang="en-US" sz="2200" dirty="0"/>
-              <a:t>Appendix is for information you've gathered that might be relevant:</a:t>
-            </a:r>
-          </a:p>
-          <a:p>
-            <a:pPr lvl="1"/>
-            <a:r>
-              <a:rPr lang="en-US" sz="2000" dirty="0"/>
-              <a:t>Reference information as necessary in presentation,</a:t>
-            </a:r>
-          </a:p>
-          <a:p>
-            <a:pPr lvl="1"/>
-            <a:r>
-              <a:rPr lang="en-US" sz="2000" dirty="0"/>
-              <a:t>Don't present appendix slides,</a:t>
-            </a:r>
-          </a:p>
-          <a:p>
-            <a:pPr lvl="1"/>
-            <a:r>
-              <a:rPr lang="en-US" sz="2000" dirty="0"/>
-              <a:t>Technical grade for Information Gathering </a:t>
-            </a:r>
-            <a:r>
-              <a:rPr lang="en-US" sz="2000" b="1" dirty="0"/>
-              <a:t>will be</a:t>
-            </a:r>
-            <a:r>
-              <a:rPr lang="en-US" sz="2000" dirty="0"/>
-              <a:t> partially based on appendix content.</a:t>
-            </a:r>
-          </a:p>
-          <a:p>
-            <a:r>
-              <a:rPr lang="en-US" sz="2200" b="1" dirty="0"/>
-              <a:t>Practice</a:t>
-            </a:r>
-            <a:r>
-              <a:rPr lang="en-US" sz="2200" dirty="0"/>
-              <a:t> your presentation, both individual parts and as a team!</a:t>
-            </a:r>
-          </a:p>
-        </p:txBody>
-      </p:sp>
-      <p:sp>
-        <p:nvSpPr>
-          <p:cNvPr id="4" name="Slide Number Placeholder 3">
-            <a:extLst>
-              <a:ext uri="{FF2B5EF4-FFF2-40B4-BE49-F238E27FC236}">
-                <a16:creationId xmlns:a16="http://schemas.microsoft.com/office/drawing/2014/main" id="{E5253D59-56A0-7DD2-F9D3-339DF7B00B1D}"/>
-              </a:ext>
-            </a:extLst>
-          </p:cNvPr>
-          <p:cNvSpPr>
-            <a:spLocks noGrp="1"/>
-          </p:cNvSpPr>
-          <p:nvPr>
-            <p:ph type="sldNum" sz="quarter" idx="12"/>
-          </p:nvPr>
-        </p:nvSpPr>
-        <p:spPr/>
-        <p:txBody>
-          <a:bodyPr/>
-          <a:lstStyle/>
-          <a:p>
-            <a:fld id="{727B0ACA-53D9-FB44-A37C-A778C10B232A}" type="slidenum">
-              <a:rPr lang="en-US" smtClean="0"/>
-              <a:t>31</a:t>
-            </a:fld>
-            <a:endParaRPr lang="en-US"/>
-          </a:p>
-        </p:txBody>
-      </p:sp>
-    </p:spTree>
-    <p:extLst>
-      <p:ext uri="{BB962C8B-B14F-4D97-AF65-F5344CB8AC3E}">
-        <p14:creationId xmlns:p14="http://schemas.microsoft.com/office/powerpoint/2010/main" val="877954563"/>
       </p:ext>
     </p:extLst>
   </p:cSld>
@@ -9956,6 +10035,215 @@
           <p:cNvPr id="2" name="Title 1">
             <a:extLst>
               <a:ext uri="{FF2B5EF4-FFF2-40B4-BE49-F238E27FC236}">
+                <a16:creationId xmlns:a16="http://schemas.microsoft.com/office/drawing/2014/main" id="{17F0DCC6-C290-7279-A8CB-CF53450EF3FF}"/>
+              </a:ext>
+            </a:extLst>
+          </p:cNvPr>
+          <p:cNvSpPr>
+            <a:spLocks noGrp="1"/>
+          </p:cNvSpPr>
+          <p:nvPr>
+            <p:ph type="title"/>
+          </p:nvPr>
+        </p:nvSpPr>
+        <p:spPr/>
+        <p:txBody>
+          <a:bodyPr/>
+          <a:lstStyle/>
+          <a:p>
+            <a:r>
+              <a:rPr lang="en-US" dirty="0"/>
+              <a:t>Phase 1 Presentation Guidelines</a:t>
+            </a:r>
+          </a:p>
+        </p:txBody>
+      </p:sp>
+      <p:sp>
+        <p:nvSpPr>
+          <p:cNvPr id="3" name="Content Placeholder 2">
+            <a:extLst>
+              <a:ext uri="{FF2B5EF4-FFF2-40B4-BE49-F238E27FC236}">
+                <a16:creationId xmlns:a16="http://schemas.microsoft.com/office/drawing/2014/main" id="{C1555F72-E6FE-0180-D884-3C0707E023EE}"/>
+              </a:ext>
+            </a:extLst>
+          </p:cNvPr>
+          <p:cNvSpPr>
+            <a:spLocks noGrp="1"/>
+          </p:cNvSpPr>
+          <p:nvPr>
+            <p:ph idx="1"/>
+          </p:nvPr>
+        </p:nvSpPr>
+        <p:spPr>
+          <a:xfrm>
+            <a:off x="628650" y="1825625"/>
+            <a:ext cx="8134350" cy="4351338"/>
+          </a:xfrm>
+        </p:spPr>
+        <p:txBody>
+          <a:bodyPr>
+            <a:noAutofit/>
+          </a:bodyPr>
+          <a:lstStyle/>
+          <a:p>
+            <a:r>
+              <a:rPr lang="en-US" sz="2200" dirty="0"/>
+              <a:t>Presentation guidelines document is posted on Canvas.</a:t>
+            </a:r>
+          </a:p>
+          <a:p>
+            <a:r>
+              <a:rPr lang="en-US" sz="2200" dirty="0"/>
+              <a:t>Provides </a:t>
+            </a:r>
+            <a:r>
+              <a:rPr lang="en-US" sz="2200" b="1" dirty="0"/>
+              <a:t>general guidelines </a:t>
+            </a:r>
+            <a:r>
+              <a:rPr lang="en-US" sz="2200" dirty="0"/>
+              <a:t>on how and what to present,</a:t>
+            </a:r>
+            <a:br>
+              <a:rPr lang="en-US" sz="2200" dirty="0"/>
+            </a:br>
+            <a:r>
+              <a:rPr lang="en-US" sz="2200" dirty="0"/>
+              <a:t>but your project should guide the content.</a:t>
+            </a:r>
+          </a:p>
+          <a:p>
+            <a:r>
+              <a:rPr lang="en-US" sz="2200" dirty="0"/>
+              <a:t>Do not try to present everything you've learned so far</a:t>
+            </a:r>
+            <a:br>
+              <a:rPr lang="en-US" sz="2200" dirty="0"/>
+            </a:br>
+            <a:r>
+              <a:rPr lang="en-US" sz="2000" b="1" dirty="0"/>
+              <a:t>(time is limited).</a:t>
+            </a:r>
+          </a:p>
+          <a:p>
+            <a:r>
+              <a:rPr lang="en-US" sz="2200" dirty="0"/>
+              <a:t>Appendix is for information you've gathered that might be relevant:</a:t>
+            </a:r>
+          </a:p>
+          <a:p>
+            <a:pPr lvl="1"/>
+            <a:r>
+              <a:rPr lang="en-US" sz="2000" dirty="0"/>
+              <a:t>Reference information as necessary in presentation,</a:t>
+            </a:r>
+          </a:p>
+          <a:p>
+            <a:pPr lvl="1"/>
+            <a:r>
+              <a:rPr lang="en-US" sz="2000" dirty="0"/>
+              <a:t>Don't present appendix slides,</a:t>
+            </a:r>
+          </a:p>
+          <a:p>
+            <a:pPr lvl="1"/>
+            <a:r>
+              <a:rPr lang="en-US" sz="2000" dirty="0"/>
+              <a:t>Technical grade for Information Gathering </a:t>
+            </a:r>
+            <a:r>
+              <a:rPr lang="en-US" sz="2000" b="1" dirty="0"/>
+              <a:t>will be</a:t>
+            </a:r>
+            <a:r>
+              <a:rPr lang="en-US" sz="2000" dirty="0"/>
+              <a:t> partially based on appendix content.</a:t>
+            </a:r>
+          </a:p>
+          <a:p>
+            <a:r>
+              <a:rPr lang="en-US" sz="2200" b="1" dirty="0"/>
+              <a:t>Practice</a:t>
+            </a:r>
+            <a:r>
+              <a:rPr lang="en-US" sz="2200" dirty="0"/>
+              <a:t> your presentation, both individual parts and as a team!</a:t>
+            </a:r>
+          </a:p>
+        </p:txBody>
+      </p:sp>
+      <p:sp>
+        <p:nvSpPr>
+          <p:cNvPr id="4" name="Slide Number Placeholder 3">
+            <a:extLst>
+              <a:ext uri="{FF2B5EF4-FFF2-40B4-BE49-F238E27FC236}">
+                <a16:creationId xmlns:a16="http://schemas.microsoft.com/office/drawing/2014/main" id="{E5253D59-56A0-7DD2-F9D3-339DF7B00B1D}"/>
+              </a:ext>
+            </a:extLst>
+          </p:cNvPr>
+          <p:cNvSpPr>
+            <a:spLocks noGrp="1"/>
+          </p:cNvSpPr>
+          <p:nvPr>
+            <p:ph type="sldNum" sz="quarter" idx="12"/>
+          </p:nvPr>
+        </p:nvSpPr>
+        <p:spPr/>
+        <p:txBody>
+          <a:bodyPr/>
+          <a:lstStyle/>
+          <a:p>
+            <a:fld id="{727B0ACA-53D9-FB44-A37C-A778C10B232A}" type="slidenum">
+              <a:rPr lang="en-US" smtClean="0"/>
+              <a:t>32</a:t>
+            </a:fld>
+            <a:endParaRPr lang="en-US"/>
+          </a:p>
+        </p:txBody>
+      </p:sp>
+    </p:spTree>
+    <p:extLst>
+      <p:ext uri="{BB962C8B-B14F-4D97-AF65-F5344CB8AC3E}">
+        <p14:creationId xmlns:p14="http://schemas.microsoft.com/office/powerpoint/2010/main" val="877954563"/>
+      </p:ext>
+    </p:extLst>
+  </p:cSld>
+  <p:clrMapOvr>
+    <a:masterClrMapping/>
+  </p:clrMapOvr>
+</p:sld>
+</file>
+
+<file path=ppt/slides/slide33.xml><?xml version="1.0" encoding="utf-8"?>
+<p:sld xmlns:a="http://schemas.openxmlformats.org/drawingml/2006/main" xmlns:r="http://schemas.openxmlformats.org/officeDocument/2006/relationships" xmlns:p="http://schemas.openxmlformats.org/presentationml/2006/main">
+  <p:cSld>
+    <p:bg>
+      <p:bgPr>
+        <a:solidFill>
+          <a:schemeClr val="bg1"/>
+        </a:solidFill>
+        <a:effectLst/>
+      </p:bgPr>
+    </p:bg>
+    <p:spTree>
+      <p:nvGrpSpPr>
+        <p:cNvPr id="1" name=""/>
+        <p:cNvGrpSpPr/>
+        <p:nvPr/>
+      </p:nvGrpSpPr>
+      <p:grpSpPr>
+        <a:xfrm>
+          <a:off x="0" y="0"/>
+          <a:ext cx="0" cy="0"/>
+          <a:chOff x="0" y="0"/>
+          <a:chExt cx="0" cy="0"/>
+        </a:xfrm>
+      </p:grpSpPr>
+      <p:sp>
+        <p:nvSpPr>
+          <p:cNvPr id="2" name="Title 1">
+            <a:extLst>
+              <a:ext uri="{FF2B5EF4-FFF2-40B4-BE49-F238E27FC236}">
                 <a16:creationId xmlns:a16="http://schemas.microsoft.com/office/drawing/2014/main" id="{A15705B6-7097-454B-4524-591EEC679A72}"/>
               </a:ext>
             </a:extLst>
@@ -10074,7 +10362,7 @@
           <a:p>
             <a:fld id="{727B0ACA-53D9-FB44-A37C-A778C10B232A}" type="slidenum">
               <a:rPr lang="en-US" smtClean="0"/>
-              <a:t>32</a:t>
+              <a:t>33</a:t>
             </a:fld>
             <a:endParaRPr lang="en-US"/>
           </a:p>
@@ -10093,7 +10381,7 @@
 </p:sld>
 </file>
 
-<file path=ppt/slides/slide33.xml><?xml version="1.0" encoding="utf-8"?>
+<file path=ppt/slides/slide34.xml><?xml version="1.0" encoding="utf-8"?>
 <p:sld xmlns:a="http://schemas.openxmlformats.org/drawingml/2006/main" xmlns:r="http://schemas.openxmlformats.org/officeDocument/2006/relationships" xmlns:p="http://schemas.openxmlformats.org/presentationml/2006/main">
   <p:cSld>
     <p:bg>
@@ -10292,7 +10580,7 @@
           <a:p>
             <a:fld id="{727B0ACA-53D9-FB44-A37C-A778C10B232A}" type="slidenum">
               <a:rPr lang="en-US" smtClean="0"/>
-              <a:t>33</a:t>
+              <a:t>34</a:t>
             </a:fld>
             <a:endParaRPr lang="en-US"/>
           </a:p>
@@ -10341,7 +10629,7 @@
 </p:sld>
 </file>
 
-<file path=ppt/slides/slide34.xml><?xml version="1.0" encoding="utf-8"?>
+<file path=ppt/slides/slide35.xml><?xml version="1.0" encoding="utf-8"?>
 <p:sld xmlns:a="http://schemas.openxmlformats.org/drawingml/2006/main" xmlns:r="http://schemas.openxmlformats.org/officeDocument/2006/relationships" xmlns:p="http://schemas.openxmlformats.org/presentationml/2006/main">
   <p:cSld>
     <p:bg>
@@ -10490,7 +10778,7 @@
           <a:p>
             <a:fld id="{727B0ACA-53D9-FB44-A37C-A778C10B232A}" type="slidenum">
               <a:rPr lang="en-US" smtClean="0"/>
-              <a:t>34</a:t>
+              <a:t>35</a:t>
             </a:fld>
             <a:endParaRPr lang="en-US"/>
           </a:p>

--- a/DAEN460S26/week3.pptx
+++ b/DAEN460S26/week3.pptx
@@ -12,20 +12,20 @@
     <p:sldId id="280" r:id="rId3"/>
     <p:sldId id="281" r:id="rId4"/>
     <p:sldId id="257" r:id="rId5"/>
-    <p:sldId id="258" r:id="rId6"/>
-    <p:sldId id="259" r:id="rId7"/>
-    <p:sldId id="260" r:id="rId8"/>
-    <p:sldId id="261" r:id="rId9"/>
-    <p:sldId id="262" r:id="rId10"/>
-    <p:sldId id="263" r:id="rId11"/>
-    <p:sldId id="264" r:id="rId12"/>
-    <p:sldId id="265" r:id="rId13"/>
-    <p:sldId id="266" r:id="rId14"/>
-    <p:sldId id="267" r:id="rId15"/>
-    <p:sldId id="291" r:id="rId16"/>
-    <p:sldId id="268" r:id="rId17"/>
-    <p:sldId id="283" r:id="rId18"/>
-    <p:sldId id="292" r:id="rId19"/>
+    <p:sldId id="292" r:id="rId6"/>
+    <p:sldId id="258" r:id="rId7"/>
+    <p:sldId id="259" r:id="rId8"/>
+    <p:sldId id="260" r:id="rId9"/>
+    <p:sldId id="261" r:id="rId10"/>
+    <p:sldId id="262" r:id="rId11"/>
+    <p:sldId id="263" r:id="rId12"/>
+    <p:sldId id="264" r:id="rId13"/>
+    <p:sldId id="265" r:id="rId14"/>
+    <p:sldId id="266" r:id="rId15"/>
+    <p:sldId id="267" r:id="rId16"/>
+    <p:sldId id="291" r:id="rId17"/>
+    <p:sldId id="268" r:id="rId18"/>
+    <p:sldId id="283" r:id="rId19"/>
     <p:sldId id="269" r:id="rId20"/>
     <p:sldId id="270" r:id="rId21"/>
     <p:sldId id="284" r:id="rId22"/>
@@ -3493,10 +3493,7 @@
     <p:bg>
       <p:bgPr>
         <a:solidFill>
-          <a:schemeClr val="tx2">
-            <a:lumMod val="10000"/>
-            <a:lumOff val="90000"/>
-          </a:schemeClr>
+          <a:srgbClr val="F9ECD3"/>
         </a:solidFill>
         <a:effectLst/>
       </p:bgPr>
@@ -3517,10 +3514,10 @@
       </p:grpSpPr>
       <p:pic>
         <p:nvPicPr>
-          <p:cNvPr id="5" name="Picture 4" descr="A cartoon clock with arms and hands&#10;&#10;AI-generated content may be incorrect.">
-            <a:extLst>
-              <a:ext uri="{FF2B5EF4-FFF2-40B4-BE49-F238E27FC236}">
-                <a16:creationId xmlns:a16="http://schemas.microsoft.com/office/drawing/2014/main" id="{D2181F65-8A87-6E43-A822-ED8F0E55D7C9}"/>
+          <p:cNvPr id="5" name="Picture 4" descr="A brain and a heart with a wire&#10;&#10;AI-generated content may be incorrect.">
+            <a:extLst>
+              <a:ext uri="{FF2B5EF4-FFF2-40B4-BE49-F238E27FC236}">
+                <a16:creationId xmlns:a16="http://schemas.microsoft.com/office/drawing/2014/main" id="{01327E16-8601-998E-5BD1-3C023E6070AC}"/>
               </a:ext>
             </a:extLst>
           </p:cNvPr>
@@ -3531,15 +3528,14 @@
         </p:nvPicPr>
         <p:blipFill>
           <a:blip r:embed="rId2"/>
-          <a:srcRect l="16702" r="16138"/>
           <a:stretch>
             <a:fillRect/>
           </a:stretch>
         </p:blipFill>
         <p:spPr>
           <a:xfrm>
-            <a:off x="6389933" y="1479691"/>
-            <a:ext cx="2686757" cy="2273300"/>
+            <a:off x="6739467" y="2167467"/>
+            <a:ext cx="2235200" cy="2235200"/>
           </a:xfrm>
           <a:prstGeom prst="rect">
             <a:avLst/>
@@ -3551,7 +3547,7 @@
           <p:cNvPr id="2" name="Title 1">
             <a:extLst>
               <a:ext uri="{FF2B5EF4-FFF2-40B4-BE49-F238E27FC236}">
-                <a16:creationId xmlns:a16="http://schemas.microsoft.com/office/drawing/2014/main" id="{17196124-3A68-24DE-F035-EFC970C0CFE9}"/>
+                <a16:creationId xmlns:a16="http://schemas.microsoft.com/office/drawing/2014/main" id="{8B5B9239-974E-E43D-DA3A-D30875F9DF1D}"/>
               </a:ext>
             </a:extLst>
           </p:cNvPr>
@@ -3579,7 +3575,7 @@
           <p:cNvPr id="3" name="Content Placeholder 2">
             <a:extLst>
               <a:ext uri="{FF2B5EF4-FFF2-40B4-BE49-F238E27FC236}">
-                <a16:creationId xmlns:a16="http://schemas.microsoft.com/office/drawing/2014/main" id="{A1DF1120-DAB2-414D-6C59-A53C570214AD}"/>
+                <a16:creationId xmlns:a16="http://schemas.microsoft.com/office/drawing/2014/main" id="{7749393D-1C6E-B6F1-E74D-DF148FAF229E}"/>
               </a:ext>
             </a:extLst>
           </p:cNvPr>
@@ -3590,12 +3586,7 @@
             <p:ph idx="1"/>
           </p:nvPr>
         </p:nvSpPr>
-        <p:spPr>
-          <a:xfrm>
-            <a:off x="628650" y="1825625"/>
-            <a:ext cx="8123464" cy="4351338"/>
-          </a:xfrm>
-        </p:spPr>
+        <p:spPr/>
         <p:txBody>
           <a:bodyPr>
             <a:normAutofit/>
@@ -3607,41 +3598,33 @@
             </a:pPr>
             <a:r>
               <a:rPr lang="en-US" sz="2400" b="1" dirty="0"/>
-              <a:t>Ensure meetings don't go longer than allotted</a:t>
-            </a:r>
-          </a:p>
-          <a:p>
-            <a:r>
-              <a:rPr lang="en-US" sz="2000" dirty="0"/>
-              <a:t>Listen for clues sponsor needs to go</a:t>
+              <a:t>Remain positive and upbeat throughout the project</a:t>
+            </a:r>
+          </a:p>
+          <a:p>
+            <a:r>
+              <a:rPr lang="en-US" sz="2000" dirty="0"/>
+              <a:t>Not everything will go perfectly,</a:t>
             </a:r>
             <a:br>
               <a:rPr lang="en-US" sz="2000" dirty="0"/>
             </a:br>
             <a:r>
               <a:rPr lang="en-US" sz="2000" dirty="0"/>
-              <a:t>(“well, that about wraps it up…”,</a:t>
+              <a:t>don't expect it to and don't get down when it doesn’t.</a:t>
+            </a:r>
+          </a:p>
+          <a:p>
+            <a:r>
+              <a:rPr lang="en-US" sz="2000" dirty="0"/>
+              <a:t>Never talk bad about anyone;</a:t>
             </a:r>
             <a:br>
               <a:rPr lang="en-US" sz="2000" dirty="0"/>
             </a:br>
             <a:r>
               <a:rPr lang="en-US" sz="2000" dirty="0"/>
-              <a:t>“OK, if there isn't anything else…”, etc.)</a:t>
-            </a:r>
-          </a:p>
-          <a:p>
-            <a:r>
-              <a:rPr lang="en-US" sz="2000" dirty="0"/>
-              <a:t>and, not meeting related </a:t>
-            </a:r>
-            <a:r>
-              <a:rPr lang="en-US" sz="2000" i="1" dirty="0"/>
-              <a:t>but</a:t>
-            </a:r>
-            <a:r>
-              <a:rPr lang="en-US" sz="2000" dirty="0"/>
-              <a:t>:</a:t>
+              <a:t>sponsor, team member, instructors (especially).</a:t>
             </a:r>
           </a:p>
           <a:p>
@@ -3656,19 +3639,38 @@
             </a:pPr>
             <a:r>
               <a:rPr lang="en-US" sz="2400" b="1" dirty="0"/>
-              <a:t>Don't be afraid to call the sponsor if emails are not answered and you need answers</a:t>
-            </a:r>
-          </a:p>
-          <a:p>
-            <a:r>
-              <a:rPr lang="en-US" sz="2000" dirty="0"/>
-              <a:t>Set target dates for required information and follow up,</a:t>
-            </a:r>
-          </a:p>
-          <a:p>
-            <a:r>
-              <a:rPr lang="en-US" sz="2000" dirty="0"/>
-              <a:t>If you call and they don't answer, leave a voicemail.</a:t>
+              <a:t>If someone needs to miss a meeting</a:t>
+            </a:r>
+          </a:p>
+          <a:p>
+            <a:r>
+              <a:rPr lang="en-US" sz="2000" dirty="0"/>
+              <a:t>Make sure the sponsor knows why,</a:t>
+            </a:r>
+            <a:br>
+              <a:rPr lang="en-US" sz="2000" dirty="0"/>
+            </a:br>
+            <a:r>
+              <a:rPr lang="en-US" sz="2000" dirty="0"/>
+              <a:t>explain at the start of the meeting that </a:t>
+            </a:r>
+            <a:r>
+              <a:rPr lang="en-US" sz="2000" i="1" dirty="0"/>
+              <a:t>…</a:t>
+            </a:r>
+            <a:r>
+              <a:rPr lang="en-US" sz="2000" dirty="0"/>
+              <a:t> can't make it because </a:t>
+            </a:r>
+            <a:r>
+              <a:rPr lang="en-US" sz="2000" i="1" dirty="0"/>
+              <a:t>… .</a:t>
+            </a:r>
+          </a:p>
+          <a:p>
+            <a:r>
+              <a:rPr lang="en-US" sz="2000" dirty="0"/>
+              <a:t>Make sure to follow up with person that missed to distribute information or action items!</a:t>
             </a:r>
           </a:p>
         </p:txBody>
@@ -3678,7 +3680,7 @@
           <p:cNvPr id="6" name="Slide Number Placeholder 5">
             <a:extLst>
               <a:ext uri="{FF2B5EF4-FFF2-40B4-BE49-F238E27FC236}">
-                <a16:creationId xmlns:a16="http://schemas.microsoft.com/office/drawing/2014/main" id="{4365D923-D066-BAC2-EEB2-40ECFFEB5A16}"/>
+                <a16:creationId xmlns:a16="http://schemas.microsoft.com/office/drawing/2014/main" id="{BE013A12-7342-CF1D-5143-DCA6D770F51F}"/>
               </a:ext>
             </a:extLst>
           </p:cNvPr>
@@ -3705,7 +3707,7 @@
     </p:spTree>
     <p:extLst>
       <p:ext uri="{BB962C8B-B14F-4D97-AF65-F5344CB8AC3E}">
-        <p14:creationId xmlns:p14="http://schemas.microsoft.com/office/powerpoint/2010/main" val="1621608312"/>
+        <p14:creationId xmlns:p14="http://schemas.microsoft.com/office/powerpoint/2010/main" val="4152335880"/>
       </p:ext>
     </p:extLst>
   </p:cSld>
@@ -3743,12 +3745,43 @@
           <a:chExt cx="0" cy="0"/>
         </a:xfrm>
       </p:grpSpPr>
+      <p:pic>
+        <p:nvPicPr>
+          <p:cNvPr id="5" name="Picture 4" descr="A cartoon clock with arms and hands&#10;&#10;AI-generated content may be incorrect.">
+            <a:extLst>
+              <a:ext uri="{FF2B5EF4-FFF2-40B4-BE49-F238E27FC236}">
+                <a16:creationId xmlns:a16="http://schemas.microsoft.com/office/drawing/2014/main" id="{D2181F65-8A87-6E43-A822-ED8F0E55D7C9}"/>
+              </a:ext>
+            </a:extLst>
+          </p:cNvPr>
+          <p:cNvPicPr>
+            <a:picLocks noChangeAspect="1"/>
+          </p:cNvPicPr>
+          <p:nvPr/>
+        </p:nvPicPr>
+        <p:blipFill>
+          <a:blip r:embed="rId2"/>
+          <a:srcRect l="16702" r="16138"/>
+          <a:stretch>
+            <a:fillRect/>
+          </a:stretch>
+        </p:blipFill>
+        <p:spPr>
+          <a:xfrm>
+            <a:off x="6389933" y="1479691"/>
+            <a:ext cx="2686757" cy="2273300"/>
+          </a:xfrm>
+          <a:prstGeom prst="rect">
+            <a:avLst/>
+          </a:prstGeom>
+        </p:spPr>
+      </p:pic>
       <p:sp>
         <p:nvSpPr>
           <p:cNvPr id="2" name="Title 1">
             <a:extLst>
               <a:ext uri="{FF2B5EF4-FFF2-40B4-BE49-F238E27FC236}">
-                <a16:creationId xmlns:a16="http://schemas.microsoft.com/office/drawing/2014/main" id="{EF6DCDA1-7B5F-5C35-A9AA-615326ACA9A2}"/>
+                <a16:creationId xmlns:a16="http://schemas.microsoft.com/office/drawing/2014/main" id="{17196124-3A68-24DE-F035-EFC970C0CFE9}"/>
               </a:ext>
             </a:extLst>
           </p:cNvPr>
@@ -3766,7 +3799,7 @@
           <a:p>
             <a:r>
               <a:rPr lang="en-US" dirty="0"/>
-              <a:t>Sponsor Meeting Tips                !</a:t>
+              <a:t>Sponsor Meeting Tips</a:t>
             </a:r>
           </a:p>
         </p:txBody>
@@ -3776,7 +3809,7 @@
           <p:cNvPr id="3" name="Content Placeholder 2">
             <a:extLst>
               <a:ext uri="{FF2B5EF4-FFF2-40B4-BE49-F238E27FC236}">
-                <a16:creationId xmlns:a16="http://schemas.microsoft.com/office/drawing/2014/main" id="{A014A7DF-ED39-28CF-2564-CBE816EA76A9}"/>
+                <a16:creationId xmlns:a16="http://schemas.microsoft.com/office/drawing/2014/main" id="{A1DF1120-DAB2-414D-6C59-A53C570214AD}"/>
               </a:ext>
             </a:extLst>
           </p:cNvPr>
@@ -3787,113 +3820,85 @@
             <p:ph idx="1"/>
           </p:nvPr>
         </p:nvSpPr>
-        <p:spPr/>
+        <p:spPr>
+          <a:xfrm>
+            <a:off x="628650" y="1825625"/>
+            <a:ext cx="8123464" cy="4351338"/>
+          </a:xfrm>
+        </p:spPr>
         <p:txBody>
           <a:bodyPr>
             <a:normAutofit/>
           </a:bodyPr>
           <a:lstStyle/>
           <a:p>
-            <a:r>
-              <a:rPr lang="en-US" sz="2400" dirty="0"/>
-              <a:t>Dress </a:t>
-            </a:r>
+            <a:pPr marL="0" indent="0">
+              <a:buNone/>
+            </a:pPr>
             <a:r>
               <a:rPr lang="en-US" sz="2400" b="1" dirty="0"/>
-              <a:t>appropriately</a:t>
-            </a:r>
-            <a:r>
-              <a:rPr lang="en-US" sz="2400" dirty="0"/>
-              <a:t> (</a:t>
-            </a:r>
-            <a:r>
-              <a:rPr lang="en-US" sz="2400" i="1" dirty="0"/>
-              <a:t>ask if in doubt</a:t>
-            </a:r>
-            <a:r>
-              <a:rPr lang="en-US" sz="2400" dirty="0"/>
-              <a:t>) </a:t>
-            </a:r>
-            <a:r>
-              <a:rPr lang="en-US" sz="1400" dirty="0">
-                <a:hlinkClick r:id="rId2"/>
-              </a:rPr>
-              <a:t>https://careercloset.tamu.edu/</a:t>
-            </a:r>
-            <a:endParaRPr lang="en-US" sz="2400" dirty="0"/>
-          </a:p>
-          <a:p>
-            <a:r>
-              <a:rPr lang="en-US" sz="2400" dirty="0"/>
-              <a:t>Phone on </a:t>
-            </a:r>
+              <a:t>Ensure meetings don't go longer than allotted</a:t>
+            </a:r>
+          </a:p>
+          <a:p>
+            <a:r>
+              <a:rPr lang="en-US" sz="2000" dirty="0"/>
+              <a:t>Listen for clues sponsor needs to go</a:t>
+            </a:r>
+            <a:br>
+              <a:rPr lang="en-US" sz="2000" dirty="0"/>
+            </a:br>
+            <a:r>
+              <a:rPr lang="en-US" sz="2000" dirty="0"/>
+              <a:t>(“well, that about wraps it up…”,</a:t>
+            </a:r>
+            <a:br>
+              <a:rPr lang="en-US" sz="2000" dirty="0"/>
+            </a:br>
+            <a:r>
+              <a:rPr lang="en-US" sz="2000" dirty="0"/>
+              <a:t>“OK, if there isn't anything else…”, etc.)</a:t>
+            </a:r>
+          </a:p>
+          <a:p>
+            <a:r>
+              <a:rPr lang="en-US" sz="2000" dirty="0"/>
+              <a:t>and, not meeting related </a:t>
+            </a:r>
+            <a:r>
+              <a:rPr lang="en-US" sz="2000" i="1" dirty="0"/>
+              <a:t>but</a:t>
+            </a:r>
+            <a:r>
+              <a:rPr lang="en-US" sz="2000" dirty="0"/>
+              <a:t>:</a:t>
+            </a:r>
+          </a:p>
+          <a:p>
+            <a:pPr marL="0" indent="0">
+              <a:buNone/>
+            </a:pPr>
+            <a:endParaRPr lang="en-US" sz="1000" dirty="0"/>
+          </a:p>
+          <a:p>
+            <a:pPr marL="0" indent="0">
+              <a:buNone/>
+            </a:pPr>
             <a:r>
               <a:rPr lang="en-US" sz="2400" b="1" dirty="0"/>
-              <a:t>silent mode </a:t>
-            </a:r>
-            <a:r>
-              <a:rPr lang="en-US" sz="2400" dirty="0"/>
-              <a:t>and </a:t>
-            </a:r>
-            <a:r>
-              <a:rPr lang="en-US" sz="2400" b="1" dirty="0"/>
-              <a:t>don't use it</a:t>
-            </a:r>
-            <a:r>
-              <a:rPr lang="en-US" sz="2400" dirty="0"/>
-              <a:t>,</a:t>
-            </a:r>
-          </a:p>
-          <a:p>
-            <a:r>
-              <a:rPr lang="en-US" sz="2400" dirty="0"/>
-              <a:t>Follow all </a:t>
-            </a:r>
-            <a:r>
-              <a:rPr lang="en-US" sz="2400" b="1" dirty="0"/>
-              <a:t>safety rules</a:t>
-            </a:r>
-            <a:r>
-              <a:rPr lang="en-US" sz="2400" dirty="0"/>
-              <a:t> (and instructions),</a:t>
-            </a:r>
-          </a:p>
-          <a:p>
-            <a:r>
-              <a:rPr lang="en-US" sz="2400" b="1" dirty="0"/>
-              <a:t>Ask</a:t>
-            </a:r>
-            <a:r>
-              <a:rPr lang="en-US" sz="2400" dirty="0"/>
-              <a:t> before taking photos or videos,</a:t>
-            </a:r>
-          </a:p>
-          <a:p>
-            <a:r>
-              <a:rPr lang="en-US" sz="2400" b="1" dirty="0"/>
-              <a:t>Document</a:t>
-            </a:r>
-            <a:r>
-              <a:rPr lang="en-US" sz="2400" dirty="0"/>
-              <a:t> who you meet with,</a:t>
-            </a:r>
-          </a:p>
-          <a:p>
-            <a:r>
-              <a:rPr lang="en-US" sz="2400" dirty="0"/>
-              <a:t>You are representing </a:t>
-            </a:r>
-            <a:r>
-              <a:rPr lang="en-US" sz="2400" b="1" dirty="0">
-                <a:solidFill>
-                  <a:srgbClr val="4B1211"/>
-                </a:solidFill>
-              </a:rPr>
-              <a:t>Texas A&amp;M</a:t>
-            </a:r>
-            <a:r>
-              <a:rPr lang="en-US" sz="2400" dirty="0"/>
-              <a:t>, be a good example!</a:t>
+              <a:t>Don't be afraid to call the sponsor if emails are not answered and you need answers</a:t>
+            </a:r>
+          </a:p>
+          <a:p>
+            <a:r>
+              <a:rPr lang="en-US" sz="2000" dirty="0"/>
+              <a:t>Set target dates for required information and follow up,</a:t>
+            </a:r>
+          </a:p>
+          <a:p>
+            <a:r>
+              <a:rPr lang="en-US" sz="2000" dirty="0"/>
+              <a:t>If you call and they don't answer, leave a voicemail.</a:t>
             </a:r>
           </a:p>
         </p:txBody>
@@ -3903,7 +3908,7 @@
           <p:cNvPr id="6" name="Slide Number Placeholder 5">
             <a:extLst>
               <a:ext uri="{FF2B5EF4-FFF2-40B4-BE49-F238E27FC236}">
-                <a16:creationId xmlns:a16="http://schemas.microsoft.com/office/drawing/2014/main" id="{0D52BE6D-F2D6-C53E-4199-C4EB9E66AD69}"/>
+                <a16:creationId xmlns:a16="http://schemas.microsoft.com/office/drawing/2014/main" id="{4365D923-D066-BAC2-EEB2-40ECFFEB5A16}"/>
               </a:ext>
             </a:extLst>
           </p:cNvPr>
@@ -3922,6 +3927,231 @@
             <a:fld id="{727B0ACA-53D9-FB44-A37C-A778C10B232A}" type="slidenum">
               <a:rPr lang="en-US" smtClean="0"/>
               <a:t>11</a:t>
+            </a:fld>
+            <a:endParaRPr lang="en-US"/>
+          </a:p>
+        </p:txBody>
+      </p:sp>
+    </p:spTree>
+    <p:extLst>
+      <p:ext uri="{BB962C8B-B14F-4D97-AF65-F5344CB8AC3E}">
+        <p14:creationId xmlns:p14="http://schemas.microsoft.com/office/powerpoint/2010/main" val="1621608312"/>
+      </p:ext>
+    </p:extLst>
+  </p:cSld>
+  <p:clrMapOvr>
+    <a:masterClrMapping/>
+  </p:clrMapOvr>
+</p:sld>
+</file>
+
+<file path=ppt/slides/slide12.xml><?xml version="1.0" encoding="utf-8"?>
+<p:sld xmlns:a="http://schemas.openxmlformats.org/drawingml/2006/main" xmlns:r="http://schemas.openxmlformats.org/officeDocument/2006/relationships" xmlns:p="http://schemas.openxmlformats.org/presentationml/2006/main">
+  <p:cSld>
+    <p:bg>
+      <p:bgPr>
+        <a:solidFill>
+          <a:schemeClr val="tx2">
+            <a:lumMod val="10000"/>
+            <a:lumOff val="90000"/>
+          </a:schemeClr>
+        </a:solidFill>
+        <a:effectLst/>
+      </p:bgPr>
+    </p:bg>
+    <p:spTree>
+      <p:nvGrpSpPr>
+        <p:cNvPr id="1" name=""/>
+        <p:cNvGrpSpPr/>
+        <p:nvPr/>
+      </p:nvGrpSpPr>
+      <p:grpSpPr>
+        <a:xfrm>
+          <a:off x="0" y="0"/>
+          <a:ext cx="0" cy="0"/>
+          <a:chOff x="0" y="0"/>
+          <a:chExt cx="0" cy="0"/>
+        </a:xfrm>
+      </p:grpSpPr>
+      <p:sp>
+        <p:nvSpPr>
+          <p:cNvPr id="2" name="Title 1">
+            <a:extLst>
+              <a:ext uri="{FF2B5EF4-FFF2-40B4-BE49-F238E27FC236}">
+                <a16:creationId xmlns:a16="http://schemas.microsoft.com/office/drawing/2014/main" id="{EF6DCDA1-7B5F-5C35-A9AA-615326ACA9A2}"/>
+              </a:ext>
+            </a:extLst>
+          </p:cNvPr>
+          <p:cNvSpPr>
+            <a:spLocks noGrp="1"/>
+          </p:cNvSpPr>
+          <p:nvPr>
+            <p:ph type="title"/>
+          </p:nvPr>
+        </p:nvSpPr>
+        <p:spPr/>
+        <p:txBody>
+          <a:bodyPr/>
+          <a:lstStyle/>
+          <a:p>
+            <a:r>
+              <a:rPr lang="en-US" dirty="0"/>
+              <a:t>Sponsor Meeting Tips                !</a:t>
+            </a:r>
+          </a:p>
+        </p:txBody>
+      </p:sp>
+      <p:sp>
+        <p:nvSpPr>
+          <p:cNvPr id="3" name="Content Placeholder 2">
+            <a:extLst>
+              <a:ext uri="{FF2B5EF4-FFF2-40B4-BE49-F238E27FC236}">
+                <a16:creationId xmlns:a16="http://schemas.microsoft.com/office/drawing/2014/main" id="{A014A7DF-ED39-28CF-2564-CBE816EA76A9}"/>
+              </a:ext>
+            </a:extLst>
+          </p:cNvPr>
+          <p:cNvSpPr>
+            <a:spLocks noGrp="1"/>
+          </p:cNvSpPr>
+          <p:nvPr>
+            <p:ph idx="1"/>
+          </p:nvPr>
+        </p:nvSpPr>
+        <p:spPr/>
+        <p:txBody>
+          <a:bodyPr>
+            <a:normAutofit/>
+          </a:bodyPr>
+          <a:lstStyle/>
+          <a:p>
+            <a:r>
+              <a:rPr lang="en-US" sz="2400" dirty="0"/>
+              <a:t>Dress </a:t>
+            </a:r>
+            <a:r>
+              <a:rPr lang="en-US" sz="2400" b="1" dirty="0"/>
+              <a:t>appropriately</a:t>
+            </a:r>
+            <a:r>
+              <a:rPr lang="en-US" sz="2400" dirty="0"/>
+              <a:t> (</a:t>
+            </a:r>
+            <a:r>
+              <a:rPr lang="en-US" sz="2400" i="1" dirty="0"/>
+              <a:t>ask if in doubt</a:t>
+            </a:r>
+            <a:r>
+              <a:rPr lang="en-US" sz="2400" dirty="0"/>
+              <a:t>) </a:t>
+            </a:r>
+            <a:r>
+              <a:rPr lang="en-US" sz="1400" dirty="0">
+                <a:hlinkClick r:id="rId2"/>
+              </a:rPr>
+              <a:t>https://careercloset.tamu.edu/</a:t>
+            </a:r>
+            <a:endParaRPr lang="en-US" sz="2400" dirty="0"/>
+          </a:p>
+          <a:p>
+            <a:r>
+              <a:rPr lang="en-US" sz="2400" dirty="0"/>
+              <a:t>Phone on </a:t>
+            </a:r>
+            <a:r>
+              <a:rPr lang="en-US" sz="2400" b="1" dirty="0"/>
+              <a:t>silent mode </a:t>
+            </a:r>
+            <a:r>
+              <a:rPr lang="en-US" sz="2400" dirty="0"/>
+              <a:t>and </a:t>
+            </a:r>
+            <a:r>
+              <a:rPr lang="en-US" sz="2400" b="1" dirty="0"/>
+              <a:t>don't use it</a:t>
+            </a:r>
+            <a:r>
+              <a:rPr lang="en-US" sz="2400" dirty="0"/>
+              <a:t>,</a:t>
+            </a:r>
+          </a:p>
+          <a:p>
+            <a:r>
+              <a:rPr lang="en-US" sz="2400" dirty="0"/>
+              <a:t>Follow all </a:t>
+            </a:r>
+            <a:r>
+              <a:rPr lang="en-US" sz="2400" b="1" dirty="0"/>
+              <a:t>safety rules</a:t>
+            </a:r>
+            <a:r>
+              <a:rPr lang="en-US" sz="2400" dirty="0"/>
+              <a:t> (and instructions),</a:t>
+            </a:r>
+          </a:p>
+          <a:p>
+            <a:r>
+              <a:rPr lang="en-US" sz="2400" b="1" dirty="0"/>
+              <a:t>Ask</a:t>
+            </a:r>
+            <a:r>
+              <a:rPr lang="en-US" sz="2400" dirty="0"/>
+              <a:t> before taking photos or videos,</a:t>
+            </a:r>
+          </a:p>
+          <a:p>
+            <a:r>
+              <a:rPr lang="en-US" sz="2400" b="1" dirty="0"/>
+              <a:t>Document</a:t>
+            </a:r>
+            <a:r>
+              <a:rPr lang="en-US" sz="2400" dirty="0"/>
+              <a:t> who you meet with,</a:t>
+            </a:r>
+          </a:p>
+          <a:p>
+            <a:r>
+              <a:rPr lang="en-US" sz="2400" dirty="0"/>
+              <a:t>You are representing </a:t>
+            </a:r>
+            <a:r>
+              <a:rPr lang="en-US" sz="2400" b="1" dirty="0">
+                <a:solidFill>
+                  <a:srgbClr val="4B1211"/>
+                </a:solidFill>
+              </a:rPr>
+              <a:t>Texas A&amp;M</a:t>
+            </a:r>
+            <a:r>
+              <a:rPr lang="en-US" sz="2400" dirty="0"/>
+              <a:t>, be a good example!</a:t>
+            </a:r>
+          </a:p>
+        </p:txBody>
+      </p:sp>
+      <p:sp>
+        <p:nvSpPr>
+          <p:cNvPr id="6" name="Slide Number Placeholder 5">
+            <a:extLst>
+              <a:ext uri="{FF2B5EF4-FFF2-40B4-BE49-F238E27FC236}">
+                <a16:creationId xmlns:a16="http://schemas.microsoft.com/office/drawing/2014/main" id="{0D52BE6D-F2D6-C53E-4199-C4EB9E66AD69}"/>
+              </a:ext>
+            </a:extLst>
+          </p:cNvPr>
+          <p:cNvSpPr>
+            <a:spLocks noGrp="1"/>
+          </p:cNvSpPr>
+          <p:nvPr>
+            <p:ph type="sldNum" sz="quarter" idx="12"/>
+          </p:nvPr>
+        </p:nvSpPr>
+        <p:spPr/>
+        <p:txBody>
+          <a:bodyPr/>
+          <a:lstStyle/>
+          <a:p>
+            <a:fld id="{727B0ACA-53D9-FB44-A37C-A778C10B232A}" type="slidenum">
+              <a:rPr lang="en-US" smtClean="0"/>
+              <a:t>12</a:t>
             </a:fld>
             <a:endParaRPr lang="en-US"/>
           </a:p>
@@ -4048,205 +4278,6 @@
     <p:extLst>
       <p:ext uri="{BB962C8B-B14F-4D97-AF65-F5344CB8AC3E}">
         <p14:creationId xmlns:p14="http://schemas.microsoft.com/office/powerpoint/2010/main" val="2499487950"/>
-      </p:ext>
-    </p:extLst>
-  </p:cSld>
-  <p:clrMapOvr>
-    <a:masterClrMapping/>
-  </p:clrMapOvr>
-</p:sld>
-</file>
-
-<file path=ppt/slides/slide12.xml><?xml version="1.0" encoding="utf-8"?>
-<p:sld xmlns:a="http://schemas.openxmlformats.org/drawingml/2006/main" xmlns:r="http://schemas.openxmlformats.org/officeDocument/2006/relationships" xmlns:p="http://schemas.openxmlformats.org/presentationml/2006/main">
-  <p:cSld>
-    <p:bg>
-      <p:bgPr>
-        <a:solidFill>
-          <a:schemeClr val="bg1">
-            <a:lumMod val="85000"/>
-          </a:schemeClr>
-        </a:solidFill>
-        <a:effectLst/>
-      </p:bgPr>
-    </p:bg>
-    <p:spTree>
-      <p:nvGrpSpPr>
-        <p:cNvPr id="1" name=""/>
-        <p:cNvGrpSpPr/>
-        <p:nvPr/>
-      </p:nvGrpSpPr>
-      <p:grpSpPr>
-        <a:xfrm>
-          <a:off x="0" y="0"/>
-          <a:ext cx="0" cy="0"/>
-          <a:chOff x="0" y="0"/>
-          <a:chExt cx="0" cy="0"/>
-        </a:xfrm>
-      </p:grpSpPr>
-      <p:pic>
-        <p:nvPicPr>
-          <p:cNvPr id="5" name="Picture 4" descr="A group of people with different colors&#10;&#10;AI-generated content may be incorrect.">
-            <a:extLst>
-              <a:ext uri="{FF2B5EF4-FFF2-40B4-BE49-F238E27FC236}">
-                <a16:creationId xmlns:a16="http://schemas.microsoft.com/office/drawing/2014/main" id="{F16AD53B-4C9D-70B6-CA5C-19D4613CF890}"/>
-              </a:ext>
-            </a:extLst>
-          </p:cNvPr>
-          <p:cNvPicPr>
-            <a:picLocks noChangeAspect="1"/>
-          </p:cNvPicPr>
-          <p:nvPr/>
-        </p:nvPicPr>
-        <p:blipFill>
-          <a:blip r:embed="rId2"/>
-          <a:stretch>
-            <a:fillRect/>
-          </a:stretch>
-        </p:blipFill>
-        <p:spPr>
-          <a:xfrm>
-            <a:off x="2851855" y="4610345"/>
-            <a:ext cx="3440289" cy="2247655"/>
-          </a:xfrm>
-          <a:prstGeom prst="rect">
-            <a:avLst/>
-          </a:prstGeom>
-        </p:spPr>
-      </p:pic>
-      <p:sp>
-        <p:nvSpPr>
-          <p:cNvPr id="2" name="Title 1">
-            <a:extLst>
-              <a:ext uri="{FF2B5EF4-FFF2-40B4-BE49-F238E27FC236}">
-                <a16:creationId xmlns:a16="http://schemas.microsoft.com/office/drawing/2014/main" id="{D518058D-DACC-536A-4149-A67F37F25F41}"/>
-              </a:ext>
-            </a:extLst>
-          </p:cNvPr>
-          <p:cNvSpPr>
-            <a:spLocks noGrp="1"/>
-          </p:cNvSpPr>
-          <p:nvPr>
-            <p:ph type="title"/>
-          </p:nvPr>
-        </p:nvSpPr>
-        <p:spPr/>
-        <p:txBody>
-          <a:bodyPr/>
-          <a:lstStyle/>
-          <a:p>
-            <a:r>
-              <a:rPr lang="en-US" dirty="0"/>
-              <a:t>Team Dynamics</a:t>
-            </a:r>
-          </a:p>
-        </p:txBody>
-      </p:sp>
-      <p:sp>
-        <p:nvSpPr>
-          <p:cNvPr id="3" name="Content Placeholder 2">
-            <a:extLst>
-              <a:ext uri="{FF2B5EF4-FFF2-40B4-BE49-F238E27FC236}">
-                <a16:creationId xmlns:a16="http://schemas.microsoft.com/office/drawing/2014/main" id="{9402BC8F-C8A3-D2BE-FAFB-112682AEC092}"/>
-              </a:ext>
-            </a:extLst>
-          </p:cNvPr>
-          <p:cNvSpPr>
-            <a:spLocks noGrp="1"/>
-          </p:cNvSpPr>
-          <p:nvPr>
-            <p:ph idx="1"/>
-          </p:nvPr>
-        </p:nvSpPr>
-        <p:spPr/>
-        <p:txBody>
-          <a:bodyPr>
-            <a:normAutofit/>
-          </a:bodyPr>
-          <a:lstStyle/>
-          <a:p>
-            <a:pPr marL="0" indent="0">
-              <a:buNone/>
-            </a:pPr>
-            <a:r>
-              <a:rPr lang="en-US" sz="2400" b="1" dirty="0"/>
-              <a:t>1. You are called a team for a reason</a:t>
-            </a:r>
-          </a:p>
-          <a:p>
-            <a:r>
-              <a:rPr lang="en-US" sz="2000" dirty="0"/>
-              <a:t>You have the same goals</a:t>
-            </a:r>
-          </a:p>
-          <a:p>
-            <a:r>
-              <a:rPr lang="en-US" sz="2000" dirty="0"/>
-              <a:t>You each have skills and abilities</a:t>
-            </a:r>
-          </a:p>
-          <a:p>
-            <a:pPr marL="0" indent="0">
-              <a:buNone/>
-            </a:pPr>
-            <a:endParaRPr lang="en-US" sz="1000" dirty="0"/>
-          </a:p>
-          <a:p>
-            <a:pPr marL="0" indent="0">
-              <a:buNone/>
-            </a:pPr>
-            <a:r>
-              <a:rPr lang="en-US" sz="2400" b="1" dirty="0"/>
-              <a:t>2. Share the load</a:t>
-            </a:r>
-          </a:p>
-          <a:p>
-            <a:r>
-              <a:rPr lang="en-US" sz="2000" dirty="0"/>
-              <a:t>No one gets a free pass</a:t>
-            </a:r>
-          </a:p>
-          <a:p>
-            <a:r>
-              <a:rPr lang="en-US" sz="2000" dirty="0"/>
-              <a:t>Work independently but together</a:t>
-            </a:r>
-          </a:p>
-        </p:txBody>
-      </p:sp>
-      <p:sp>
-        <p:nvSpPr>
-          <p:cNvPr id="6" name="Slide Number Placeholder 5">
-            <a:extLst>
-              <a:ext uri="{FF2B5EF4-FFF2-40B4-BE49-F238E27FC236}">
-                <a16:creationId xmlns:a16="http://schemas.microsoft.com/office/drawing/2014/main" id="{CE0C9F83-D95A-BA31-AAEA-B79D0AEBF327}"/>
-              </a:ext>
-            </a:extLst>
-          </p:cNvPr>
-          <p:cNvSpPr>
-            <a:spLocks noGrp="1"/>
-          </p:cNvSpPr>
-          <p:nvPr>
-            <p:ph type="sldNum" sz="quarter" idx="12"/>
-          </p:nvPr>
-        </p:nvSpPr>
-        <p:spPr/>
-        <p:txBody>
-          <a:bodyPr/>
-          <a:lstStyle/>
-          <a:p>
-            <a:fld id="{727B0ACA-53D9-FB44-A37C-A778C10B232A}" type="slidenum">
-              <a:rPr lang="en-US" smtClean="0"/>
-              <a:t>12</a:t>
-            </a:fld>
-            <a:endParaRPr lang="en-US"/>
-          </a:p>
-        </p:txBody>
-      </p:sp>
-    </p:spTree>
-    <p:extLst>
-      <p:ext uri="{BB962C8B-B14F-4D97-AF65-F5344CB8AC3E}">
-        <p14:creationId xmlns:p14="http://schemas.microsoft.com/office/powerpoint/2010/main" val="3087645386"/>
       </p:ext>
     </p:extLst>
   </p:cSld>
@@ -4283,112 +4314,12 @@
           <a:chExt cx="0" cy="0"/>
         </a:xfrm>
       </p:grpSpPr>
-      <p:sp>
-        <p:nvSpPr>
-          <p:cNvPr id="2" name="Title 1">
-            <a:extLst>
-              <a:ext uri="{FF2B5EF4-FFF2-40B4-BE49-F238E27FC236}">
-                <a16:creationId xmlns:a16="http://schemas.microsoft.com/office/drawing/2014/main" id="{6D167F7E-C98E-4DAF-D69C-30DF85010661}"/>
-              </a:ext>
-            </a:extLst>
-          </p:cNvPr>
-          <p:cNvSpPr>
-            <a:spLocks noGrp="1"/>
-          </p:cNvSpPr>
-          <p:nvPr>
-            <p:ph type="title"/>
-          </p:nvPr>
-        </p:nvSpPr>
-        <p:spPr/>
-        <p:txBody>
-          <a:bodyPr/>
-          <a:lstStyle/>
-          <a:p>
-            <a:r>
-              <a:rPr lang="en-US" dirty="0"/>
-              <a:t>Team Dynamics</a:t>
-            </a:r>
-          </a:p>
-        </p:txBody>
-      </p:sp>
-      <p:sp>
-        <p:nvSpPr>
-          <p:cNvPr id="3" name="Content Placeholder 2">
-            <a:extLst>
-              <a:ext uri="{FF2B5EF4-FFF2-40B4-BE49-F238E27FC236}">
-                <a16:creationId xmlns:a16="http://schemas.microsoft.com/office/drawing/2014/main" id="{D0ACAC33-E176-705C-D2C7-73A860203CFB}"/>
-              </a:ext>
-            </a:extLst>
-          </p:cNvPr>
-          <p:cNvSpPr>
-            <a:spLocks noGrp="1"/>
-          </p:cNvSpPr>
-          <p:nvPr>
-            <p:ph idx="1"/>
-          </p:nvPr>
-        </p:nvSpPr>
-        <p:spPr/>
-        <p:txBody>
-          <a:bodyPr>
-            <a:normAutofit/>
-          </a:bodyPr>
-          <a:lstStyle/>
-          <a:p>
-            <a:pPr marL="0" indent="0">
-              <a:buNone/>
-            </a:pPr>
-            <a:r>
-              <a:rPr lang="en-US" sz="2400" b="1" dirty="0"/>
-              <a:t>3. Recognize and acknowledge differences</a:t>
-            </a:r>
-          </a:p>
-          <a:p>
-            <a:r>
-              <a:rPr lang="en-US" sz="2000" dirty="0"/>
-              <a:t>Compromise</a:t>
-            </a:r>
-          </a:p>
-          <a:p>
-            <a:r>
-              <a:rPr lang="en-US" sz="2000" dirty="0"/>
-              <a:t>Use individual strengths to make the team better</a:t>
-            </a:r>
-          </a:p>
-          <a:p>
-            <a:pPr marL="0" indent="0">
-              <a:buNone/>
-            </a:pPr>
-            <a:endParaRPr lang="en-US" sz="1000" dirty="0"/>
-          </a:p>
-          <a:p>
-            <a:pPr marL="0" indent="0">
-              <a:buNone/>
-            </a:pPr>
-            <a:r>
-              <a:rPr lang="en-US" sz="2400" b="1" dirty="0"/>
-              <a:t>4. If you have difficulty</a:t>
-            </a:r>
-          </a:p>
-          <a:p>
-            <a:r>
-              <a:rPr lang="en-US" sz="2000" dirty="0"/>
-              <a:t>Try to work things out together (don't talk bad about anyone!)</a:t>
-            </a:r>
-          </a:p>
-          <a:p>
-            <a:r>
-              <a:rPr lang="en-US" sz="2000" dirty="0"/>
-              <a:t>Contact instructor team for assistance only if you can't work it out</a:t>
-            </a:r>
-          </a:p>
-        </p:txBody>
-      </p:sp>
       <p:pic>
         <p:nvPicPr>
-          <p:cNvPr id="4" name="Picture 3" descr="A group of people with different colors&#10;&#10;AI-generated content may be incorrect.">
-            <a:extLst>
-              <a:ext uri="{FF2B5EF4-FFF2-40B4-BE49-F238E27FC236}">
-                <a16:creationId xmlns:a16="http://schemas.microsoft.com/office/drawing/2014/main" id="{D4230907-E682-3147-7FF4-72B876A4E08E}"/>
+          <p:cNvPr id="5" name="Picture 4" descr="A group of people with different colors&#10;&#10;AI-generated content may be incorrect.">
+            <a:extLst>
+              <a:ext uri="{FF2B5EF4-FFF2-40B4-BE49-F238E27FC236}">
+                <a16:creationId xmlns:a16="http://schemas.microsoft.com/office/drawing/2014/main" id="{F16AD53B-4C9D-70B6-CA5C-19D4613CF890}"/>
               </a:ext>
             </a:extLst>
           </p:cNvPr>
@@ -4415,10 +4346,110 @@
       </p:pic>
       <p:sp>
         <p:nvSpPr>
-          <p:cNvPr id="5" name="Slide Number Placeholder 4">
-            <a:extLst>
-              <a:ext uri="{FF2B5EF4-FFF2-40B4-BE49-F238E27FC236}">
-                <a16:creationId xmlns:a16="http://schemas.microsoft.com/office/drawing/2014/main" id="{CCEF6C51-2220-9949-1A2F-DDDA57A11942}"/>
+          <p:cNvPr id="2" name="Title 1">
+            <a:extLst>
+              <a:ext uri="{FF2B5EF4-FFF2-40B4-BE49-F238E27FC236}">
+                <a16:creationId xmlns:a16="http://schemas.microsoft.com/office/drawing/2014/main" id="{D518058D-DACC-536A-4149-A67F37F25F41}"/>
+              </a:ext>
+            </a:extLst>
+          </p:cNvPr>
+          <p:cNvSpPr>
+            <a:spLocks noGrp="1"/>
+          </p:cNvSpPr>
+          <p:nvPr>
+            <p:ph type="title"/>
+          </p:nvPr>
+        </p:nvSpPr>
+        <p:spPr/>
+        <p:txBody>
+          <a:bodyPr/>
+          <a:lstStyle/>
+          <a:p>
+            <a:r>
+              <a:rPr lang="en-US" dirty="0"/>
+              <a:t>Team Dynamics</a:t>
+            </a:r>
+          </a:p>
+        </p:txBody>
+      </p:sp>
+      <p:sp>
+        <p:nvSpPr>
+          <p:cNvPr id="3" name="Content Placeholder 2">
+            <a:extLst>
+              <a:ext uri="{FF2B5EF4-FFF2-40B4-BE49-F238E27FC236}">
+                <a16:creationId xmlns:a16="http://schemas.microsoft.com/office/drawing/2014/main" id="{9402BC8F-C8A3-D2BE-FAFB-112682AEC092}"/>
+              </a:ext>
+            </a:extLst>
+          </p:cNvPr>
+          <p:cNvSpPr>
+            <a:spLocks noGrp="1"/>
+          </p:cNvSpPr>
+          <p:nvPr>
+            <p:ph idx="1"/>
+          </p:nvPr>
+        </p:nvSpPr>
+        <p:spPr/>
+        <p:txBody>
+          <a:bodyPr>
+            <a:normAutofit/>
+          </a:bodyPr>
+          <a:lstStyle/>
+          <a:p>
+            <a:pPr marL="0" indent="0">
+              <a:buNone/>
+            </a:pPr>
+            <a:r>
+              <a:rPr lang="en-US" sz="2400" b="1" dirty="0"/>
+              <a:t>1. You are called a team for a reason</a:t>
+            </a:r>
+          </a:p>
+          <a:p>
+            <a:r>
+              <a:rPr lang="en-US" sz="2000" dirty="0"/>
+              <a:t>You have the same goals</a:t>
+            </a:r>
+          </a:p>
+          <a:p>
+            <a:r>
+              <a:rPr lang="en-US" sz="2000" dirty="0"/>
+              <a:t>You each have skills and abilities</a:t>
+            </a:r>
+          </a:p>
+          <a:p>
+            <a:pPr marL="0" indent="0">
+              <a:buNone/>
+            </a:pPr>
+            <a:endParaRPr lang="en-US" sz="1000" dirty="0"/>
+          </a:p>
+          <a:p>
+            <a:pPr marL="0" indent="0">
+              <a:buNone/>
+            </a:pPr>
+            <a:r>
+              <a:rPr lang="en-US" sz="2400" b="1" dirty="0"/>
+              <a:t>2. Share the load</a:t>
+            </a:r>
+          </a:p>
+          <a:p>
+            <a:r>
+              <a:rPr lang="en-US" sz="2000" dirty="0"/>
+              <a:t>No one gets a free pass</a:t>
+            </a:r>
+          </a:p>
+          <a:p>
+            <a:r>
+              <a:rPr lang="en-US" sz="2000" dirty="0"/>
+              <a:t>Work independently but together</a:t>
+            </a:r>
+          </a:p>
+        </p:txBody>
+      </p:sp>
+      <p:sp>
+        <p:nvSpPr>
+          <p:cNvPr id="6" name="Slide Number Placeholder 5">
+            <a:extLst>
+              <a:ext uri="{FF2B5EF4-FFF2-40B4-BE49-F238E27FC236}">
+                <a16:creationId xmlns:a16="http://schemas.microsoft.com/office/drawing/2014/main" id="{CE0C9F83-D95A-BA31-AAEA-B79D0AEBF327}"/>
               </a:ext>
             </a:extLst>
           </p:cNvPr>
@@ -4445,7 +4476,7 @@
     </p:spTree>
     <p:extLst>
       <p:ext uri="{BB962C8B-B14F-4D97-AF65-F5344CB8AC3E}">
-        <p14:creationId xmlns:p14="http://schemas.microsoft.com/office/powerpoint/2010/main" val="3223331487"/>
+        <p14:creationId xmlns:p14="http://schemas.microsoft.com/office/powerpoint/2010/main" val="3087645386"/>
       </p:ext>
     </p:extLst>
   </p:cSld>
@@ -4487,7 +4518,7 @@
           <p:cNvPr id="2" name="Title 1">
             <a:extLst>
               <a:ext uri="{FF2B5EF4-FFF2-40B4-BE49-F238E27FC236}">
-                <a16:creationId xmlns:a16="http://schemas.microsoft.com/office/drawing/2014/main" id="{9631FDE3-7FEA-E3B3-E369-5324C6A12BE2}"/>
+                <a16:creationId xmlns:a16="http://schemas.microsoft.com/office/drawing/2014/main" id="{6D167F7E-C98E-4DAF-D69C-30DF85010661}"/>
               </a:ext>
             </a:extLst>
           </p:cNvPr>
@@ -4505,11 +4536,7 @@
           <a:p>
             <a:r>
               <a:rPr lang="en-US" dirty="0"/>
-              <a:t>            </a:t>
-            </a:r>
-            <a:r>
-              <a:rPr lang="en-US" b="1" dirty="0"/>
-              <a:t>Faculty Advisor</a:t>
+              <a:t>Team Dynamics</a:t>
             </a:r>
           </a:p>
         </p:txBody>
@@ -4519,7 +4546,7 @@
           <p:cNvPr id="3" name="Content Placeholder 2">
             <a:extLst>
               <a:ext uri="{FF2B5EF4-FFF2-40B4-BE49-F238E27FC236}">
-                <a16:creationId xmlns:a16="http://schemas.microsoft.com/office/drawing/2014/main" id="{A4A2A165-DE8C-ED87-E697-2FAAB6D90FDF}"/>
+                <a16:creationId xmlns:a16="http://schemas.microsoft.com/office/drawing/2014/main" id="{D0ACAC33-E176-705C-D2C7-73A860203CFB}"/>
               </a:ext>
             </a:extLst>
           </p:cNvPr>
@@ -4537,21 +4564,51 @@
           </a:bodyPr>
           <a:lstStyle/>
           <a:p>
-            <a:r>
-              <a:rPr lang="en-US" sz="2400" dirty="0"/>
-              <a:t>If you have not identified yet a potential faculty advisor, do it ASAP!</a:t>
-            </a:r>
-          </a:p>
-          <a:p>
-            <a:r>
-              <a:rPr lang="en-US" sz="2400" dirty="0"/>
-              <a:t>For areas of research interest/expertise, consult the ISEN website, follow research tab to Research Fields.</a:t>
-            </a:r>
-          </a:p>
-          <a:p>
-            <a:r>
-              <a:rPr lang="en-US" sz="2400" dirty="0"/>
-              <a:t>Your project does not need to perfectly align with a professor's research field, but they are more likely to accept if it is something that interests them.</a:t>
+            <a:pPr marL="0" indent="0">
+              <a:buNone/>
+            </a:pPr>
+            <a:r>
+              <a:rPr lang="en-US" sz="2400" b="1" dirty="0"/>
+              <a:t>3. Recognize and acknowledge differences</a:t>
+            </a:r>
+          </a:p>
+          <a:p>
+            <a:r>
+              <a:rPr lang="en-US" sz="2000" dirty="0"/>
+              <a:t>Compromise</a:t>
+            </a:r>
+          </a:p>
+          <a:p>
+            <a:r>
+              <a:rPr lang="en-US" sz="2000" dirty="0"/>
+              <a:t>Use individual strengths to make the team better</a:t>
+            </a:r>
+          </a:p>
+          <a:p>
+            <a:pPr marL="0" indent="0">
+              <a:buNone/>
+            </a:pPr>
+            <a:endParaRPr lang="en-US" sz="1000" dirty="0"/>
+          </a:p>
+          <a:p>
+            <a:pPr marL="0" indent="0">
+              <a:buNone/>
+            </a:pPr>
+            <a:r>
+              <a:rPr lang="en-US" sz="2400" b="1" dirty="0"/>
+              <a:t>4. If you have difficulty</a:t>
+            </a:r>
+          </a:p>
+          <a:p>
+            <a:r>
+              <a:rPr lang="en-US" sz="2000" dirty="0"/>
+              <a:t>Try to work things out together (don't talk bad about anyone!)</a:t>
+            </a:r>
+          </a:p>
+          <a:p>
+            <a:r>
+              <a:rPr lang="en-US" sz="2000" dirty="0"/>
+              <a:t>Contact instructor team for assistance only if you can't work it out</a:t>
             </a:r>
           </a:p>
         </p:txBody>
@@ -4561,7 +4618,7 @@
           <p:cNvPr id="4" name="Picture 3" descr="A group of people with different colors&#10;&#10;AI-generated content may be incorrect.">
             <a:extLst>
               <a:ext uri="{FF2B5EF4-FFF2-40B4-BE49-F238E27FC236}">
-                <a16:creationId xmlns:a16="http://schemas.microsoft.com/office/drawing/2014/main" id="{8A330E22-B0E5-34B4-15C8-B270B703227A}"/>
+                <a16:creationId xmlns:a16="http://schemas.microsoft.com/office/drawing/2014/main" id="{D4230907-E682-3147-7FF4-72B876A4E08E}"/>
               </a:ext>
             </a:extLst>
           </p:cNvPr>
@@ -4588,10 +4645,10 @@
       </p:pic>
       <p:sp>
         <p:nvSpPr>
-          <p:cNvPr id="9" name="Slide Number Placeholder 8">
-            <a:extLst>
-              <a:ext uri="{FF2B5EF4-FFF2-40B4-BE49-F238E27FC236}">
-                <a16:creationId xmlns:a16="http://schemas.microsoft.com/office/drawing/2014/main" id="{BBCBF981-F9E8-5691-B5CA-D9A791AFCB0E}"/>
+          <p:cNvPr id="5" name="Slide Number Placeholder 4">
+            <a:extLst>
+              <a:ext uri="{FF2B5EF4-FFF2-40B4-BE49-F238E27FC236}">
+                <a16:creationId xmlns:a16="http://schemas.microsoft.com/office/drawing/2014/main" id="{CCEF6C51-2220-9949-1A2F-DDDA57A11942}"/>
               </a:ext>
             </a:extLst>
           </p:cNvPr>
@@ -4610,6 +4667,179 @@
             <a:fld id="{727B0ACA-53D9-FB44-A37C-A778C10B232A}" type="slidenum">
               <a:rPr lang="en-US" smtClean="0"/>
               <a:t>14</a:t>
+            </a:fld>
+            <a:endParaRPr lang="en-US"/>
+          </a:p>
+        </p:txBody>
+      </p:sp>
+    </p:spTree>
+    <p:extLst>
+      <p:ext uri="{BB962C8B-B14F-4D97-AF65-F5344CB8AC3E}">
+        <p14:creationId xmlns:p14="http://schemas.microsoft.com/office/powerpoint/2010/main" val="3223331487"/>
+      </p:ext>
+    </p:extLst>
+  </p:cSld>
+  <p:clrMapOvr>
+    <a:masterClrMapping/>
+  </p:clrMapOvr>
+</p:sld>
+</file>
+
+<file path=ppt/slides/slide15.xml><?xml version="1.0" encoding="utf-8"?>
+<p:sld xmlns:a="http://schemas.openxmlformats.org/drawingml/2006/main" xmlns:r="http://schemas.openxmlformats.org/officeDocument/2006/relationships" xmlns:p="http://schemas.openxmlformats.org/presentationml/2006/main">
+  <p:cSld>
+    <p:bg>
+      <p:bgPr>
+        <a:solidFill>
+          <a:schemeClr val="bg1">
+            <a:lumMod val="85000"/>
+          </a:schemeClr>
+        </a:solidFill>
+        <a:effectLst/>
+      </p:bgPr>
+    </p:bg>
+    <p:spTree>
+      <p:nvGrpSpPr>
+        <p:cNvPr id="1" name=""/>
+        <p:cNvGrpSpPr/>
+        <p:nvPr/>
+      </p:nvGrpSpPr>
+      <p:grpSpPr>
+        <a:xfrm>
+          <a:off x="0" y="0"/>
+          <a:ext cx="0" cy="0"/>
+          <a:chOff x="0" y="0"/>
+          <a:chExt cx="0" cy="0"/>
+        </a:xfrm>
+      </p:grpSpPr>
+      <p:sp>
+        <p:nvSpPr>
+          <p:cNvPr id="2" name="Title 1">
+            <a:extLst>
+              <a:ext uri="{FF2B5EF4-FFF2-40B4-BE49-F238E27FC236}">
+                <a16:creationId xmlns:a16="http://schemas.microsoft.com/office/drawing/2014/main" id="{9631FDE3-7FEA-E3B3-E369-5324C6A12BE2}"/>
+              </a:ext>
+            </a:extLst>
+          </p:cNvPr>
+          <p:cNvSpPr>
+            <a:spLocks noGrp="1"/>
+          </p:cNvSpPr>
+          <p:nvPr>
+            <p:ph type="title"/>
+          </p:nvPr>
+        </p:nvSpPr>
+        <p:spPr/>
+        <p:txBody>
+          <a:bodyPr/>
+          <a:lstStyle/>
+          <a:p>
+            <a:r>
+              <a:rPr lang="en-US" dirty="0"/>
+              <a:t>            </a:t>
+            </a:r>
+            <a:r>
+              <a:rPr lang="en-US" b="1" dirty="0"/>
+              <a:t>Faculty Advisor</a:t>
+            </a:r>
+          </a:p>
+        </p:txBody>
+      </p:sp>
+      <p:sp>
+        <p:nvSpPr>
+          <p:cNvPr id="3" name="Content Placeholder 2">
+            <a:extLst>
+              <a:ext uri="{FF2B5EF4-FFF2-40B4-BE49-F238E27FC236}">
+                <a16:creationId xmlns:a16="http://schemas.microsoft.com/office/drawing/2014/main" id="{A4A2A165-DE8C-ED87-E697-2FAAB6D90FDF}"/>
+              </a:ext>
+            </a:extLst>
+          </p:cNvPr>
+          <p:cNvSpPr>
+            <a:spLocks noGrp="1"/>
+          </p:cNvSpPr>
+          <p:nvPr>
+            <p:ph idx="1"/>
+          </p:nvPr>
+        </p:nvSpPr>
+        <p:spPr/>
+        <p:txBody>
+          <a:bodyPr>
+            <a:normAutofit/>
+          </a:bodyPr>
+          <a:lstStyle/>
+          <a:p>
+            <a:r>
+              <a:rPr lang="en-US" sz="2400" dirty="0"/>
+              <a:t>If you have not identified yet a potential faculty advisor, do it ASAP!</a:t>
+            </a:r>
+          </a:p>
+          <a:p>
+            <a:r>
+              <a:rPr lang="en-US" sz="2400" dirty="0"/>
+              <a:t>For areas of research interest/expertise, consult the ISEN website, follow research tab to Research Fields.</a:t>
+            </a:r>
+          </a:p>
+          <a:p>
+            <a:r>
+              <a:rPr lang="en-US" sz="2400" dirty="0"/>
+              <a:t>Your project does not need to perfectly align with a professor's research field, but they are more likely to accept if it is something that interests them.</a:t>
+            </a:r>
+          </a:p>
+        </p:txBody>
+      </p:sp>
+      <p:pic>
+        <p:nvPicPr>
+          <p:cNvPr id="4" name="Picture 3" descr="A group of people with different colors&#10;&#10;AI-generated content may be incorrect.">
+            <a:extLst>
+              <a:ext uri="{FF2B5EF4-FFF2-40B4-BE49-F238E27FC236}">
+                <a16:creationId xmlns:a16="http://schemas.microsoft.com/office/drawing/2014/main" id="{8A330E22-B0E5-34B4-15C8-B270B703227A}"/>
+              </a:ext>
+            </a:extLst>
+          </p:cNvPr>
+          <p:cNvPicPr>
+            <a:picLocks noChangeAspect="1"/>
+          </p:cNvPicPr>
+          <p:nvPr/>
+        </p:nvPicPr>
+        <p:blipFill>
+          <a:blip r:embed="rId2"/>
+          <a:stretch>
+            <a:fillRect/>
+          </a:stretch>
+        </p:blipFill>
+        <p:spPr>
+          <a:xfrm>
+            <a:off x="2851855" y="4610345"/>
+            <a:ext cx="3440289" cy="2247655"/>
+          </a:xfrm>
+          <a:prstGeom prst="rect">
+            <a:avLst/>
+          </a:prstGeom>
+        </p:spPr>
+      </p:pic>
+      <p:sp>
+        <p:nvSpPr>
+          <p:cNvPr id="9" name="Slide Number Placeholder 8">
+            <a:extLst>
+              <a:ext uri="{FF2B5EF4-FFF2-40B4-BE49-F238E27FC236}">
+                <a16:creationId xmlns:a16="http://schemas.microsoft.com/office/drawing/2014/main" id="{BBCBF981-F9E8-5691-B5CA-D9A791AFCB0E}"/>
+              </a:ext>
+            </a:extLst>
+          </p:cNvPr>
+          <p:cNvSpPr>
+            <a:spLocks noGrp="1"/>
+          </p:cNvSpPr>
+          <p:nvPr>
+            <p:ph type="sldNum" sz="quarter" idx="12"/>
+          </p:nvPr>
+        </p:nvSpPr>
+        <p:spPr/>
+        <p:txBody>
+          <a:bodyPr/>
+          <a:lstStyle/>
+          <a:p>
+            <a:fld id="{727B0ACA-53D9-FB44-A37C-A778C10B232A}" type="slidenum">
+              <a:rPr lang="en-US" smtClean="0"/>
+              <a:t>15</a:t>
             </a:fld>
             <a:endParaRPr lang="en-US"/>
           </a:p>
@@ -4658,7 +4888,7 @@
 </p:sld>
 </file>
 
-<file path=ppt/slides/slide15.xml><?xml version="1.0" encoding="utf-8"?>
+<file path=ppt/slides/slide16.xml><?xml version="1.0" encoding="utf-8"?>
 <p:sld xmlns:a="http://schemas.openxmlformats.org/drawingml/2006/main" xmlns:r="http://schemas.openxmlformats.org/officeDocument/2006/relationships" xmlns:p="http://schemas.openxmlformats.org/presentationml/2006/main">
   <p:cSld>
     <p:bg>
@@ -4709,7 +4939,7 @@
           <a:p>
             <a:fld id="{727B0ACA-53D9-FB44-A37C-A778C10B232A}" type="slidenum">
               <a:rPr lang="en-US" smtClean="0"/>
-              <a:t>15</a:t>
+              <a:t>16</a:t>
             </a:fld>
             <a:endParaRPr lang="en-US"/>
           </a:p>
@@ -4758,7 +4988,7 @@
 </p:sld>
 </file>
 
-<file path=ppt/slides/slide16.xml><?xml version="1.0" encoding="utf-8"?>
+<file path=ppt/slides/slide17.xml><?xml version="1.0" encoding="utf-8"?>
 <p:sld xmlns:a="http://schemas.openxmlformats.org/drawingml/2006/main" xmlns:r="http://schemas.openxmlformats.org/officeDocument/2006/relationships" xmlns:p="http://schemas.openxmlformats.org/presentationml/2006/main">
   <p:cSld>
     <p:bg>
@@ -4920,7 +5150,7 @@
           <a:p>
             <a:fld id="{727B0ACA-53D9-FB44-A37C-A778C10B232A}" type="slidenum">
               <a:rPr lang="en-US" smtClean="0"/>
-              <a:t>16</a:t>
+              <a:t>17</a:t>
             </a:fld>
             <a:endParaRPr lang="en-US"/>
           </a:p>
@@ -4939,7 +5169,7 @@
 </p:sld>
 </file>
 
-<file path=ppt/slides/slide17.xml><?xml version="1.0" encoding="utf-8"?>
+<file path=ppt/slides/slide18.xml><?xml version="1.0" encoding="utf-8"?>
 <p:sld xmlns:a="http://schemas.openxmlformats.org/drawingml/2006/main" xmlns:r="http://schemas.openxmlformats.org/officeDocument/2006/relationships" xmlns:p="http://schemas.openxmlformats.org/presentationml/2006/main">
   <p:cSld>
     <p:bg>
@@ -5280,7 +5510,7 @@
           <a:p>
             <a:fld id="{727B0ACA-53D9-FB44-A37C-A778C10B232A}" type="slidenum">
               <a:rPr lang="en-US" smtClean="0"/>
-              <a:t>17</a:t>
+              <a:t>18</a:t>
             </a:fld>
             <a:endParaRPr lang="en-US"/>
           </a:p>
@@ -5430,224 +5660,6 @@
     <p:extLst>
       <p:ext uri="{BB962C8B-B14F-4D97-AF65-F5344CB8AC3E}">
         <p14:creationId xmlns:p14="http://schemas.microsoft.com/office/powerpoint/2010/main" val="1045953054"/>
-      </p:ext>
-    </p:extLst>
-  </p:cSld>
-  <p:clrMapOvr>
-    <a:masterClrMapping/>
-  </p:clrMapOvr>
-</p:sld>
-</file>
-
-<file path=ppt/slides/slide18.xml><?xml version="1.0" encoding="utf-8"?>
-<p:sld xmlns:a="http://schemas.openxmlformats.org/drawingml/2006/main" xmlns:r="http://schemas.openxmlformats.org/officeDocument/2006/relationships" xmlns:p="http://schemas.openxmlformats.org/presentationml/2006/main">
-  <p:cSld>
-    <p:bg>
-      <p:bgPr>
-        <a:solidFill>
-          <a:schemeClr val="bg1"/>
-        </a:solidFill>
-        <a:effectLst/>
-      </p:bgPr>
-    </p:bg>
-    <p:spTree>
-      <p:nvGrpSpPr>
-        <p:cNvPr id="1" name=""/>
-        <p:cNvGrpSpPr/>
-        <p:nvPr/>
-      </p:nvGrpSpPr>
-      <p:grpSpPr>
-        <a:xfrm>
-          <a:off x="0" y="0"/>
-          <a:ext cx="0" cy="0"/>
-          <a:chOff x="0" y="0"/>
-          <a:chExt cx="0" cy="0"/>
-        </a:xfrm>
-      </p:grpSpPr>
-      <p:sp>
-        <p:nvSpPr>
-          <p:cNvPr id="3" name="Content Placeholder 2">
-            <a:extLst>
-              <a:ext uri="{FF2B5EF4-FFF2-40B4-BE49-F238E27FC236}">
-                <a16:creationId xmlns:a16="http://schemas.microsoft.com/office/drawing/2014/main" id="{AE7B8B6E-329F-38D2-90F0-602E0D884B35}"/>
-              </a:ext>
-            </a:extLst>
-          </p:cNvPr>
-          <p:cNvSpPr>
-            <a:spLocks noGrp="1"/>
-          </p:cNvSpPr>
-          <p:nvPr>
-            <p:ph idx="1"/>
-          </p:nvPr>
-        </p:nvSpPr>
-        <p:spPr>
-          <a:xfrm>
-            <a:off x="628650" y="3060825"/>
-            <a:ext cx="8135340" cy="3116138"/>
-          </a:xfrm>
-        </p:spPr>
-        <p:txBody>
-          <a:bodyPr>
-            <a:noAutofit/>
-          </a:bodyPr>
-          <a:lstStyle/>
-          <a:p>
-            <a:r>
-              <a:rPr lang="en-US" sz="2200" dirty="0"/>
-              <a:t>Critique your own project against </a:t>
-            </a:r>
-            <a:r>
-              <a:rPr lang="en-US" sz="2200" b="1" dirty="0"/>
-              <a:t>learning goals </a:t>
-            </a:r>
-            <a:r>
-              <a:rPr lang="en-US" sz="2200" dirty="0"/>
-              <a:t>rather than </a:t>
-            </a:r>
-            <a:r>
-              <a:rPr lang="en-US" sz="2200" u="sng" dirty="0"/>
-              <a:t>technical checklists only</a:t>
-            </a:r>
-            <a:r>
-              <a:rPr lang="en-US" sz="2200" dirty="0"/>
-              <a:t>!</a:t>
-            </a:r>
-          </a:p>
-          <a:p>
-            <a:r>
-              <a:rPr lang="en-US" sz="2200" dirty="0"/>
-              <a:t>You are not being graded on reproducing a solution but</a:t>
-            </a:r>
-            <a:br>
-              <a:rPr lang="en-US" sz="2200" dirty="0"/>
-            </a:br>
-            <a:r>
-              <a:rPr lang="en-US" sz="2200" dirty="0"/>
-              <a:t>on the </a:t>
-            </a:r>
-            <a:r>
-              <a:rPr lang="en-US" sz="2200" b="1" dirty="0"/>
-              <a:t>quality of your thinking and decisions</a:t>
-            </a:r>
-            <a:r>
-              <a:rPr lang="en-US" sz="2200" dirty="0"/>
-              <a:t>!</a:t>
-            </a:r>
-          </a:p>
-          <a:p>
-            <a:r>
-              <a:rPr lang="en-US" sz="2200" dirty="0"/>
-              <a:t>Peers are not parallel workers, but as part of a </a:t>
-            </a:r>
-            <a:r>
-              <a:rPr lang="en-US" sz="2200" b="1" dirty="0"/>
-              <a:t>shared system</a:t>
-            </a:r>
-            <a:r>
-              <a:rPr lang="en-US" sz="2200" dirty="0"/>
-              <a:t>. Shift the culture from individual performance to collective responsibility and make </a:t>
-            </a:r>
-            <a:r>
-              <a:rPr lang="en-US" sz="2200" b="1" dirty="0"/>
-              <a:t>collaboration</a:t>
-            </a:r>
-            <a:r>
-              <a:rPr lang="en-US" sz="2200" dirty="0"/>
-              <a:t> (not cooperation only)!</a:t>
-            </a:r>
-          </a:p>
-          <a:p>
-            <a:r>
-              <a:rPr lang="en-US" sz="2200" b="1" dirty="0"/>
-              <a:t>Metacognition</a:t>
-            </a:r>
-            <a:r>
-              <a:rPr lang="en-US" sz="2200" dirty="0"/>
-              <a:t> ...</a:t>
-            </a:r>
-            <a:br>
-              <a:rPr lang="en-US" sz="2200" dirty="0"/>
-            </a:br>
-            <a:r>
-              <a:rPr lang="en-US" sz="2200" dirty="0"/>
-              <a:t>why I'm thinking what I'm thinking </a:t>
-            </a:r>
-            <a:r>
-              <a:rPr lang="en-US" sz="2200" dirty="0">
-                <a:sym typeface="Wingdings" pitchFamily="2" charset="2"/>
-              </a:rPr>
-              <a:t> m</a:t>
-            </a:r>
-            <a:r>
-              <a:rPr lang="en-US" sz="2200" dirty="0"/>
-              <a:t>ake the invisible visible!</a:t>
-            </a:r>
-          </a:p>
-        </p:txBody>
-      </p:sp>
-      <p:sp>
-        <p:nvSpPr>
-          <p:cNvPr id="4" name="Slide Number Placeholder 3">
-            <a:extLst>
-              <a:ext uri="{FF2B5EF4-FFF2-40B4-BE49-F238E27FC236}">
-                <a16:creationId xmlns:a16="http://schemas.microsoft.com/office/drawing/2014/main" id="{112F7177-E4F2-112D-C5DE-580CC5F9B646}"/>
-              </a:ext>
-            </a:extLst>
-          </p:cNvPr>
-          <p:cNvSpPr>
-            <a:spLocks noGrp="1"/>
-          </p:cNvSpPr>
-          <p:nvPr>
-            <p:ph type="sldNum" sz="quarter" idx="12"/>
-          </p:nvPr>
-        </p:nvSpPr>
-        <p:spPr/>
-        <p:txBody>
-          <a:bodyPr/>
-          <a:lstStyle/>
-          <a:p>
-            <a:fld id="{727B0ACA-53D9-FB44-A37C-A778C10B232A}" type="slidenum">
-              <a:rPr lang="en-US" smtClean="0"/>
-              <a:t>18</a:t>
-            </a:fld>
-            <a:endParaRPr lang="en-US"/>
-          </a:p>
-        </p:txBody>
-      </p:sp>
-      <p:pic>
-        <p:nvPicPr>
-          <p:cNvPr id="6" name="Picture 5" descr="A person drawing a staircase with words&#10;&#10;AI-generated content may be incorrect.">
-            <a:extLst>
-              <a:ext uri="{FF2B5EF4-FFF2-40B4-BE49-F238E27FC236}">
-                <a16:creationId xmlns:a16="http://schemas.microsoft.com/office/drawing/2014/main" id="{61D8DED4-5A3F-05B2-A499-861BE7FAD28A}"/>
-              </a:ext>
-            </a:extLst>
-          </p:cNvPr>
-          <p:cNvPicPr>
-            <a:picLocks noChangeAspect="1"/>
-          </p:cNvPicPr>
-          <p:nvPr/>
-        </p:nvPicPr>
-        <p:blipFill>
-          <a:blip r:embed="rId2"/>
-          <a:stretch>
-            <a:fillRect/>
-          </a:stretch>
-        </p:blipFill>
-        <p:spPr>
-          <a:xfrm>
-            <a:off x="2548830" y="185738"/>
-            <a:ext cx="4046339" cy="2695699"/>
-          </a:xfrm>
-          <a:prstGeom prst="rect">
-            <a:avLst/>
-          </a:prstGeom>
-        </p:spPr>
-      </p:pic>
-    </p:spTree>
-    <p:extLst>
-      <p:ext uri="{BB962C8B-B14F-4D97-AF65-F5344CB8AC3E}">
-        <p14:creationId xmlns:p14="http://schemas.microsoft.com/office/powerpoint/2010/main" val="3109610451"/>
       </p:ext>
     </p:extLst>
   </p:cSld>
@@ -11120,6 +11132,224 @@
 <file path=ppt/slides/slide5.xml><?xml version="1.0" encoding="utf-8"?>
 <p:sld xmlns:a="http://schemas.openxmlformats.org/drawingml/2006/main" xmlns:r="http://schemas.openxmlformats.org/officeDocument/2006/relationships" xmlns:p="http://schemas.openxmlformats.org/presentationml/2006/main">
   <p:cSld>
+    <p:bg>
+      <p:bgPr>
+        <a:solidFill>
+          <a:schemeClr val="bg1"/>
+        </a:solidFill>
+        <a:effectLst/>
+      </p:bgPr>
+    </p:bg>
+    <p:spTree>
+      <p:nvGrpSpPr>
+        <p:cNvPr id="1" name=""/>
+        <p:cNvGrpSpPr/>
+        <p:nvPr/>
+      </p:nvGrpSpPr>
+      <p:grpSpPr>
+        <a:xfrm>
+          <a:off x="0" y="0"/>
+          <a:ext cx="0" cy="0"/>
+          <a:chOff x="0" y="0"/>
+          <a:chExt cx="0" cy="0"/>
+        </a:xfrm>
+      </p:grpSpPr>
+      <p:sp>
+        <p:nvSpPr>
+          <p:cNvPr id="3" name="Content Placeholder 2">
+            <a:extLst>
+              <a:ext uri="{FF2B5EF4-FFF2-40B4-BE49-F238E27FC236}">
+                <a16:creationId xmlns:a16="http://schemas.microsoft.com/office/drawing/2014/main" id="{AE7B8B6E-329F-38D2-90F0-602E0D884B35}"/>
+              </a:ext>
+            </a:extLst>
+          </p:cNvPr>
+          <p:cNvSpPr>
+            <a:spLocks noGrp="1"/>
+          </p:cNvSpPr>
+          <p:nvPr>
+            <p:ph idx="1"/>
+          </p:nvPr>
+        </p:nvSpPr>
+        <p:spPr>
+          <a:xfrm>
+            <a:off x="628650" y="3060825"/>
+            <a:ext cx="8135340" cy="3116138"/>
+          </a:xfrm>
+        </p:spPr>
+        <p:txBody>
+          <a:bodyPr>
+            <a:noAutofit/>
+          </a:bodyPr>
+          <a:lstStyle/>
+          <a:p>
+            <a:r>
+              <a:rPr lang="en-US" sz="2200" dirty="0"/>
+              <a:t>Critique your own project against </a:t>
+            </a:r>
+            <a:r>
+              <a:rPr lang="en-US" sz="2200" b="1" dirty="0"/>
+              <a:t>learning goals </a:t>
+            </a:r>
+            <a:r>
+              <a:rPr lang="en-US" sz="2200" dirty="0"/>
+              <a:t>rather than </a:t>
+            </a:r>
+            <a:r>
+              <a:rPr lang="en-US" sz="2200" u="sng" dirty="0"/>
+              <a:t>technical checklists only</a:t>
+            </a:r>
+            <a:r>
+              <a:rPr lang="en-US" sz="2200" dirty="0"/>
+              <a:t>!</a:t>
+            </a:r>
+          </a:p>
+          <a:p>
+            <a:r>
+              <a:rPr lang="en-US" sz="2200" dirty="0"/>
+              <a:t>You are not being graded on reproducing a solution but</a:t>
+            </a:r>
+            <a:br>
+              <a:rPr lang="en-US" sz="2200" dirty="0"/>
+            </a:br>
+            <a:r>
+              <a:rPr lang="en-US" sz="2200" dirty="0"/>
+              <a:t>on the </a:t>
+            </a:r>
+            <a:r>
+              <a:rPr lang="en-US" sz="2200" b="1" dirty="0"/>
+              <a:t>quality of your thinking and decisions</a:t>
+            </a:r>
+            <a:r>
+              <a:rPr lang="en-US" sz="2200" dirty="0"/>
+              <a:t>!</a:t>
+            </a:r>
+          </a:p>
+          <a:p>
+            <a:r>
+              <a:rPr lang="en-US" sz="2200" dirty="0"/>
+              <a:t>Peers are not parallel workers, but as part of a </a:t>
+            </a:r>
+            <a:r>
+              <a:rPr lang="en-US" sz="2200" b="1" dirty="0"/>
+              <a:t>shared system</a:t>
+            </a:r>
+            <a:r>
+              <a:rPr lang="en-US" sz="2200" dirty="0"/>
+              <a:t>. Shift the culture from individual performance to collective responsibility and make </a:t>
+            </a:r>
+            <a:r>
+              <a:rPr lang="en-US" sz="2200" b="1" dirty="0"/>
+              <a:t>collaboration</a:t>
+            </a:r>
+            <a:r>
+              <a:rPr lang="en-US" sz="2200" dirty="0"/>
+              <a:t> (not cooperation only)!</a:t>
+            </a:r>
+          </a:p>
+          <a:p>
+            <a:r>
+              <a:rPr lang="en-US" sz="2200" b="1" dirty="0"/>
+              <a:t>Metacognition</a:t>
+            </a:r>
+            <a:r>
+              <a:rPr lang="en-US" sz="2200" dirty="0"/>
+              <a:t> ...</a:t>
+            </a:r>
+            <a:br>
+              <a:rPr lang="en-US" sz="2200" dirty="0"/>
+            </a:br>
+            <a:r>
+              <a:rPr lang="en-US" sz="2200" dirty="0"/>
+              <a:t>why I'm thinking what I'm thinking </a:t>
+            </a:r>
+            <a:r>
+              <a:rPr lang="en-US" sz="2200" dirty="0">
+                <a:sym typeface="Wingdings" pitchFamily="2" charset="2"/>
+              </a:rPr>
+              <a:t> m</a:t>
+            </a:r>
+            <a:r>
+              <a:rPr lang="en-US" sz="2200" dirty="0"/>
+              <a:t>ake the invisible visible!</a:t>
+            </a:r>
+          </a:p>
+        </p:txBody>
+      </p:sp>
+      <p:sp>
+        <p:nvSpPr>
+          <p:cNvPr id="4" name="Slide Number Placeholder 3">
+            <a:extLst>
+              <a:ext uri="{FF2B5EF4-FFF2-40B4-BE49-F238E27FC236}">
+                <a16:creationId xmlns:a16="http://schemas.microsoft.com/office/drawing/2014/main" id="{112F7177-E4F2-112D-C5DE-580CC5F9B646}"/>
+              </a:ext>
+            </a:extLst>
+          </p:cNvPr>
+          <p:cNvSpPr>
+            <a:spLocks noGrp="1"/>
+          </p:cNvSpPr>
+          <p:nvPr>
+            <p:ph type="sldNum" sz="quarter" idx="12"/>
+          </p:nvPr>
+        </p:nvSpPr>
+        <p:spPr/>
+        <p:txBody>
+          <a:bodyPr/>
+          <a:lstStyle/>
+          <a:p>
+            <a:fld id="{727B0ACA-53D9-FB44-A37C-A778C10B232A}" type="slidenum">
+              <a:rPr lang="en-US" smtClean="0"/>
+              <a:t>5</a:t>
+            </a:fld>
+            <a:endParaRPr lang="en-US"/>
+          </a:p>
+        </p:txBody>
+      </p:sp>
+      <p:pic>
+        <p:nvPicPr>
+          <p:cNvPr id="6" name="Picture 5" descr="A person drawing a staircase with words&#10;&#10;AI-generated content may be incorrect.">
+            <a:extLst>
+              <a:ext uri="{FF2B5EF4-FFF2-40B4-BE49-F238E27FC236}">
+                <a16:creationId xmlns:a16="http://schemas.microsoft.com/office/drawing/2014/main" id="{61D8DED4-5A3F-05B2-A499-861BE7FAD28A}"/>
+              </a:ext>
+            </a:extLst>
+          </p:cNvPr>
+          <p:cNvPicPr>
+            <a:picLocks noChangeAspect="1"/>
+          </p:cNvPicPr>
+          <p:nvPr/>
+        </p:nvPicPr>
+        <p:blipFill>
+          <a:blip r:embed="rId2"/>
+          <a:stretch>
+            <a:fillRect/>
+          </a:stretch>
+        </p:blipFill>
+        <p:spPr>
+          <a:xfrm>
+            <a:off x="2548830" y="185738"/>
+            <a:ext cx="4046339" cy="2695699"/>
+          </a:xfrm>
+          <a:prstGeom prst="rect">
+            <a:avLst/>
+          </a:prstGeom>
+        </p:spPr>
+      </p:pic>
+    </p:spTree>
+    <p:extLst>
+      <p:ext uri="{BB962C8B-B14F-4D97-AF65-F5344CB8AC3E}">
+        <p14:creationId xmlns:p14="http://schemas.microsoft.com/office/powerpoint/2010/main" val="3109610451"/>
+      </p:ext>
+    </p:extLst>
+  </p:cSld>
+  <p:clrMapOvr>
+    <a:masterClrMapping/>
+  </p:clrMapOvr>
+</p:sld>
+</file>
+
+<file path=ppt/slides/slide6.xml><?xml version="1.0" encoding="utf-8"?>
+<p:sld xmlns:a="http://schemas.openxmlformats.org/drawingml/2006/main" xmlns:r="http://schemas.openxmlformats.org/officeDocument/2006/relationships" xmlns:p="http://schemas.openxmlformats.org/presentationml/2006/main">
+  <p:cSld>
     <p:spTree>
       <p:nvGrpSpPr>
         <p:cNvPr id="1" name=""/>
@@ -11305,7 +11535,7 @@
           <a:p>
             <a:fld id="{727B0ACA-53D9-FB44-A37C-A778C10B232A}" type="slidenum">
               <a:rPr lang="en-US" smtClean="0"/>
-              <a:t>5</a:t>
+              <a:t>6</a:t>
             </a:fld>
             <a:endParaRPr lang="en-US"/>
           </a:p>
@@ -11315,250 +11545,6 @@
     <p:extLst>
       <p:ext uri="{BB962C8B-B14F-4D97-AF65-F5344CB8AC3E}">
         <p14:creationId xmlns:p14="http://schemas.microsoft.com/office/powerpoint/2010/main" val="699900080"/>
-      </p:ext>
-    </p:extLst>
-  </p:cSld>
-  <p:clrMapOvr>
-    <a:masterClrMapping/>
-  </p:clrMapOvr>
-</p:sld>
-</file>
-
-<file path=ppt/slides/slide6.xml><?xml version="1.0" encoding="utf-8"?>
-<p:sld xmlns:a="http://schemas.openxmlformats.org/drawingml/2006/main" xmlns:r="http://schemas.openxmlformats.org/officeDocument/2006/relationships" xmlns:p="http://schemas.openxmlformats.org/presentationml/2006/main">
-  <p:cSld>
-    <p:bg>
-      <p:bgPr>
-        <a:solidFill>
-          <a:schemeClr val="tx2">
-            <a:lumMod val="10000"/>
-            <a:lumOff val="90000"/>
-          </a:schemeClr>
-        </a:solidFill>
-        <a:effectLst/>
-      </p:bgPr>
-    </p:bg>
-    <p:spTree>
-      <p:nvGrpSpPr>
-        <p:cNvPr id="1" name=""/>
-        <p:cNvGrpSpPr/>
-        <p:nvPr/>
-      </p:nvGrpSpPr>
-      <p:grpSpPr>
-        <a:xfrm>
-          <a:off x="0" y="0"/>
-          <a:ext cx="0" cy="0"/>
-          <a:chOff x="0" y="0"/>
-          <a:chExt cx="0" cy="0"/>
-        </a:xfrm>
-      </p:grpSpPr>
-      <p:pic>
-        <p:nvPicPr>
-          <p:cNvPr id="5" name="Picture 4" descr="A group of colorful speech bubbles&#10;&#10;AI-generated content may be incorrect.">
-            <a:extLst>
-              <a:ext uri="{FF2B5EF4-FFF2-40B4-BE49-F238E27FC236}">
-                <a16:creationId xmlns:a16="http://schemas.microsoft.com/office/drawing/2014/main" id="{144E2B02-3D58-3164-2571-718023407D9D}"/>
-              </a:ext>
-            </a:extLst>
-          </p:cNvPr>
-          <p:cNvPicPr>
-            <a:picLocks noChangeAspect="1"/>
-          </p:cNvPicPr>
-          <p:nvPr/>
-        </p:nvPicPr>
-        <p:blipFill>
-          <a:blip r:embed="rId2"/>
-          <a:stretch>
-            <a:fillRect/>
-          </a:stretch>
-        </p:blipFill>
-        <p:spPr>
-          <a:xfrm>
-            <a:off x="2034948" y="4001294"/>
-            <a:ext cx="5074104" cy="3382736"/>
-          </a:xfrm>
-          <a:prstGeom prst="rect">
-            <a:avLst/>
-          </a:prstGeom>
-        </p:spPr>
-      </p:pic>
-      <p:sp>
-        <p:nvSpPr>
-          <p:cNvPr id="2" name="Title 1">
-            <a:extLst>
-              <a:ext uri="{FF2B5EF4-FFF2-40B4-BE49-F238E27FC236}">
-                <a16:creationId xmlns:a16="http://schemas.microsoft.com/office/drawing/2014/main" id="{83F0ECEC-9F3B-D9F8-92C7-B1CDBFFB750B}"/>
-              </a:ext>
-            </a:extLst>
-          </p:cNvPr>
-          <p:cNvSpPr>
-            <a:spLocks noGrp="1"/>
-          </p:cNvSpPr>
-          <p:nvPr>
-            <p:ph type="title"/>
-          </p:nvPr>
-        </p:nvSpPr>
-        <p:spPr/>
-        <p:txBody>
-          <a:bodyPr/>
-          <a:lstStyle/>
-          <a:p>
-            <a:r>
-              <a:rPr lang="en-US" dirty="0"/>
-              <a:t>Sponsor Meeting</a:t>
-            </a:r>
-          </a:p>
-        </p:txBody>
-      </p:sp>
-      <p:sp>
-        <p:nvSpPr>
-          <p:cNvPr id="3" name="Content Placeholder 2">
-            <a:extLst>
-              <a:ext uri="{FF2B5EF4-FFF2-40B4-BE49-F238E27FC236}">
-                <a16:creationId xmlns:a16="http://schemas.microsoft.com/office/drawing/2014/main" id="{3B4094BB-DB6E-B45D-50B7-D79BC31B79AB}"/>
-              </a:ext>
-            </a:extLst>
-          </p:cNvPr>
-          <p:cNvSpPr>
-            <a:spLocks noGrp="1"/>
-          </p:cNvSpPr>
-          <p:nvPr>
-            <p:ph idx="1"/>
-          </p:nvPr>
-        </p:nvSpPr>
-        <p:spPr>
-          <a:xfrm>
-            <a:off x="628650" y="1825625"/>
-            <a:ext cx="8123464" cy="4351338"/>
-          </a:xfrm>
-        </p:spPr>
-        <p:txBody>
-          <a:bodyPr>
-            <a:normAutofit/>
-          </a:bodyPr>
-          <a:lstStyle/>
-          <a:p>
-            <a:pPr marL="0" indent="0">
-              <a:buNone/>
-            </a:pPr>
-            <a:r>
-              <a:rPr lang="en-US" sz="2400" dirty="0"/>
-              <a:t>How about </a:t>
-            </a:r>
-            <a:r>
-              <a:rPr lang="en-US" sz="2400" b="1" dirty="0"/>
-              <a:t>feedback</a:t>
-            </a:r>
-            <a:r>
-              <a:rPr lang="en-US" sz="2400" dirty="0"/>
-              <a:t> from last semester?</a:t>
-            </a:r>
-          </a:p>
-          <a:p>
-            <a:r>
-              <a:rPr lang="en-US" sz="2000" i="1" dirty="0">
-                <a:solidFill>
-                  <a:srgbClr val="002060"/>
-                </a:solidFill>
-              </a:rPr>
-              <a:t>What went well?</a:t>
-            </a:r>
-          </a:p>
-          <a:p>
-            <a:r>
-              <a:rPr lang="en-US" sz="2000" i="1" dirty="0">
-                <a:solidFill>
-                  <a:srgbClr val="002060"/>
-                </a:solidFill>
-              </a:rPr>
-              <a:t>What do you wish you'd done prior to the meeting that you did not?</a:t>
-            </a:r>
-          </a:p>
-          <a:p>
-            <a:r>
-              <a:rPr lang="en-US" sz="2000" i="1" dirty="0">
-                <a:solidFill>
-                  <a:srgbClr val="002060"/>
-                </a:solidFill>
-              </a:rPr>
-              <a:t>Did all the team get to introduce themselves?</a:t>
-            </a:r>
-          </a:p>
-          <a:p>
-            <a:r>
-              <a:rPr lang="en-US" sz="2000" i="1" dirty="0">
-                <a:solidFill>
-                  <a:srgbClr val="002060"/>
-                </a:solidFill>
-              </a:rPr>
-              <a:t>Were your expectations met for the next meeting?</a:t>
-            </a:r>
-          </a:p>
-          <a:p>
-            <a:r>
-              <a:rPr lang="en-US" sz="2000" i="1" dirty="0">
-                <a:solidFill>
-                  <a:srgbClr val="002060"/>
-                </a:solidFill>
-              </a:rPr>
-              <a:t>Did you identify some needed information and establish a target date?</a:t>
-            </a:r>
-          </a:p>
-          <a:p>
-            <a:r>
-              <a:rPr lang="en-US" sz="2000" i="1" dirty="0">
-                <a:solidFill>
-                  <a:srgbClr val="002060"/>
-                </a:solidFill>
-              </a:rPr>
-              <a:t>Did you set a follow-up meeting or recurring meeting?</a:t>
-            </a:r>
-          </a:p>
-          <a:p>
-            <a:r>
-              <a:rPr lang="en-US" sz="2000" i="1" dirty="0">
-                <a:solidFill>
-                  <a:srgbClr val="002060"/>
-                </a:solidFill>
-              </a:rPr>
-              <a:t>What can be improved?</a:t>
-            </a:r>
-          </a:p>
-        </p:txBody>
-      </p:sp>
-      <p:sp>
-        <p:nvSpPr>
-          <p:cNvPr id="6" name="Slide Number Placeholder 5">
-            <a:extLst>
-              <a:ext uri="{FF2B5EF4-FFF2-40B4-BE49-F238E27FC236}">
-                <a16:creationId xmlns:a16="http://schemas.microsoft.com/office/drawing/2014/main" id="{BFD24BE3-84B7-6CA0-7E90-5E7D306D4A23}"/>
-              </a:ext>
-            </a:extLst>
-          </p:cNvPr>
-          <p:cNvSpPr>
-            <a:spLocks noGrp="1"/>
-          </p:cNvSpPr>
-          <p:nvPr>
-            <p:ph type="sldNum" sz="quarter" idx="12"/>
-          </p:nvPr>
-        </p:nvSpPr>
-        <p:spPr/>
-        <p:txBody>
-          <a:bodyPr/>
-          <a:lstStyle/>
-          <a:p>
-            <a:fld id="{727B0ACA-53D9-FB44-A37C-A778C10B232A}" type="slidenum">
-              <a:rPr lang="en-US" smtClean="0"/>
-              <a:t>6</a:t>
-            </a:fld>
-            <a:endParaRPr lang="en-US"/>
-          </a:p>
-        </p:txBody>
-      </p:sp>
-    </p:spTree>
-    <p:extLst>
-      <p:ext uri="{BB962C8B-B14F-4D97-AF65-F5344CB8AC3E}">
-        <p14:creationId xmlns:p14="http://schemas.microsoft.com/office/powerpoint/2010/main" val="2266907205"/>
       </p:ext>
     </p:extLst>
   </p:cSld>
@@ -11596,157 +11582,12 @@
           <a:chExt cx="0" cy="0"/>
         </a:xfrm>
       </p:grpSpPr>
-      <p:sp>
-        <p:nvSpPr>
-          <p:cNvPr id="2" name="Title 1">
-            <a:extLst>
-              <a:ext uri="{FF2B5EF4-FFF2-40B4-BE49-F238E27FC236}">
-                <a16:creationId xmlns:a16="http://schemas.microsoft.com/office/drawing/2014/main" id="{43F623D8-D9A8-32EA-EFE7-7963938FD4DD}"/>
-              </a:ext>
-            </a:extLst>
-          </p:cNvPr>
-          <p:cNvSpPr>
-            <a:spLocks noGrp="1"/>
-          </p:cNvSpPr>
-          <p:nvPr>
-            <p:ph type="title"/>
-          </p:nvPr>
-        </p:nvSpPr>
-        <p:spPr/>
-        <p:txBody>
-          <a:bodyPr/>
-          <a:lstStyle/>
-          <a:p>
-            <a:r>
-              <a:rPr lang="en-US" dirty="0"/>
-              <a:t>Sponsor Meeting Tips</a:t>
-            </a:r>
-          </a:p>
-        </p:txBody>
-      </p:sp>
-      <p:sp>
-        <p:nvSpPr>
-          <p:cNvPr id="3" name="Content Placeholder 2">
-            <a:extLst>
-              <a:ext uri="{FF2B5EF4-FFF2-40B4-BE49-F238E27FC236}">
-                <a16:creationId xmlns:a16="http://schemas.microsoft.com/office/drawing/2014/main" id="{EAEA50A8-F7B0-50A8-618A-78B7637A8335}"/>
-              </a:ext>
-            </a:extLst>
-          </p:cNvPr>
-          <p:cNvSpPr>
-            <a:spLocks noGrp="1"/>
-          </p:cNvSpPr>
-          <p:nvPr>
-            <p:ph idx="1"/>
-          </p:nvPr>
-        </p:nvSpPr>
-        <p:spPr/>
-        <p:txBody>
-          <a:bodyPr>
-            <a:normAutofit lnSpcReduction="10000"/>
-          </a:bodyPr>
-          <a:lstStyle/>
-          <a:p>
-            <a:pPr marL="2460625" indent="-168275">
-              <a:buNone/>
-            </a:pPr>
-            <a:r>
-              <a:rPr lang="en-US" sz="2400" b="1" dirty="0"/>
-              <a:t>Be prepared</a:t>
-            </a:r>
-          </a:p>
-          <a:p>
-            <a:pPr marL="2460625" indent="-168275"/>
-            <a:r>
-              <a:rPr lang="en-US" sz="2000" dirty="0"/>
-              <a:t>Agenda prepared and sent ahead of time</a:t>
-            </a:r>
-          </a:p>
-          <a:p>
-            <a:pPr marL="2460625" indent="-168275"/>
-            <a:r>
-              <a:rPr lang="en-US" sz="2000" dirty="0"/>
-              <a:t>Team knows who will speak and on what topic</a:t>
-            </a:r>
-          </a:p>
-          <a:p>
-            <a:pPr marL="2460625" indent="-168275"/>
-            <a:r>
-              <a:rPr lang="en-US" sz="2000" dirty="0"/>
-              <a:t>Questions prepared</a:t>
-            </a:r>
-          </a:p>
-          <a:p>
-            <a:pPr marL="2460625" indent="-168275"/>
-            <a:r>
-              <a:rPr lang="en-US" sz="2000" dirty="0"/>
-              <a:t>Team member(s) assigned to take notes</a:t>
-            </a:r>
-            <a:br>
-              <a:rPr lang="en-US" sz="2000" dirty="0"/>
-            </a:br>
-            <a:r>
-              <a:rPr lang="en-US" sz="2000" dirty="0"/>
-              <a:t>(record audio/video </a:t>
-            </a:r>
-            <a:r>
-              <a:rPr lang="en-US" sz="2000" u="sng" dirty="0"/>
-              <a:t>only</a:t>
-            </a:r>
-            <a:r>
-              <a:rPr lang="en-US" sz="2000" dirty="0"/>
-              <a:t> if sponsor agrees)</a:t>
-            </a:r>
-          </a:p>
-          <a:p>
-            <a:pPr marL="0" indent="0">
-              <a:buNone/>
-            </a:pPr>
-            <a:endParaRPr lang="en-US" sz="2000" dirty="0"/>
-          </a:p>
-          <a:p>
-            <a:pPr marL="0" indent="0">
-              <a:buNone/>
-            </a:pPr>
-            <a:r>
-              <a:rPr lang="en-US" sz="2400" b="1" dirty="0"/>
-              <a:t>Listen more than you speak</a:t>
-            </a:r>
-          </a:p>
-          <a:p>
-            <a:r>
-              <a:rPr lang="en-US" sz="2000" dirty="0"/>
-              <a:t>Wait for sponsor to answer questions,</a:t>
-            </a:r>
-            <a:br>
-              <a:rPr lang="en-US" sz="2000" dirty="0"/>
-            </a:br>
-            <a:r>
-              <a:rPr lang="en-US" sz="2000" dirty="0"/>
-              <a:t>don’t interrupt with additional questions</a:t>
-            </a:r>
-          </a:p>
-          <a:p>
-            <a:r>
-              <a:rPr lang="en-US" sz="2000" dirty="0"/>
-              <a:t>Don’t try to provide immediate solutions,</a:t>
-            </a:r>
-            <a:br>
-              <a:rPr lang="en-US" sz="2000" dirty="0"/>
-            </a:br>
-            <a:r>
-              <a:rPr lang="en-US" sz="2000" dirty="0"/>
-              <a:t> this is still a semester long project</a:t>
-            </a:r>
-          </a:p>
-        </p:txBody>
-      </p:sp>
       <p:pic>
         <p:nvPicPr>
-          <p:cNvPr id="5" name="Picture 4" descr="A red sign with white text&#10;&#10;AI-generated content may be incorrect.">
-            <a:extLst>
-              <a:ext uri="{FF2B5EF4-FFF2-40B4-BE49-F238E27FC236}">
-                <a16:creationId xmlns:a16="http://schemas.microsoft.com/office/drawing/2014/main" id="{FAC8DA26-FB8D-17F9-A0EC-0C48D5D3BFCA}"/>
+          <p:cNvPr id="5" name="Picture 4" descr="A group of colorful speech bubbles&#10;&#10;AI-generated content may be incorrect.">
+            <a:extLst>
+              <a:ext uri="{FF2B5EF4-FFF2-40B4-BE49-F238E27FC236}">
+                <a16:creationId xmlns:a16="http://schemas.microsoft.com/office/drawing/2014/main" id="{144E2B02-3D58-3164-2571-718023407D9D}"/>
               </a:ext>
             </a:extLst>
           </p:cNvPr>
@@ -11763,8 +11604,8 @@
         </p:blipFill>
         <p:spPr>
           <a:xfrm>
-            <a:off x="718961" y="1825625"/>
-            <a:ext cx="2024239" cy="2361612"/>
+            <a:off x="2034948" y="4001294"/>
+            <a:ext cx="5074104" cy="3382736"/>
           </a:xfrm>
           <a:prstGeom prst="rect">
             <a:avLst/>
@@ -11773,10 +11614,154 @@
       </p:pic>
       <p:sp>
         <p:nvSpPr>
+          <p:cNvPr id="2" name="Title 1">
+            <a:extLst>
+              <a:ext uri="{FF2B5EF4-FFF2-40B4-BE49-F238E27FC236}">
+                <a16:creationId xmlns:a16="http://schemas.microsoft.com/office/drawing/2014/main" id="{83F0ECEC-9F3B-D9F8-92C7-B1CDBFFB750B}"/>
+              </a:ext>
+            </a:extLst>
+          </p:cNvPr>
+          <p:cNvSpPr>
+            <a:spLocks noGrp="1"/>
+          </p:cNvSpPr>
+          <p:nvPr>
+            <p:ph type="title"/>
+          </p:nvPr>
+        </p:nvSpPr>
+        <p:spPr/>
+        <p:txBody>
+          <a:bodyPr/>
+          <a:lstStyle/>
+          <a:p>
+            <a:r>
+              <a:rPr lang="en-US" dirty="0"/>
+              <a:t>Sponsor Meeting</a:t>
+            </a:r>
+          </a:p>
+        </p:txBody>
+      </p:sp>
+      <p:sp>
+        <p:nvSpPr>
+          <p:cNvPr id="3" name="Content Placeholder 2">
+            <a:extLst>
+              <a:ext uri="{FF2B5EF4-FFF2-40B4-BE49-F238E27FC236}">
+                <a16:creationId xmlns:a16="http://schemas.microsoft.com/office/drawing/2014/main" id="{3B4094BB-DB6E-B45D-50B7-D79BC31B79AB}"/>
+              </a:ext>
+            </a:extLst>
+          </p:cNvPr>
+          <p:cNvSpPr>
+            <a:spLocks noGrp="1"/>
+          </p:cNvSpPr>
+          <p:nvPr>
+            <p:ph idx="1"/>
+          </p:nvPr>
+        </p:nvSpPr>
+        <p:spPr>
+          <a:xfrm>
+            <a:off x="628650" y="1825625"/>
+            <a:ext cx="8123464" cy="4351338"/>
+          </a:xfrm>
+        </p:spPr>
+        <p:txBody>
+          <a:bodyPr>
+            <a:normAutofit/>
+          </a:bodyPr>
+          <a:lstStyle/>
+          <a:p>
+            <a:pPr marL="0" indent="0">
+              <a:buNone/>
+            </a:pPr>
+            <a:r>
+              <a:rPr lang="en-US" sz="2400" dirty="0"/>
+              <a:t>How about </a:t>
+            </a:r>
+            <a:r>
+              <a:rPr lang="en-US" sz="2400" b="1" dirty="0"/>
+              <a:t>feedback</a:t>
+            </a:r>
+            <a:r>
+              <a:rPr lang="en-US" sz="2400" dirty="0"/>
+              <a:t> from last semester?</a:t>
+            </a:r>
+          </a:p>
+          <a:p>
+            <a:r>
+              <a:rPr lang="en-US" sz="2000" i="1" dirty="0">
+                <a:solidFill>
+                  <a:srgbClr val="002060"/>
+                </a:solidFill>
+              </a:rPr>
+              <a:t>What went well?</a:t>
+            </a:r>
+          </a:p>
+          <a:p>
+            <a:r>
+              <a:rPr lang="en-US" sz="2000" i="1" dirty="0">
+                <a:solidFill>
+                  <a:srgbClr val="002060"/>
+                </a:solidFill>
+              </a:rPr>
+              <a:t>What do you wish you'd done prior to the meeting that you did not?</a:t>
+            </a:r>
+          </a:p>
+          <a:p>
+            <a:r>
+              <a:rPr lang="en-US" sz="2000" i="1" dirty="0">
+                <a:solidFill>
+                  <a:srgbClr val="002060"/>
+                </a:solidFill>
+              </a:rPr>
+              <a:t>Did all the team get to introduce themselves?</a:t>
+            </a:r>
+          </a:p>
+          <a:p>
+            <a:r>
+              <a:rPr lang="en-US" sz="2000" i="1" dirty="0">
+                <a:solidFill>
+                  <a:srgbClr val="002060"/>
+                </a:solidFill>
+              </a:rPr>
+              <a:t>Were your expectations met for the next meeting?</a:t>
+            </a:r>
+          </a:p>
+          <a:p>
+            <a:r>
+              <a:rPr lang="en-US" sz="2000" i="1" dirty="0">
+                <a:solidFill>
+                  <a:srgbClr val="002060"/>
+                </a:solidFill>
+              </a:rPr>
+              <a:t>Did you identify some needed information and establish a target date?</a:t>
+            </a:r>
+          </a:p>
+          <a:p>
+            <a:r>
+              <a:rPr lang="en-US" sz="2000" i="1" dirty="0">
+                <a:solidFill>
+                  <a:srgbClr val="002060"/>
+                </a:solidFill>
+              </a:rPr>
+              <a:t>Did you set a follow-up meeting or recurring meeting?</a:t>
+            </a:r>
+          </a:p>
+          <a:p>
+            <a:r>
+              <a:rPr lang="en-US" sz="2000" i="1" dirty="0">
+                <a:solidFill>
+                  <a:srgbClr val="002060"/>
+                </a:solidFill>
+              </a:rPr>
+              <a:t>What can be improved?</a:t>
+            </a:r>
+          </a:p>
+        </p:txBody>
+      </p:sp>
+      <p:sp>
+        <p:nvSpPr>
           <p:cNvPr id="6" name="Slide Number Placeholder 5">
             <a:extLst>
               <a:ext uri="{FF2B5EF4-FFF2-40B4-BE49-F238E27FC236}">
-                <a16:creationId xmlns:a16="http://schemas.microsoft.com/office/drawing/2014/main" id="{993BC1E8-06A0-4839-F4EF-F487B818D6A6}"/>
+                <a16:creationId xmlns:a16="http://schemas.microsoft.com/office/drawing/2014/main" id="{BFD24BE3-84B7-6CA0-7E90-5E7D306D4A23}"/>
               </a:ext>
             </a:extLst>
           </p:cNvPr>
@@ -11803,7 +11788,7 @@
     </p:spTree>
     <p:extLst>
       <p:ext uri="{BB962C8B-B14F-4D97-AF65-F5344CB8AC3E}">
-        <p14:creationId xmlns:p14="http://schemas.microsoft.com/office/powerpoint/2010/main" val="748122361"/>
+        <p14:creationId xmlns:p14="http://schemas.microsoft.com/office/powerpoint/2010/main" val="2266907205"/>
       </p:ext>
     </p:extLst>
   </p:cSld>
@@ -11846,6 +11831,251 @@
           <p:cNvPr id="2" name="Title 1">
             <a:extLst>
               <a:ext uri="{FF2B5EF4-FFF2-40B4-BE49-F238E27FC236}">
+                <a16:creationId xmlns:a16="http://schemas.microsoft.com/office/drawing/2014/main" id="{43F623D8-D9A8-32EA-EFE7-7963938FD4DD}"/>
+              </a:ext>
+            </a:extLst>
+          </p:cNvPr>
+          <p:cNvSpPr>
+            <a:spLocks noGrp="1"/>
+          </p:cNvSpPr>
+          <p:nvPr>
+            <p:ph type="title"/>
+          </p:nvPr>
+        </p:nvSpPr>
+        <p:spPr/>
+        <p:txBody>
+          <a:bodyPr/>
+          <a:lstStyle/>
+          <a:p>
+            <a:r>
+              <a:rPr lang="en-US" dirty="0"/>
+              <a:t>Sponsor Meeting Tips</a:t>
+            </a:r>
+          </a:p>
+        </p:txBody>
+      </p:sp>
+      <p:sp>
+        <p:nvSpPr>
+          <p:cNvPr id="3" name="Content Placeholder 2">
+            <a:extLst>
+              <a:ext uri="{FF2B5EF4-FFF2-40B4-BE49-F238E27FC236}">
+                <a16:creationId xmlns:a16="http://schemas.microsoft.com/office/drawing/2014/main" id="{EAEA50A8-F7B0-50A8-618A-78B7637A8335}"/>
+              </a:ext>
+            </a:extLst>
+          </p:cNvPr>
+          <p:cNvSpPr>
+            <a:spLocks noGrp="1"/>
+          </p:cNvSpPr>
+          <p:nvPr>
+            <p:ph idx="1"/>
+          </p:nvPr>
+        </p:nvSpPr>
+        <p:spPr/>
+        <p:txBody>
+          <a:bodyPr>
+            <a:normAutofit lnSpcReduction="10000"/>
+          </a:bodyPr>
+          <a:lstStyle/>
+          <a:p>
+            <a:pPr marL="2460625" indent="-168275">
+              <a:buNone/>
+            </a:pPr>
+            <a:r>
+              <a:rPr lang="en-US" sz="2400" b="1" dirty="0"/>
+              <a:t>Be prepared</a:t>
+            </a:r>
+          </a:p>
+          <a:p>
+            <a:pPr marL="2460625" indent="-168275"/>
+            <a:r>
+              <a:rPr lang="en-US" sz="2000" dirty="0"/>
+              <a:t>Agenda prepared and sent ahead of time</a:t>
+            </a:r>
+          </a:p>
+          <a:p>
+            <a:pPr marL="2460625" indent="-168275"/>
+            <a:r>
+              <a:rPr lang="en-US" sz="2000" dirty="0"/>
+              <a:t>Team knows who will speak and on what topic</a:t>
+            </a:r>
+          </a:p>
+          <a:p>
+            <a:pPr marL="2460625" indent="-168275"/>
+            <a:r>
+              <a:rPr lang="en-US" sz="2000" dirty="0"/>
+              <a:t>Questions prepared</a:t>
+            </a:r>
+          </a:p>
+          <a:p>
+            <a:pPr marL="2460625" indent="-168275"/>
+            <a:r>
+              <a:rPr lang="en-US" sz="2000" dirty="0"/>
+              <a:t>Team member(s) assigned to take notes</a:t>
+            </a:r>
+            <a:br>
+              <a:rPr lang="en-US" sz="2000" dirty="0"/>
+            </a:br>
+            <a:r>
+              <a:rPr lang="en-US" sz="2000" dirty="0"/>
+              <a:t>(record audio/video </a:t>
+            </a:r>
+            <a:r>
+              <a:rPr lang="en-US" sz="2000" u="sng" dirty="0"/>
+              <a:t>only</a:t>
+            </a:r>
+            <a:r>
+              <a:rPr lang="en-US" sz="2000" dirty="0"/>
+              <a:t> if sponsor agrees)</a:t>
+            </a:r>
+          </a:p>
+          <a:p>
+            <a:pPr marL="0" indent="0">
+              <a:buNone/>
+            </a:pPr>
+            <a:endParaRPr lang="en-US" sz="2000" dirty="0"/>
+          </a:p>
+          <a:p>
+            <a:pPr marL="0" indent="0">
+              <a:buNone/>
+            </a:pPr>
+            <a:r>
+              <a:rPr lang="en-US" sz="2400" b="1" dirty="0"/>
+              <a:t>Listen more than you speak</a:t>
+            </a:r>
+          </a:p>
+          <a:p>
+            <a:r>
+              <a:rPr lang="en-US" sz="2000" dirty="0"/>
+              <a:t>Wait for sponsor to answer questions,</a:t>
+            </a:r>
+            <a:br>
+              <a:rPr lang="en-US" sz="2000" dirty="0"/>
+            </a:br>
+            <a:r>
+              <a:rPr lang="en-US" sz="2000" dirty="0"/>
+              <a:t>don’t interrupt with additional questions</a:t>
+            </a:r>
+          </a:p>
+          <a:p>
+            <a:r>
+              <a:rPr lang="en-US" sz="2000" dirty="0"/>
+              <a:t>Don’t try to provide immediate solutions,</a:t>
+            </a:r>
+            <a:br>
+              <a:rPr lang="en-US" sz="2000" dirty="0"/>
+            </a:br>
+            <a:r>
+              <a:rPr lang="en-US" sz="2000" dirty="0"/>
+              <a:t> this is still a semester long project</a:t>
+            </a:r>
+          </a:p>
+        </p:txBody>
+      </p:sp>
+      <p:pic>
+        <p:nvPicPr>
+          <p:cNvPr id="5" name="Picture 4" descr="A red sign with white text&#10;&#10;AI-generated content may be incorrect.">
+            <a:extLst>
+              <a:ext uri="{FF2B5EF4-FFF2-40B4-BE49-F238E27FC236}">
+                <a16:creationId xmlns:a16="http://schemas.microsoft.com/office/drawing/2014/main" id="{FAC8DA26-FB8D-17F9-A0EC-0C48D5D3BFCA}"/>
+              </a:ext>
+            </a:extLst>
+          </p:cNvPr>
+          <p:cNvPicPr>
+            <a:picLocks noChangeAspect="1"/>
+          </p:cNvPicPr>
+          <p:nvPr/>
+        </p:nvPicPr>
+        <p:blipFill>
+          <a:blip r:embed="rId2"/>
+          <a:stretch>
+            <a:fillRect/>
+          </a:stretch>
+        </p:blipFill>
+        <p:spPr>
+          <a:xfrm>
+            <a:off x="718961" y="1825625"/>
+            <a:ext cx="2024239" cy="2361612"/>
+          </a:xfrm>
+          <a:prstGeom prst="rect">
+            <a:avLst/>
+          </a:prstGeom>
+        </p:spPr>
+      </p:pic>
+      <p:sp>
+        <p:nvSpPr>
+          <p:cNvPr id="6" name="Slide Number Placeholder 5">
+            <a:extLst>
+              <a:ext uri="{FF2B5EF4-FFF2-40B4-BE49-F238E27FC236}">
+                <a16:creationId xmlns:a16="http://schemas.microsoft.com/office/drawing/2014/main" id="{993BC1E8-06A0-4839-F4EF-F487B818D6A6}"/>
+              </a:ext>
+            </a:extLst>
+          </p:cNvPr>
+          <p:cNvSpPr>
+            <a:spLocks noGrp="1"/>
+          </p:cNvSpPr>
+          <p:nvPr>
+            <p:ph type="sldNum" sz="quarter" idx="12"/>
+          </p:nvPr>
+        </p:nvSpPr>
+        <p:spPr/>
+        <p:txBody>
+          <a:bodyPr/>
+          <a:lstStyle/>
+          <a:p>
+            <a:fld id="{727B0ACA-53D9-FB44-A37C-A778C10B232A}" type="slidenum">
+              <a:rPr lang="en-US" smtClean="0"/>
+              <a:t>8</a:t>
+            </a:fld>
+            <a:endParaRPr lang="en-US"/>
+          </a:p>
+        </p:txBody>
+      </p:sp>
+    </p:spTree>
+    <p:extLst>
+      <p:ext uri="{BB962C8B-B14F-4D97-AF65-F5344CB8AC3E}">
+        <p14:creationId xmlns:p14="http://schemas.microsoft.com/office/powerpoint/2010/main" val="748122361"/>
+      </p:ext>
+    </p:extLst>
+  </p:cSld>
+  <p:clrMapOvr>
+    <a:masterClrMapping/>
+  </p:clrMapOvr>
+</p:sld>
+</file>
+
+<file path=ppt/slides/slide9.xml><?xml version="1.0" encoding="utf-8"?>
+<p:sld xmlns:a="http://schemas.openxmlformats.org/drawingml/2006/main" xmlns:r="http://schemas.openxmlformats.org/officeDocument/2006/relationships" xmlns:p="http://schemas.openxmlformats.org/presentationml/2006/main">
+  <p:cSld>
+    <p:bg>
+      <p:bgPr>
+        <a:solidFill>
+          <a:schemeClr val="tx2">
+            <a:lumMod val="10000"/>
+            <a:lumOff val="90000"/>
+          </a:schemeClr>
+        </a:solidFill>
+        <a:effectLst/>
+      </p:bgPr>
+    </p:bg>
+    <p:spTree>
+      <p:nvGrpSpPr>
+        <p:cNvPr id="1" name=""/>
+        <p:cNvGrpSpPr/>
+        <p:nvPr/>
+      </p:nvGrpSpPr>
+      <p:grpSpPr>
+        <a:xfrm>
+          <a:off x="0" y="0"/>
+          <a:ext cx="0" cy="0"/>
+          <a:chOff x="0" y="0"/>
+          <a:chExt cx="0" cy="0"/>
+        </a:xfrm>
+      </p:grpSpPr>
+      <p:sp>
+        <p:nvSpPr>
+          <p:cNvPr id="2" name="Title 1">
+            <a:extLst>
+              <a:ext uri="{FF2B5EF4-FFF2-40B4-BE49-F238E27FC236}">
                 <a16:creationId xmlns:a16="http://schemas.microsoft.com/office/drawing/2014/main" id="{4691A75E-4917-9F7B-79B7-F7FE43BA4C2B}"/>
               </a:ext>
             </a:extLst>
@@ -12001,7 +12231,7 @@
           <a:p>
             <a:fld id="{727B0ACA-53D9-FB44-A37C-A778C10B232A}" type="slidenum">
               <a:rPr lang="en-US" smtClean="0"/>
-              <a:t>8</a:t>
+              <a:t>9</a:t>
             </a:fld>
             <a:endParaRPr lang="en-US"/>
           </a:p>
@@ -12011,236 +12241,6 @@
     <p:extLst>
       <p:ext uri="{BB962C8B-B14F-4D97-AF65-F5344CB8AC3E}">
         <p14:creationId xmlns:p14="http://schemas.microsoft.com/office/powerpoint/2010/main" val="2557598453"/>
-      </p:ext>
-    </p:extLst>
-  </p:cSld>
-  <p:clrMapOvr>
-    <a:masterClrMapping/>
-  </p:clrMapOvr>
-</p:sld>
-</file>
-
-<file path=ppt/slides/slide9.xml><?xml version="1.0" encoding="utf-8"?>
-<p:sld xmlns:a="http://schemas.openxmlformats.org/drawingml/2006/main" xmlns:r="http://schemas.openxmlformats.org/officeDocument/2006/relationships" xmlns:p="http://schemas.openxmlformats.org/presentationml/2006/main">
-  <p:cSld>
-    <p:bg>
-      <p:bgPr>
-        <a:solidFill>
-          <a:srgbClr val="F9ECD3"/>
-        </a:solidFill>
-        <a:effectLst/>
-      </p:bgPr>
-    </p:bg>
-    <p:spTree>
-      <p:nvGrpSpPr>
-        <p:cNvPr id="1" name=""/>
-        <p:cNvGrpSpPr/>
-        <p:nvPr/>
-      </p:nvGrpSpPr>
-      <p:grpSpPr>
-        <a:xfrm>
-          <a:off x="0" y="0"/>
-          <a:ext cx="0" cy="0"/>
-          <a:chOff x="0" y="0"/>
-          <a:chExt cx="0" cy="0"/>
-        </a:xfrm>
-      </p:grpSpPr>
-      <p:pic>
-        <p:nvPicPr>
-          <p:cNvPr id="5" name="Picture 4" descr="A brain and a heart with a wire&#10;&#10;AI-generated content may be incorrect.">
-            <a:extLst>
-              <a:ext uri="{FF2B5EF4-FFF2-40B4-BE49-F238E27FC236}">
-                <a16:creationId xmlns:a16="http://schemas.microsoft.com/office/drawing/2014/main" id="{01327E16-8601-998E-5BD1-3C023E6070AC}"/>
-              </a:ext>
-            </a:extLst>
-          </p:cNvPr>
-          <p:cNvPicPr>
-            <a:picLocks noChangeAspect="1"/>
-          </p:cNvPicPr>
-          <p:nvPr/>
-        </p:nvPicPr>
-        <p:blipFill>
-          <a:blip r:embed="rId2"/>
-          <a:stretch>
-            <a:fillRect/>
-          </a:stretch>
-        </p:blipFill>
-        <p:spPr>
-          <a:xfrm>
-            <a:off x="6739467" y="2167467"/>
-            <a:ext cx="2235200" cy="2235200"/>
-          </a:xfrm>
-          <a:prstGeom prst="rect">
-            <a:avLst/>
-          </a:prstGeom>
-        </p:spPr>
-      </p:pic>
-      <p:sp>
-        <p:nvSpPr>
-          <p:cNvPr id="2" name="Title 1">
-            <a:extLst>
-              <a:ext uri="{FF2B5EF4-FFF2-40B4-BE49-F238E27FC236}">
-                <a16:creationId xmlns:a16="http://schemas.microsoft.com/office/drawing/2014/main" id="{8B5B9239-974E-E43D-DA3A-D30875F9DF1D}"/>
-              </a:ext>
-            </a:extLst>
-          </p:cNvPr>
-          <p:cNvSpPr>
-            <a:spLocks noGrp="1"/>
-          </p:cNvSpPr>
-          <p:nvPr>
-            <p:ph type="title"/>
-          </p:nvPr>
-        </p:nvSpPr>
-        <p:spPr/>
-        <p:txBody>
-          <a:bodyPr/>
-          <a:lstStyle/>
-          <a:p>
-            <a:r>
-              <a:rPr lang="en-US" dirty="0"/>
-              <a:t>Sponsor Meeting Tips</a:t>
-            </a:r>
-          </a:p>
-        </p:txBody>
-      </p:sp>
-      <p:sp>
-        <p:nvSpPr>
-          <p:cNvPr id="3" name="Content Placeholder 2">
-            <a:extLst>
-              <a:ext uri="{FF2B5EF4-FFF2-40B4-BE49-F238E27FC236}">
-                <a16:creationId xmlns:a16="http://schemas.microsoft.com/office/drawing/2014/main" id="{7749393D-1C6E-B6F1-E74D-DF148FAF229E}"/>
-              </a:ext>
-            </a:extLst>
-          </p:cNvPr>
-          <p:cNvSpPr>
-            <a:spLocks noGrp="1"/>
-          </p:cNvSpPr>
-          <p:nvPr>
-            <p:ph idx="1"/>
-          </p:nvPr>
-        </p:nvSpPr>
-        <p:spPr/>
-        <p:txBody>
-          <a:bodyPr>
-            <a:normAutofit/>
-          </a:bodyPr>
-          <a:lstStyle/>
-          <a:p>
-            <a:pPr marL="0" indent="0">
-              <a:buNone/>
-            </a:pPr>
-            <a:r>
-              <a:rPr lang="en-US" sz="2400" b="1" dirty="0"/>
-              <a:t>Remain positive and upbeat throughout the project</a:t>
-            </a:r>
-          </a:p>
-          <a:p>
-            <a:r>
-              <a:rPr lang="en-US" sz="2000" dirty="0"/>
-              <a:t>Not everything will go perfectly,</a:t>
-            </a:r>
-            <a:br>
-              <a:rPr lang="en-US" sz="2000" dirty="0"/>
-            </a:br>
-            <a:r>
-              <a:rPr lang="en-US" sz="2000" dirty="0"/>
-              <a:t>don't expect it to and don't get down when it doesn’t.</a:t>
-            </a:r>
-          </a:p>
-          <a:p>
-            <a:r>
-              <a:rPr lang="en-US" sz="2000" dirty="0"/>
-              <a:t>Never talk bad about anyone;</a:t>
-            </a:r>
-            <a:br>
-              <a:rPr lang="en-US" sz="2000" dirty="0"/>
-            </a:br>
-            <a:r>
-              <a:rPr lang="en-US" sz="2000" dirty="0"/>
-              <a:t>sponsor, team member, instructors (especially).</a:t>
-            </a:r>
-          </a:p>
-          <a:p>
-            <a:pPr marL="0" indent="0">
-              <a:buNone/>
-            </a:pPr>
-            <a:endParaRPr lang="en-US" sz="1000" dirty="0"/>
-          </a:p>
-          <a:p>
-            <a:pPr marL="0" indent="0">
-              <a:buNone/>
-            </a:pPr>
-            <a:r>
-              <a:rPr lang="en-US" sz="2400" b="1" dirty="0"/>
-              <a:t>If someone needs to miss a meeting</a:t>
-            </a:r>
-          </a:p>
-          <a:p>
-            <a:r>
-              <a:rPr lang="en-US" sz="2000" dirty="0"/>
-              <a:t>Make sure the sponsor knows why,</a:t>
-            </a:r>
-            <a:br>
-              <a:rPr lang="en-US" sz="2000" dirty="0"/>
-            </a:br>
-            <a:r>
-              <a:rPr lang="en-US" sz="2000" dirty="0"/>
-              <a:t>explain at the start of the meeting that </a:t>
-            </a:r>
-            <a:r>
-              <a:rPr lang="en-US" sz="2000" i="1" dirty="0"/>
-              <a:t>…</a:t>
-            </a:r>
-            <a:r>
-              <a:rPr lang="en-US" sz="2000" dirty="0"/>
-              <a:t> can't make it because </a:t>
-            </a:r>
-            <a:r>
-              <a:rPr lang="en-US" sz="2000" i="1" dirty="0"/>
-              <a:t>… .</a:t>
-            </a:r>
-          </a:p>
-          <a:p>
-            <a:r>
-              <a:rPr lang="en-US" sz="2000" dirty="0"/>
-              <a:t>Make sure to follow up with person that missed to distribute information or action items!</a:t>
-            </a:r>
-          </a:p>
-        </p:txBody>
-      </p:sp>
-      <p:sp>
-        <p:nvSpPr>
-          <p:cNvPr id="6" name="Slide Number Placeholder 5">
-            <a:extLst>
-              <a:ext uri="{FF2B5EF4-FFF2-40B4-BE49-F238E27FC236}">
-                <a16:creationId xmlns:a16="http://schemas.microsoft.com/office/drawing/2014/main" id="{BE013A12-7342-CF1D-5143-DCA6D770F51F}"/>
-              </a:ext>
-            </a:extLst>
-          </p:cNvPr>
-          <p:cNvSpPr>
-            <a:spLocks noGrp="1"/>
-          </p:cNvSpPr>
-          <p:nvPr>
-            <p:ph type="sldNum" sz="quarter" idx="12"/>
-          </p:nvPr>
-        </p:nvSpPr>
-        <p:spPr/>
-        <p:txBody>
-          <a:bodyPr/>
-          <a:lstStyle/>
-          <a:p>
-            <a:fld id="{727B0ACA-53D9-FB44-A37C-A778C10B232A}" type="slidenum">
-              <a:rPr lang="en-US" smtClean="0"/>
-              <a:t>9</a:t>
-            </a:fld>
-            <a:endParaRPr lang="en-US"/>
-          </a:p>
-        </p:txBody>
-      </p:sp>
-    </p:spTree>
-    <p:extLst>
-      <p:ext uri="{BB962C8B-B14F-4D97-AF65-F5344CB8AC3E}">
-        <p14:creationId xmlns:p14="http://schemas.microsoft.com/office/powerpoint/2010/main" val="4152335880"/>
       </p:ext>
     </p:extLst>
   </p:cSld>
